--- a/docs/Prezentáció/Corelytics presentation.pptx
+++ b/docs/Prezentáció/Corelytics presentation.pptx
@@ -10,14 +10,14 @@
   <p:sldIdLst>
     <p:sldId id="256" r:id="rId2"/>
     <p:sldId id="257" r:id="rId3"/>
-    <p:sldId id="258" r:id="rId4"/>
-    <p:sldId id="259" r:id="rId5"/>
-    <p:sldId id="260" r:id="rId6"/>
-    <p:sldId id="261" r:id="rId7"/>
-    <p:sldId id="267" r:id="rId8"/>
-    <p:sldId id="262" r:id="rId9"/>
-    <p:sldId id="263" r:id="rId10"/>
-    <p:sldId id="264" r:id="rId11"/>
+    <p:sldId id="264" r:id="rId4"/>
+    <p:sldId id="258" r:id="rId5"/>
+    <p:sldId id="259" r:id="rId6"/>
+    <p:sldId id="260" r:id="rId7"/>
+    <p:sldId id="261" r:id="rId8"/>
+    <p:sldId id="267" r:id="rId9"/>
+    <p:sldId id="262" r:id="rId10"/>
+    <p:sldId id="263" r:id="rId11"/>
     <p:sldId id="265" r:id="rId12"/>
     <p:sldId id="266" r:id="rId13"/>
   </p:sldIdLst>
@@ -134,7 +134,7 @@
       </p15:sldGuideLst>
     </p:ext>
     <p:ext uri="GoogleSlidesCustomDataVersion2">
-      <go:slidesCustomData xmlns="" xmlns:mc="http://schemas.openxmlformats.org/markup-compatibility/2006" xmlns:mv="urn:schemas-microsoft-com:mac:vml" xmlns:c="http://schemas.openxmlformats.org/drawingml/2006/chart" xmlns:dgm="http://schemas.openxmlformats.org/drawingml/2006/diagram" xmlns:o="urn:schemas-microsoft-com:office:office" xmlns:v="urn:schemas-microsoft-com:vml" xmlns:pvml="urn:schemas-microsoft-com:office:powerpoint" xmlns:com="http://schemas.openxmlformats.org/drawingml/2006/compatibility" xmlns:p14="http://schemas.microsoft.com/office/powerpoint/2010/main" xmlns:p15="http://schemas.microsoft.com/office/powerpoint/2012/main" xmlns:ahyp="http://schemas.microsoft.com/office/drawing/2018/hyperlinkcolor" xmlns:go="http://customooxmlschemas.google.com/" r:id="rId17" roundtripDataSignature="AMtx7mjjDdjNFoi+xjUiqIqv79dYRrq6Dw=="/>
+      <go:slidesCustomData xmlns:go="http://customooxmlschemas.google.com/" xmlns:ahyp="http://schemas.microsoft.com/office/drawing/2018/hyperlinkcolor" xmlns:p15="http://schemas.microsoft.com/office/powerpoint/2012/main" xmlns:p14="http://schemas.microsoft.com/office/powerpoint/2010/main" xmlns:com="http://schemas.openxmlformats.org/drawingml/2006/compatibility" xmlns:pvml="urn:schemas-microsoft-com:office:powerpoint" xmlns:v="urn:schemas-microsoft-com:vml" xmlns:o="urn:schemas-microsoft-com:office:office" xmlns:dgm="http://schemas.openxmlformats.org/drawingml/2006/diagram" xmlns:c="http://schemas.openxmlformats.org/drawingml/2006/chart" xmlns:mv="urn:schemas-microsoft-com:mac:vml" xmlns:mc="http://schemas.openxmlformats.org/markup-compatibility/2006" xmlns="" r:id="rId17" roundtripDataSignature="AMtx7mjjDdjNFoi+xjUiqIqv79dYRrq6Dw=="/>
     </p:ext>
   </p:extLst>
 </p:presentation>
@@ -1010,7 +1010,7 @@
   <p:cSld>
     <p:spTree>
       <p:nvGrpSpPr>
-        <p:cNvPr id="1" name="Shape 107"/>
+        <p:cNvPr id="1" name="Shape 172"/>
         <p:cNvGrpSpPr/>
         <p:nvPr/>
       </p:nvGrpSpPr>
@@ -1024,7 +1024,7 @@
       </p:grpSpPr>
       <p:sp>
         <p:nvSpPr>
-          <p:cNvPr id="108" name="Google Shape;108;p3:notes"/>
+          <p:cNvPr id="173" name="Google Shape;173;p9:notes"/>
           <p:cNvSpPr txBox="1">
             <a:spLocks noGrp="1"/>
           </p:cNvSpPr>
@@ -1062,7 +1062,7 @@
       </p:sp>
       <p:sp>
         <p:nvSpPr>
-          <p:cNvPr id="109" name="Google Shape;109;p3:notes"/>
+          <p:cNvPr id="174" name="Google Shape;174;p9:notes"/>
           <p:cNvSpPr>
             <a:spLocks noGrp="1" noRot="1" noChangeAspect="1"/>
           </p:cNvSpPr>
@@ -1114,7 +1114,7 @@
   <p:cSld>
     <p:spTree>
       <p:nvGrpSpPr>
-        <p:cNvPr id="1" name="Shape 128"/>
+        <p:cNvPr id="1" name="Shape 107"/>
         <p:cNvGrpSpPr/>
         <p:nvPr/>
       </p:nvGrpSpPr>
@@ -1128,7 +1128,7 @@
       </p:grpSpPr>
       <p:sp>
         <p:nvSpPr>
-          <p:cNvPr id="129" name="Google Shape;129;p4:notes"/>
+          <p:cNvPr id="108" name="Google Shape;108;p3:notes"/>
           <p:cNvSpPr txBox="1">
             <a:spLocks noGrp="1"/>
           </p:cNvSpPr>
@@ -1166,7 +1166,7 @@
       </p:sp>
       <p:sp>
         <p:nvSpPr>
-          <p:cNvPr id="130" name="Google Shape;130;p4:notes"/>
+          <p:cNvPr id="109" name="Google Shape;109;p3:notes"/>
           <p:cNvSpPr>
             <a:spLocks noGrp="1" noRot="1" noChangeAspect="1"/>
           </p:cNvSpPr>
@@ -1218,7 +1218,7 @@
   <p:cSld>
     <p:spTree>
       <p:nvGrpSpPr>
-        <p:cNvPr id="1" name="Shape 148"/>
+        <p:cNvPr id="1" name="Shape 128"/>
         <p:cNvGrpSpPr/>
         <p:nvPr/>
       </p:nvGrpSpPr>
@@ -1232,7 +1232,7 @@
       </p:grpSpPr>
       <p:sp>
         <p:nvSpPr>
-          <p:cNvPr id="149" name="Google Shape;149;p5:notes"/>
+          <p:cNvPr id="129" name="Google Shape;129;p4:notes"/>
           <p:cNvSpPr txBox="1">
             <a:spLocks noGrp="1"/>
           </p:cNvSpPr>
@@ -1270,7 +1270,7 @@
       </p:sp>
       <p:sp>
         <p:nvSpPr>
-          <p:cNvPr id="150" name="Google Shape;150;p5:notes"/>
+          <p:cNvPr id="130" name="Google Shape;130;p4:notes"/>
           <p:cNvSpPr>
             <a:spLocks noGrp="1" noRot="1" noChangeAspect="1"/>
           </p:cNvSpPr>
@@ -1322,7 +1322,7 @@
   <p:cSld>
     <p:spTree>
       <p:nvGrpSpPr>
-        <p:cNvPr id="1" name="Shape 154"/>
+        <p:cNvPr id="1" name="Shape 148"/>
         <p:cNvGrpSpPr/>
         <p:nvPr/>
       </p:nvGrpSpPr>
@@ -1336,7 +1336,7 @@
       </p:grpSpPr>
       <p:sp>
         <p:nvSpPr>
-          <p:cNvPr id="155" name="Google Shape;155;p6:notes"/>
+          <p:cNvPr id="149" name="Google Shape;149;p5:notes"/>
           <p:cNvSpPr txBox="1">
             <a:spLocks noGrp="1"/>
           </p:cNvSpPr>
@@ -1374,7 +1374,7 @@
       </p:sp>
       <p:sp>
         <p:nvSpPr>
-          <p:cNvPr id="156" name="Google Shape;156;p6:notes"/>
+          <p:cNvPr id="150" name="Google Shape;150;p5:notes"/>
           <p:cNvSpPr>
             <a:spLocks noGrp="1" noRot="1" noChangeAspect="1"/>
           </p:cNvSpPr>
@@ -1426,7 +1426,7 @@
   <p:cSld>
     <p:spTree>
       <p:nvGrpSpPr>
-        <p:cNvPr id="1" name="Shape 160"/>
+        <p:cNvPr id="1" name="Shape 154"/>
         <p:cNvGrpSpPr/>
         <p:nvPr/>
       </p:nvGrpSpPr>
@@ -1440,7 +1440,7 @@
       </p:grpSpPr>
       <p:sp>
         <p:nvSpPr>
-          <p:cNvPr id="161" name="Google Shape;161;p7:notes"/>
+          <p:cNvPr id="155" name="Google Shape;155;p6:notes"/>
           <p:cNvSpPr txBox="1">
             <a:spLocks noGrp="1"/>
           </p:cNvSpPr>
@@ -1478,7 +1478,7 @@
       </p:sp>
       <p:sp>
         <p:nvSpPr>
-          <p:cNvPr id="162" name="Google Shape;162;p7:notes"/>
+          <p:cNvPr id="156" name="Google Shape;156;p6:notes"/>
           <p:cNvSpPr>
             <a:spLocks noGrp="1" noRot="1" noChangeAspect="1"/>
           </p:cNvSpPr>
@@ -1530,7 +1530,7 @@
   <p:cSld>
     <p:spTree>
       <p:nvGrpSpPr>
-        <p:cNvPr id="1" name="Shape 166"/>
+        <p:cNvPr id="1" name="Shape 160"/>
         <p:cNvGrpSpPr/>
         <p:nvPr/>
       </p:nvGrpSpPr>
@@ -1544,7 +1544,7 @@
       </p:grpSpPr>
       <p:sp>
         <p:nvSpPr>
-          <p:cNvPr id="167" name="Google Shape;167;p8:notes"/>
+          <p:cNvPr id="161" name="Google Shape;161;p7:notes"/>
           <p:cNvSpPr txBox="1">
             <a:spLocks noGrp="1"/>
           </p:cNvSpPr>
@@ -1582,7 +1582,7 @@
       </p:sp>
       <p:sp>
         <p:nvSpPr>
-          <p:cNvPr id="168" name="Google Shape;168;p8:notes"/>
+          <p:cNvPr id="162" name="Google Shape;162;p7:notes"/>
           <p:cNvSpPr>
             <a:spLocks noGrp="1" noRot="1" noChangeAspect="1"/>
           </p:cNvSpPr>
@@ -1634,7 +1634,7 @@
   <p:cSld>
     <p:spTree>
       <p:nvGrpSpPr>
-        <p:cNvPr id="1" name="Shape 172"/>
+        <p:cNvPr id="1" name="Shape 166"/>
         <p:cNvGrpSpPr/>
         <p:nvPr/>
       </p:nvGrpSpPr>
@@ -1648,7 +1648,7 @@
       </p:grpSpPr>
       <p:sp>
         <p:nvSpPr>
-          <p:cNvPr id="173" name="Google Shape;173;p9:notes"/>
+          <p:cNvPr id="167" name="Google Shape;167;p8:notes"/>
           <p:cNvSpPr txBox="1">
             <a:spLocks noGrp="1"/>
           </p:cNvSpPr>
@@ -1686,7 +1686,7 @@
       </p:sp>
       <p:sp>
         <p:nvSpPr>
-          <p:cNvPr id="174" name="Google Shape;174;p9:notes"/>
+          <p:cNvPr id="168" name="Google Shape;168;p8:notes"/>
           <p:cNvSpPr>
             <a:spLocks noGrp="1" noRot="1" noChangeAspect="1"/>
           </p:cNvSpPr>
@@ -5745,7 +5745,7 @@
   <p:cSld>
     <p:spTree>
       <p:nvGrpSpPr>
-        <p:cNvPr id="1" name="Shape 175"/>
+        <p:cNvPr id="1" name="Shape 169"/>
         <p:cNvGrpSpPr/>
         <p:nvPr/>
       </p:nvGrpSpPr>
@@ -5759,7 +5759,7 @@
       </p:grpSpPr>
       <p:sp>
         <p:nvSpPr>
-          <p:cNvPr id="176" name="Google Shape;176;p9"/>
+          <p:cNvPr id="170" name="Google Shape;170;p8"/>
           <p:cNvSpPr txBox="1">
             <a:spLocks noGrp="1"/>
           </p:cNvSpPr>
@@ -5800,7 +5800,7 @@
               <a:buNone/>
             </a:pPr>
             <a:r>
-              <a:rPr lang="hu-HU" sz="4400" i="0" u="none" strike="noStrike" dirty="0">
+              <a:rPr lang="hu-HU" dirty="0">
                 <a:solidFill>
                   <a:srgbClr val="000000"/>
                 </a:solidFill>
@@ -5809,7 +5809,19 @@
                 <a:cs typeface="Cambria"/>
                 <a:sym typeface="Cambria"/>
               </a:rPr>
-              <a:t>Csapatmunka</a:t>
+              <a:t>Minőségbiztosítás (Tesztelési stratégia</a:t>
+            </a:r>
+            <a:r>
+              <a:rPr lang="hu-HU" sz="4400" i="0" u="none" strike="noStrike" dirty="0">
+                <a:solidFill>
+                  <a:srgbClr val="000000"/>
+                </a:solidFill>
+                <a:latin typeface="Cambria"/>
+                <a:ea typeface="Cambria"/>
+                <a:cs typeface="Cambria"/>
+                <a:sym typeface="Cambria"/>
+              </a:rPr>
+              <a:t>)</a:t>
             </a:r>
             <a:endParaRPr dirty="0">
               <a:latin typeface="Cambria"/>
@@ -5822,7 +5834,7 @@
       </p:sp>
       <p:sp>
         <p:nvSpPr>
-          <p:cNvPr id="177" name="Google Shape;177;p9"/>
+          <p:cNvPr id="171" name="Google Shape;171;p8"/>
           <p:cNvSpPr txBox="1">
             <a:spLocks noGrp="1"/>
           </p:cNvSpPr>
@@ -5833,7 +5845,7 @@
         <p:spPr>
           <a:xfrm>
             <a:off x="838200" y="1825625"/>
-            <a:ext cx="4800600" cy="4351338"/>
+            <a:ext cx="4848225" cy="4351338"/>
           </a:xfrm>
           <a:prstGeom prst="rect">
             <a:avLst/>
@@ -5867,46 +5879,124 @@
               <a:buChar char="•"/>
             </a:pPr>
             <a:r>
-              <a:rPr lang="hu-HU" sz="1700" b="1" dirty="0">
+              <a:rPr lang="hu-HU" sz="1700" b="1" i="0" u="none" strike="noStrike" dirty="0">
                 <a:solidFill>
                   <a:srgbClr val="000000"/>
                 </a:solidFill>
                 <a:latin typeface="Cambria"/>
                 <a:ea typeface="Cambria"/>
-                <a:cs typeface="Arial"/>
-                <a:sym typeface="Arial"/>
-              </a:rPr>
-              <a:t>Kommunikáció</a:t>
-            </a:r>
-            <a:r>
-              <a:rPr lang="hu-HU" sz="1800" dirty="0">
-                <a:solidFill>
-                  <a:srgbClr val="000000"/>
-                </a:solidFill>
-                <a:latin typeface="Arial"/>
-                <a:cs typeface="Arial"/>
-                <a:sym typeface="Arial"/>
-              </a:rPr>
-              <a:t>: </a:t>
-            </a:r>
-            <a:r>
-              <a:rPr lang="hu-HU" sz="1700" dirty="0">
-                <a:solidFill>
-                  <a:srgbClr val="000000"/>
-                </a:solidFill>
-                <a:latin typeface="Times New Roman"/>
                 <a:cs typeface="Times New Roman"/>
                 <a:sym typeface="Arial"/>
               </a:rPr>
-              <a:t>Instagram</a:t>
-            </a:r>
+              <a:t>Backend Tesztelés:</a:t>
+            </a:r>
+            <a:r>
+              <a:rPr lang="hu-HU" sz="1700" b="0" i="0" u="none" strike="noStrike" dirty="0">
+                <a:solidFill>
+                  <a:srgbClr val="000000"/>
+                </a:solidFill>
+                <a:latin typeface="Cambria"/>
+                <a:ea typeface="Cambria"/>
+                <a:cs typeface="Times New Roman"/>
+                <a:sym typeface="Arial"/>
+              </a:rPr>
+              <a:t> </a:t>
+            </a:r>
+            <a:r>
+              <a:rPr lang="hu-HU" sz="1700" dirty="0">
+                <a:solidFill>
+                  <a:srgbClr val="000000"/>
+                </a:solidFill>
+                <a:latin typeface="Cambria"/>
+                <a:ea typeface="Cambria"/>
+                <a:cs typeface="Times New Roman"/>
+                <a:sym typeface="Arial"/>
+              </a:rPr>
+              <a:t>Jest.js</a:t>
+            </a:r>
+            <a:endParaRPr lang="hu-HU" sz="1700" dirty="0">
+              <a:latin typeface="Cambria"/>
+              <a:ea typeface="Cambria"/>
+              <a:cs typeface="Times New Roman"/>
+            </a:endParaRPr>
+          </a:p>
+          <a:p>
+            <a:pPr>
+              <a:spcBef>
+                <a:spcPts val="0"/>
+              </a:spcBef>
+              <a:buClr>
+                <a:srgbClr val="000000"/>
+              </a:buClr>
+              <a:buSzPts val="1800"/>
+              <a:buFont typeface="Arial"/>
+              <a:buChar char="•"/>
+            </a:pPr>
             <a:endParaRPr lang="hu-HU" sz="1700" dirty="0">
               <a:solidFill>
                 <a:srgbClr val="000000"/>
               </a:solidFill>
+              <a:latin typeface="Cambria"/>
+              <a:ea typeface="Cambria"/>
+              <a:cs typeface="Times New Roman"/>
+              <a:sym typeface="Arial"/>
+            </a:endParaRPr>
+          </a:p>
+          <a:p>
+            <a:pPr>
+              <a:spcBef>
+                <a:spcPts val="0"/>
+              </a:spcBef>
+              <a:buClr>
+                <a:srgbClr val="000000"/>
+              </a:buClr>
+              <a:buSzPts val="1800"/>
+              <a:buFont typeface="Arial"/>
+              <a:buChar char="•"/>
+            </a:pPr>
+            <a:r>
+              <a:rPr lang="hu-HU" sz="1700" b="1" i="0" u="none" strike="noStrike" dirty="0">
+                <a:solidFill>
+                  <a:srgbClr val="000000"/>
+                </a:solidFill>
+                <a:latin typeface="Cambria"/>
+                <a:ea typeface="Cambria"/>
+                <a:cs typeface="Times New Roman"/>
+                <a:sym typeface="Arial"/>
+              </a:rPr>
+              <a:t>Frontend Tesztelés:</a:t>
+            </a:r>
+            <a:r>
+              <a:rPr lang="hu-HU" sz="1700" b="0" i="0" u="none" strike="noStrike" dirty="0">
+                <a:solidFill>
+                  <a:srgbClr val="000000"/>
+                </a:solidFill>
+                <a:latin typeface="Cambria"/>
+                <a:ea typeface="Cambria"/>
+                <a:cs typeface="Times New Roman"/>
+                <a:sym typeface="Arial"/>
+              </a:rPr>
+              <a:t> </a:t>
+            </a:r>
+            <a:r>
+              <a:rPr lang="hu-HU" sz="1700" dirty="0">
+                <a:solidFill>
+                  <a:srgbClr val="000000"/>
+                </a:solidFill>
+                <a:latin typeface="Times New Roman"/>
+                <a:ea typeface="Cambria"/>
+                <a:cs typeface="Times New Roman"/>
+                <a:sym typeface="Arial"/>
+              </a:rPr>
+              <a:t>RobotFramework</a:t>
+            </a:r>
+            <a:endParaRPr lang="hu-HU" sz="1700" b="0" i="0" u="none" strike="noStrike" dirty="0">
+              <a:solidFill>
+                <a:srgbClr val="000000"/>
+              </a:solidFill>
               <a:latin typeface="Times New Roman" panose="02020603050405020304" pitchFamily="18" charset="0"/>
+              <a:ea typeface="Cambria"/>
               <a:cs typeface="Times New Roman" panose="02020603050405020304" pitchFamily="18" charset="0"/>
-              <a:sym typeface="Arial"/>
             </a:endParaRPr>
           </a:p>
           <a:p>
@@ -5927,46 +6017,9 @@
               <a:buFont typeface="Arial"/>
               <a:buChar char="•"/>
             </a:pPr>
-            <a:r>
-              <a:rPr lang="hu-HU" sz="1700" b="1" dirty="0">
-                <a:solidFill>
-                  <a:srgbClr val="000000"/>
-                </a:solidFill>
-                <a:latin typeface="Cambria"/>
-                <a:ea typeface="Cambria"/>
-                <a:cs typeface="Arial"/>
-                <a:sym typeface="Arial"/>
-              </a:rPr>
-              <a:t>Megosztott munka</a:t>
-            </a:r>
-            <a:r>
-              <a:rPr lang="hu-HU" sz="1800" dirty="0">
-                <a:solidFill>
-                  <a:srgbClr val="000000"/>
-                </a:solidFill>
-                <a:latin typeface="Arial"/>
-                <a:cs typeface="Arial"/>
-                <a:sym typeface="Arial"/>
-              </a:rPr>
-              <a:t>: </a:t>
-            </a:r>
-            <a:r>
-              <a:rPr lang="hu-HU" sz="1700" dirty="0" err="1">
-                <a:solidFill>
-                  <a:srgbClr val="000000"/>
-                </a:solidFill>
-                <a:latin typeface="Times New Roman"/>
-                <a:cs typeface="Times New Roman"/>
-                <a:sym typeface="Arial"/>
-              </a:rPr>
-              <a:t>Github</a:t>
-            </a:r>
-            <a:endParaRPr lang="hu-HU" sz="1700" dirty="0" err="1">
-              <a:solidFill>
-                <a:srgbClr val="000000"/>
-              </a:solidFill>
-              <a:latin typeface="Times New Roman"/>
-              <a:cs typeface="Times New Roman"/>
+            <a:endParaRPr sz="1700" dirty="0">
+              <a:latin typeface="Times New Roman" panose="02020603050405020304" pitchFamily="18" charset="0"/>
+              <a:cs typeface="Times New Roman" panose="02020603050405020304" pitchFamily="18" charset="0"/>
             </a:endParaRPr>
           </a:p>
           <a:p>
@@ -5987,115 +6040,97 @@
               <a:buFont typeface="Arial"/>
               <a:buChar char="•"/>
             </a:pPr>
-            <a:endParaRPr lang="hu-HU" sz="1800" dirty="0">
-              <a:solidFill>
-                <a:srgbClr val="000000"/>
-              </a:solidFill>
-              <a:latin typeface="Arial"/>
-              <a:cs typeface="Arial"/>
-              <a:sym typeface="Arial"/>
+            <a:r>
+              <a:rPr lang="hu-HU" sz="1700" b="1" dirty="0">
+                <a:solidFill>
+                  <a:srgbClr val="000000"/>
+                </a:solidFill>
+                <a:latin typeface="Cambria" panose="02040503050406030204" pitchFamily="18" charset="0"/>
+                <a:ea typeface="Cambria" panose="02040503050406030204" pitchFamily="18" charset="0"/>
+                <a:cs typeface="Times New Roman" panose="02020603050405020304" pitchFamily="18" charset="0"/>
+                <a:sym typeface="Arial"/>
+              </a:rPr>
+              <a:t>Cél</a:t>
+            </a:r>
+            <a:r>
+              <a:rPr lang="hu-HU" sz="1700" b="1" i="0" u="none" strike="noStrike" dirty="0">
+                <a:solidFill>
+                  <a:srgbClr val="000000"/>
+                </a:solidFill>
+                <a:latin typeface="Cambria" panose="02040503050406030204" pitchFamily="18" charset="0"/>
+                <a:ea typeface="Cambria" panose="02040503050406030204" pitchFamily="18" charset="0"/>
+                <a:cs typeface="Times New Roman" panose="02020603050405020304" pitchFamily="18" charset="0"/>
+                <a:sym typeface="Arial"/>
+              </a:rPr>
+              <a:t>:</a:t>
+            </a:r>
+            <a:r>
+              <a:rPr lang="hu-HU" sz="1700" b="0" i="0" u="none" strike="noStrike" dirty="0">
+                <a:solidFill>
+                  <a:srgbClr val="000000"/>
+                </a:solidFill>
+                <a:latin typeface="Cambria" panose="02040503050406030204" pitchFamily="18" charset="0"/>
+                <a:ea typeface="Cambria" panose="02040503050406030204" pitchFamily="18" charset="0"/>
+                <a:cs typeface="Times New Roman" panose="02020603050405020304" pitchFamily="18" charset="0"/>
+                <a:sym typeface="Arial"/>
+              </a:rPr>
+              <a:t> </a:t>
+            </a:r>
+            <a:r>
+              <a:rPr lang="hu-HU" sz="1700" b="0" i="0" u="none" strike="noStrike" dirty="0">
+                <a:solidFill>
+                  <a:srgbClr val="000000"/>
+                </a:solidFill>
+                <a:latin typeface="Times New Roman" panose="02020603050405020304" pitchFamily="18" charset="0"/>
+                <a:ea typeface="Arial"/>
+                <a:cs typeface="Times New Roman" panose="02020603050405020304" pitchFamily="18" charset="0"/>
+                <a:sym typeface="Arial"/>
+              </a:rPr>
+              <a:t>Ellenőrzött adatforgalom és hibamentes kritikus útvonalak.</a:t>
+            </a:r>
+            <a:endParaRPr sz="1700" dirty="0">
+              <a:latin typeface="Times New Roman" panose="02020603050405020304" pitchFamily="18" charset="0"/>
+              <a:cs typeface="Times New Roman" panose="02020603050405020304" pitchFamily="18" charset="0"/>
             </a:endParaRPr>
           </a:p>
         </p:txBody>
       </p:sp>
-      <p:sp>
-        <p:nvSpPr>
-          <p:cNvPr id="3" name="AutoShape 2" descr="Github Logo - Free social media icons">
+      <p:pic>
+        <p:nvPicPr>
+          <p:cNvPr id="2" name="Kép 1" descr="A képen szöveg, képernyőkép látható&#10;&#10;Lehet, hogy az AI által létrehozott tartalom helytelen.">
             <a:extLst>
               <a:ext uri="{FF2B5EF4-FFF2-40B4-BE49-F238E27FC236}">
-                <a16:creationId xmlns:a16="http://schemas.microsoft.com/office/drawing/2014/main" id="{68C5950A-838F-42FC-94E0-5B877D1E740D}"/>
+                <a16:creationId xmlns:a16="http://schemas.microsoft.com/office/drawing/2014/main" id="{25EFA4D6-020C-2244-9FEB-852C45CDFB93}"/>
               </a:ext>
             </a:extLst>
           </p:cNvPr>
-          <p:cNvSpPr>
-            <a:spLocks noChangeAspect="1" noChangeArrowheads="1"/>
-          </p:cNvSpPr>
+          <p:cNvPicPr>
+            <a:picLocks noChangeAspect="1"/>
+          </p:cNvPicPr>
           <p:nvPr/>
-        </p:nvSpPr>
-        <p:spPr bwMode="auto">
+        </p:nvPicPr>
+        <p:blipFill>
+          <a:blip r:embed="rId3"/>
+          <a:stretch>
+            <a:fillRect/>
+          </a:stretch>
+        </p:blipFill>
+        <p:spPr>
           <a:xfrm>
-            <a:off x="5943600" y="3276600"/>
-            <a:ext cx="304800" cy="304800"/>
+            <a:off x="7132264" y="1546972"/>
+            <a:ext cx="4438091" cy="2744321"/>
           </a:xfrm>
           <a:prstGeom prst="rect">
             <a:avLst/>
           </a:prstGeom>
-          <a:noFill/>
-          <a:extLst>
-            <a:ext uri="{909E8E84-426E-40DD-AFC4-6F175D3DCCD1}">
-              <a14:hiddenFill xmlns:a14="http://schemas.microsoft.com/office/drawing/2010/main">
-                <a:solidFill>
-                  <a:srgbClr val="FFFFFF"/>
-                </a:solidFill>
-              </a14:hiddenFill>
-            </a:ext>
-          </a:extLst>
-        </p:spPr>
-        <p:txBody>
-          <a:bodyPr vert="horz" wrap="square" lIns="91440" tIns="45720" rIns="91440" bIns="45720" numCol="1" anchor="t" anchorCtr="0" compatLnSpc="1">
-            <a:prstTxWarp prst="textNoShape">
-              <a:avLst/>
-            </a:prstTxWarp>
-          </a:bodyPr>
-          <a:lstStyle/>
-          <a:p>
-            <a:endParaRPr lang="hu-HU"/>
-          </a:p>
-        </p:txBody>
-      </p:sp>
-      <p:pic>
-        <p:nvPicPr>
-          <p:cNvPr id="4102" name="Picture 6" descr="Github logo - free Icon PNG, SVG">
-            <a:extLst>
-              <a:ext uri="{FF2B5EF4-FFF2-40B4-BE49-F238E27FC236}">
-                <a16:creationId xmlns:a16="http://schemas.microsoft.com/office/drawing/2014/main" id="{3B63C3EF-C721-49AC-B027-3A2807265C5F}"/>
-              </a:ext>
-            </a:extLst>
-          </p:cNvPr>
-          <p:cNvPicPr>
-            <a:picLocks noChangeAspect="1" noChangeArrowheads="1"/>
-          </p:cNvPicPr>
-          <p:nvPr/>
-        </p:nvPicPr>
-        <p:blipFill>
-          <a:blip r:embed="rId3">
-            <a:extLst>
-              <a:ext uri="{28A0092B-C50C-407E-A947-70E740481C1C}">
-                <a14:useLocalDpi xmlns:a14="http://schemas.microsoft.com/office/drawing/2010/main" val="0"/>
-              </a:ext>
-            </a:extLst>
-          </a:blip>
-          <a:srcRect/>
-          <a:stretch>
-            <a:fillRect/>
-          </a:stretch>
-        </p:blipFill>
-        <p:spPr bwMode="auto">
-          <a:xfrm>
-            <a:off x="9079657" y="3429000"/>
-            <a:ext cx="2905125" cy="2905125"/>
-          </a:xfrm>
-          <a:prstGeom prst="rect">
-            <a:avLst/>
-          </a:prstGeom>
-          <a:noFill/>
-          <a:extLst>
-            <a:ext uri="{909E8E84-426E-40DD-AFC4-6F175D3DCCD1}">
-              <a14:hiddenFill xmlns:a14="http://schemas.microsoft.com/office/drawing/2010/main">
-                <a:solidFill>
-                  <a:srgbClr val="FFFFFF"/>
-                </a:solidFill>
-              </a14:hiddenFill>
-            </a:ext>
-          </a:extLst>
         </p:spPr>
       </p:pic>
       <p:pic>
         <p:nvPicPr>
-          <p:cNvPr id="2" name="Kép 1" descr="File:Instagram logo 2022.svg - Wikimedia Commons">
+          <p:cNvPr id="3" name="Kép 2" descr="A képen szöveg, képernyőkép látható&#10;&#10;Lehet, hogy az AI által létrehozott tartalom helytelen.">
             <a:extLst>
               <a:ext uri="{FF2B5EF4-FFF2-40B4-BE49-F238E27FC236}">
-                <a16:creationId xmlns:a16="http://schemas.microsoft.com/office/drawing/2014/main" id="{BEA08648-175A-E925-8FD7-EECDBA4F5D64}"/>
+                <a16:creationId xmlns:a16="http://schemas.microsoft.com/office/drawing/2014/main" id="{64272094-1702-8443-BCC2-444B4A28DADE}"/>
               </a:ext>
             </a:extLst>
           </p:cNvPr>
@@ -6112,8 +6147,8 @@
         </p:blipFill>
         <p:spPr>
           <a:xfrm>
-            <a:off x="7436224" y="1822076"/>
-            <a:ext cx="2171700" cy="2227730"/>
+            <a:off x="4374776" y="3759853"/>
+            <a:ext cx="4977653" cy="2868146"/>
           </a:xfrm>
           <a:prstGeom prst="rect">
             <a:avLst/>
@@ -7177,6 +7212,564 @@
   <p:cSld>
     <p:spTree>
       <p:nvGrpSpPr>
+        <p:cNvPr id="1" name="Shape 175"/>
+        <p:cNvGrpSpPr/>
+        <p:nvPr/>
+      </p:nvGrpSpPr>
+      <p:grpSpPr>
+        <a:xfrm>
+          <a:off x="0" y="0"/>
+          <a:ext cx="0" cy="0"/>
+          <a:chOff x="0" y="0"/>
+          <a:chExt cx="0" cy="0"/>
+        </a:xfrm>
+      </p:grpSpPr>
+      <p:sp>
+        <p:nvSpPr>
+          <p:cNvPr id="176" name="Google Shape;176;p9"/>
+          <p:cNvSpPr txBox="1">
+            <a:spLocks noGrp="1"/>
+          </p:cNvSpPr>
+          <p:nvPr>
+            <p:ph type="title"/>
+          </p:nvPr>
+        </p:nvSpPr>
+        <p:spPr>
+          <a:prstGeom prst="rect">
+            <a:avLst/>
+          </a:prstGeom>
+          <a:noFill/>
+          <a:ln>
+            <a:noFill/>
+          </a:ln>
+        </p:spPr>
+        <p:txBody>
+          <a:bodyPr spcFirstLastPara="1" wrap="square" lIns="91425" tIns="45700" rIns="91425" bIns="45700" anchor="ctr" anchorCtr="0">
+            <a:normAutofit/>
+          </a:bodyPr>
+          <a:lstStyle/>
+          <a:p>
+            <a:pPr marL="0" lvl="0" indent="0" algn="ctr" rtl="0">
+              <a:lnSpc>
+                <a:spcPct val="90000"/>
+              </a:lnSpc>
+              <a:spcBef>
+                <a:spcPts val="0"/>
+              </a:spcBef>
+              <a:spcAft>
+                <a:spcPts val="0"/>
+              </a:spcAft>
+              <a:buClr>
+                <a:srgbClr val="000000"/>
+              </a:buClr>
+              <a:buSzPts val="4400"/>
+              <a:buFont typeface="Cambria"/>
+              <a:buNone/>
+            </a:pPr>
+            <a:r>
+              <a:rPr lang="hu-HU" sz="4400" i="0" u="none" strike="noStrike" dirty="0">
+                <a:solidFill>
+                  <a:srgbClr val="000000"/>
+                </a:solidFill>
+                <a:latin typeface="Cambria"/>
+                <a:ea typeface="Cambria"/>
+                <a:cs typeface="Cambria"/>
+                <a:sym typeface="Cambria"/>
+              </a:rPr>
+              <a:t>Csapatmunka</a:t>
+            </a:r>
+            <a:endParaRPr dirty="0">
+              <a:latin typeface="Cambria"/>
+              <a:ea typeface="Cambria"/>
+              <a:cs typeface="Cambria"/>
+              <a:sym typeface="Cambria"/>
+            </a:endParaRPr>
+          </a:p>
+        </p:txBody>
+      </p:sp>
+      <p:sp>
+        <p:nvSpPr>
+          <p:cNvPr id="177" name="Google Shape;177;p9"/>
+          <p:cNvSpPr txBox="1">
+            <a:spLocks noGrp="1"/>
+          </p:cNvSpPr>
+          <p:nvPr>
+            <p:ph idx="1"/>
+          </p:nvPr>
+        </p:nvSpPr>
+        <p:spPr>
+          <a:xfrm>
+            <a:off x="838200" y="1825625"/>
+            <a:ext cx="4800600" cy="4351338"/>
+          </a:xfrm>
+          <a:prstGeom prst="rect">
+            <a:avLst/>
+          </a:prstGeom>
+          <a:noFill/>
+          <a:ln>
+            <a:noFill/>
+          </a:ln>
+        </p:spPr>
+        <p:txBody>
+          <a:bodyPr spcFirstLastPara="1" wrap="square" lIns="91425" tIns="45700" rIns="91425" bIns="45700" anchor="t" anchorCtr="0">
+            <a:normAutofit/>
+          </a:bodyPr>
+          <a:lstStyle/>
+          <a:p>
+            <a:pPr marL="228600" lvl="0" indent="-228600" algn="l" rtl="0">
+              <a:lnSpc>
+                <a:spcPct val="90000"/>
+              </a:lnSpc>
+              <a:spcBef>
+                <a:spcPts val="0"/>
+              </a:spcBef>
+              <a:spcAft>
+                <a:spcPts val="0"/>
+              </a:spcAft>
+              <a:buClr>
+                <a:srgbClr val="000000"/>
+              </a:buClr>
+              <a:buSzPts val="1800"/>
+              <a:buFont typeface="Arial"/>
+              <a:buChar char="•"/>
+            </a:pPr>
+            <a:r>
+              <a:rPr lang="hu-HU" sz="1700" b="1" dirty="0">
+                <a:solidFill>
+                  <a:srgbClr val="000000"/>
+                </a:solidFill>
+                <a:latin typeface="Times New Roman" panose="02020603050405020304" pitchFamily="18" charset="0"/>
+                <a:ea typeface="Cambria"/>
+                <a:cs typeface="Times New Roman" panose="02020603050405020304" pitchFamily="18" charset="0"/>
+                <a:sym typeface="Arial"/>
+              </a:rPr>
+              <a:t>Kommunikáció</a:t>
+            </a:r>
+            <a:r>
+              <a:rPr lang="hu-HU" sz="1700" dirty="0">
+                <a:solidFill>
+                  <a:srgbClr val="000000"/>
+                </a:solidFill>
+                <a:latin typeface="Times New Roman" panose="02020603050405020304" pitchFamily="18" charset="0"/>
+                <a:cs typeface="Times New Roman" panose="02020603050405020304" pitchFamily="18" charset="0"/>
+                <a:sym typeface="Arial"/>
+              </a:rPr>
+              <a:t>: Instagram</a:t>
+            </a:r>
+          </a:p>
+          <a:p>
+            <a:pPr marL="228600" lvl="0" indent="-228600" algn="l" rtl="0">
+              <a:lnSpc>
+                <a:spcPct val="90000"/>
+              </a:lnSpc>
+              <a:spcBef>
+                <a:spcPts val="0"/>
+              </a:spcBef>
+              <a:spcAft>
+                <a:spcPts val="0"/>
+              </a:spcAft>
+              <a:buClr>
+                <a:srgbClr val="000000"/>
+              </a:buClr>
+              <a:buSzPts val="1800"/>
+              <a:buFont typeface="Arial"/>
+              <a:buChar char="•"/>
+            </a:pPr>
+            <a:endParaRPr lang="hu-HU" sz="1700" dirty="0">
+              <a:solidFill>
+                <a:srgbClr val="000000"/>
+              </a:solidFill>
+              <a:latin typeface="Times New Roman" panose="02020603050405020304" pitchFamily="18" charset="0"/>
+              <a:cs typeface="Times New Roman" panose="02020603050405020304" pitchFamily="18" charset="0"/>
+              <a:sym typeface="Arial"/>
+            </a:endParaRPr>
+          </a:p>
+          <a:p>
+            <a:pPr marL="228600" lvl="0" indent="-228600" algn="l" rtl="0">
+              <a:lnSpc>
+                <a:spcPct val="90000"/>
+              </a:lnSpc>
+              <a:spcBef>
+                <a:spcPts val="0"/>
+              </a:spcBef>
+              <a:spcAft>
+                <a:spcPts val="0"/>
+              </a:spcAft>
+              <a:buClr>
+                <a:srgbClr val="000000"/>
+              </a:buClr>
+              <a:buSzPts val="1800"/>
+              <a:buFont typeface="Arial"/>
+              <a:buChar char="•"/>
+            </a:pPr>
+            <a:r>
+              <a:rPr lang="hu-HU" sz="1700" b="1" dirty="0">
+                <a:solidFill>
+                  <a:srgbClr val="000000"/>
+                </a:solidFill>
+                <a:latin typeface="Times New Roman" panose="02020603050405020304" pitchFamily="18" charset="0"/>
+                <a:ea typeface="Cambria"/>
+                <a:cs typeface="Times New Roman" panose="02020603050405020304" pitchFamily="18" charset="0"/>
+                <a:sym typeface="Arial"/>
+              </a:rPr>
+              <a:t>Megosztott munka</a:t>
+            </a:r>
+            <a:r>
+              <a:rPr lang="hu-HU" sz="1700" dirty="0">
+                <a:solidFill>
+                  <a:srgbClr val="000000"/>
+                </a:solidFill>
+                <a:latin typeface="Times New Roman" panose="02020603050405020304" pitchFamily="18" charset="0"/>
+                <a:cs typeface="Times New Roman" panose="02020603050405020304" pitchFamily="18" charset="0"/>
+                <a:sym typeface="Arial"/>
+              </a:rPr>
+              <a:t>: </a:t>
+            </a:r>
+            <a:r>
+              <a:rPr lang="hu-HU" sz="1700" dirty="0" err="1">
+                <a:solidFill>
+                  <a:srgbClr val="000000"/>
+                </a:solidFill>
+                <a:latin typeface="Times New Roman" panose="02020603050405020304" pitchFamily="18" charset="0"/>
+                <a:cs typeface="Times New Roman" panose="02020603050405020304" pitchFamily="18" charset="0"/>
+                <a:sym typeface="Arial"/>
+              </a:rPr>
+              <a:t>Github</a:t>
+            </a:r>
+            <a:endParaRPr lang="hu-HU" sz="1700" dirty="0" err="1">
+              <a:solidFill>
+                <a:srgbClr val="000000"/>
+              </a:solidFill>
+              <a:latin typeface="Times New Roman" panose="02020603050405020304" pitchFamily="18" charset="0"/>
+              <a:cs typeface="Times New Roman" panose="02020603050405020304" pitchFamily="18" charset="0"/>
+            </a:endParaRPr>
+          </a:p>
+          <a:p>
+            <a:pPr marL="228600" lvl="0" indent="-228600" algn="l" rtl="0">
+              <a:lnSpc>
+                <a:spcPct val="90000"/>
+              </a:lnSpc>
+              <a:spcBef>
+                <a:spcPts val="0"/>
+              </a:spcBef>
+              <a:spcAft>
+                <a:spcPts val="0"/>
+              </a:spcAft>
+              <a:buClr>
+                <a:srgbClr val="000000"/>
+              </a:buClr>
+              <a:buSzPts val="1800"/>
+              <a:buFont typeface="Arial"/>
+              <a:buChar char="•"/>
+            </a:pPr>
+            <a:endParaRPr lang="hu-HU" sz="1700" dirty="0">
+              <a:solidFill>
+                <a:srgbClr val="000000"/>
+              </a:solidFill>
+              <a:latin typeface="Times New Roman" panose="02020603050405020304" pitchFamily="18" charset="0"/>
+              <a:cs typeface="Times New Roman" panose="02020603050405020304" pitchFamily="18" charset="0"/>
+              <a:sym typeface="Arial"/>
+            </a:endParaRPr>
+          </a:p>
+          <a:p>
+            <a:pPr marL="228600" lvl="0" indent="-228600" algn="l" rtl="0">
+              <a:lnSpc>
+                <a:spcPct val="90000"/>
+              </a:lnSpc>
+              <a:spcBef>
+                <a:spcPts val="0"/>
+              </a:spcBef>
+              <a:spcAft>
+                <a:spcPts val="0"/>
+              </a:spcAft>
+              <a:buClr>
+                <a:srgbClr val="000000"/>
+              </a:buClr>
+              <a:buSzPts val="1800"/>
+              <a:buFont typeface="Arial"/>
+              <a:buChar char="•"/>
+            </a:pPr>
+            <a:r>
+              <a:rPr lang="hu-HU" sz="1700" b="1" dirty="0">
+                <a:solidFill>
+                  <a:srgbClr val="000000"/>
+                </a:solidFill>
+                <a:latin typeface="Times New Roman" panose="02020603050405020304" pitchFamily="18" charset="0"/>
+                <a:cs typeface="Times New Roman" panose="02020603050405020304" pitchFamily="18" charset="0"/>
+                <a:sym typeface="Arial"/>
+              </a:rPr>
+              <a:t>Backend &amp; API</a:t>
+            </a:r>
+            <a:r>
+              <a:rPr lang="hu-HU" sz="1700" dirty="0">
+                <a:solidFill>
+                  <a:srgbClr val="000000"/>
+                </a:solidFill>
+                <a:latin typeface="Times New Roman" panose="02020603050405020304" pitchFamily="18" charset="0"/>
+                <a:cs typeface="Times New Roman" panose="02020603050405020304" pitchFamily="18" charset="0"/>
+                <a:sym typeface="Arial"/>
+              </a:rPr>
+              <a:t>: </a:t>
+            </a:r>
+            <a:r>
+              <a:rPr lang="hu-HU" sz="1700" dirty="0" err="1">
+                <a:solidFill>
+                  <a:srgbClr val="000000"/>
+                </a:solidFill>
+                <a:latin typeface="Times New Roman" panose="02020603050405020304" pitchFamily="18" charset="0"/>
+                <a:cs typeface="Times New Roman" panose="02020603050405020304" pitchFamily="18" charset="0"/>
+                <a:sym typeface="Arial"/>
+              </a:rPr>
+              <a:t>Gubek</a:t>
+            </a:r>
+            <a:r>
+              <a:rPr lang="hu-HU" sz="1700" dirty="0">
+                <a:solidFill>
+                  <a:srgbClr val="000000"/>
+                </a:solidFill>
+                <a:latin typeface="Times New Roman" panose="02020603050405020304" pitchFamily="18" charset="0"/>
+                <a:cs typeface="Times New Roman" panose="02020603050405020304" pitchFamily="18" charset="0"/>
+                <a:sym typeface="Arial"/>
+              </a:rPr>
+              <a:t>-Szabó Tamás</a:t>
+            </a:r>
+          </a:p>
+          <a:p>
+            <a:pPr marL="228600" lvl="0" indent="-228600" algn="l" rtl="0">
+              <a:lnSpc>
+                <a:spcPct val="90000"/>
+              </a:lnSpc>
+              <a:spcBef>
+                <a:spcPts val="0"/>
+              </a:spcBef>
+              <a:spcAft>
+                <a:spcPts val="0"/>
+              </a:spcAft>
+              <a:buClr>
+                <a:srgbClr val="000000"/>
+              </a:buClr>
+              <a:buSzPts val="1800"/>
+              <a:buFont typeface="Arial"/>
+              <a:buChar char="•"/>
+            </a:pPr>
+            <a:endParaRPr lang="hu-HU" sz="1700" b="1" dirty="0">
+              <a:solidFill>
+                <a:srgbClr val="000000"/>
+              </a:solidFill>
+              <a:latin typeface="Times New Roman" panose="02020603050405020304" pitchFamily="18" charset="0"/>
+              <a:cs typeface="Times New Roman" panose="02020603050405020304" pitchFamily="18" charset="0"/>
+              <a:sym typeface="Arial"/>
+            </a:endParaRPr>
+          </a:p>
+          <a:p>
+            <a:pPr marL="228600" lvl="0" indent="-228600" algn="l" rtl="0">
+              <a:lnSpc>
+                <a:spcPct val="90000"/>
+              </a:lnSpc>
+              <a:spcBef>
+                <a:spcPts val="0"/>
+              </a:spcBef>
+              <a:spcAft>
+                <a:spcPts val="0"/>
+              </a:spcAft>
+              <a:buClr>
+                <a:srgbClr val="000000"/>
+              </a:buClr>
+              <a:buSzPts val="1800"/>
+              <a:buFont typeface="Arial"/>
+              <a:buChar char="•"/>
+            </a:pPr>
+            <a:r>
+              <a:rPr lang="hu-HU" sz="1700" b="1" dirty="0">
+                <a:solidFill>
+                  <a:srgbClr val="000000"/>
+                </a:solidFill>
+                <a:latin typeface="Times New Roman" panose="02020603050405020304" pitchFamily="18" charset="0"/>
+                <a:cs typeface="Times New Roman" panose="02020603050405020304" pitchFamily="18" charset="0"/>
+                <a:sym typeface="Arial"/>
+              </a:rPr>
+              <a:t>Frontend &amp; Dokumentumok</a:t>
+            </a:r>
+            <a:r>
+              <a:rPr lang="hu-HU" sz="1700" dirty="0">
+                <a:solidFill>
+                  <a:srgbClr val="000000"/>
+                </a:solidFill>
+                <a:latin typeface="Times New Roman" panose="02020603050405020304" pitchFamily="18" charset="0"/>
+                <a:cs typeface="Times New Roman" panose="02020603050405020304" pitchFamily="18" charset="0"/>
+                <a:sym typeface="Arial"/>
+              </a:rPr>
+              <a:t>: </a:t>
+            </a:r>
+            <a:r>
+              <a:rPr lang="hu-HU" sz="1700">
+                <a:solidFill>
+                  <a:srgbClr val="000000"/>
+                </a:solidFill>
+                <a:latin typeface="Times New Roman" panose="02020603050405020304" pitchFamily="18" charset="0"/>
+                <a:cs typeface="Times New Roman" panose="02020603050405020304" pitchFamily="18" charset="0"/>
+                <a:sym typeface="Arial"/>
+              </a:rPr>
+              <a:t>Mészáros Imre</a:t>
+            </a:r>
+            <a:endParaRPr lang="hu-HU" sz="1700" b="1" dirty="0">
+              <a:solidFill>
+                <a:srgbClr val="000000"/>
+              </a:solidFill>
+              <a:latin typeface="Times New Roman" panose="02020603050405020304" pitchFamily="18" charset="0"/>
+              <a:cs typeface="Times New Roman" panose="02020603050405020304" pitchFamily="18" charset="0"/>
+              <a:sym typeface="Arial"/>
+            </a:endParaRPr>
+          </a:p>
+        </p:txBody>
+      </p:sp>
+      <p:sp>
+        <p:nvSpPr>
+          <p:cNvPr id="3" name="AutoShape 2" descr="Github Logo - Free social media icons">
+            <a:extLst>
+              <a:ext uri="{FF2B5EF4-FFF2-40B4-BE49-F238E27FC236}">
+                <a16:creationId xmlns:a16="http://schemas.microsoft.com/office/drawing/2014/main" id="{68C5950A-838F-42FC-94E0-5B877D1E740D}"/>
+              </a:ext>
+            </a:extLst>
+          </p:cNvPr>
+          <p:cNvSpPr>
+            <a:spLocks noChangeAspect="1" noChangeArrowheads="1"/>
+          </p:cNvSpPr>
+          <p:nvPr/>
+        </p:nvSpPr>
+        <p:spPr bwMode="auto">
+          <a:xfrm>
+            <a:off x="5943600" y="3276600"/>
+            <a:ext cx="304800" cy="304800"/>
+          </a:xfrm>
+          <a:prstGeom prst="rect">
+            <a:avLst/>
+          </a:prstGeom>
+          <a:noFill/>
+          <a:extLst>
+            <a:ext uri="{909E8E84-426E-40DD-AFC4-6F175D3DCCD1}">
+              <a14:hiddenFill xmlns:a14="http://schemas.microsoft.com/office/drawing/2010/main">
+                <a:solidFill>
+                  <a:srgbClr val="FFFFFF"/>
+                </a:solidFill>
+              </a14:hiddenFill>
+            </a:ext>
+          </a:extLst>
+        </p:spPr>
+        <p:txBody>
+          <a:bodyPr vert="horz" wrap="square" lIns="91440" tIns="45720" rIns="91440" bIns="45720" numCol="1" anchor="t" anchorCtr="0" compatLnSpc="1">
+            <a:prstTxWarp prst="textNoShape">
+              <a:avLst/>
+            </a:prstTxWarp>
+          </a:bodyPr>
+          <a:lstStyle/>
+          <a:p>
+            <a:endParaRPr lang="hu-HU"/>
+          </a:p>
+        </p:txBody>
+      </p:sp>
+      <p:pic>
+        <p:nvPicPr>
+          <p:cNvPr id="4102" name="Picture 6" descr="Github logo - free Icon PNG, SVG">
+            <a:extLst>
+              <a:ext uri="{FF2B5EF4-FFF2-40B4-BE49-F238E27FC236}">
+                <a16:creationId xmlns:a16="http://schemas.microsoft.com/office/drawing/2014/main" id="{3B63C3EF-C721-49AC-B027-3A2807265C5F}"/>
+              </a:ext>
+            </a:extLst>
+          </p:cNvPr>
+          <p:cNvPicPr>
+            <a:picLocks noChangeAspect="1" noChangeArrowheads="1"/>
+          </p:cNvPicPr>
+          <p:nvPr/>
+        </p:nvPicPr>
+        <p:blipFill>
+          <a:blip r:embed="rId3">
+            <a:extLst>
+              <a:ext uri="{28A0092B-C50C-407E-A947-70E740481C1C}">
+                <a14:useLocalDpi xmlns:a14="http://schemas.microsoft.com/office/drawing/2010/main" val="0"/>
+              </a:ext>
+            </a:extLst>
+          </a:blip>
+          <a:srcRect/>
+          <a:stretch>
+            <a:fillRect/>
+          </a:stretch>
+        </p:blipFill>
+        <p:spPr bwMode="auto">
+          <a:xfrm>
+            <a:off x="9079657" y="3429000"/>
+            <a:ext cx="2905125" cy="2905125"/>
+          </a:xfrm>
+          <a:prstGeom prst="rect">
+            <a:avLst/>
+          </a:prstGeom>
+          <a:noFill/>
+          <a:extLst>
+            <a:ext uri="{909E8E84-426E-40DD-AFC4-6F175D3DCCD1}">
+              <a14:hiddenFill xmlns:a14="http://schemas.microsoft.com/office/drawing/2010/main">
+                <a:solidFill>
+                  <a:srgbClr val="FFFFFF"/>
+                </a:solidFill>
+              </a14:hiddenFill>
+            </a:ext>
+          </a:extLst>
+        </p:spPr>
+      </p:pic>
+      <p:pic>
+        <p:nvPicPr>
+          <p:cNvPr id="2" name="Kép 1" descr="File:Instagram logo 2022.svg - Wikimedia Commons">
+            <a:extLst>
+              <a:ext uri="{FF2B5EF4-FFF2-40B4-BE49-F238E27FC236}">
+                <a16:creationId xmlns:a16="http://schemas.microsoft.com/office/drawing/2014/main" id="{BEA08648-175A-E925-8FD7-EECDBA4F5D64}"/>
+              </a:ext>
+            </a:extLst>
+          </p:cNvPr>
+          <p:cNvPicPr>
+            <a:picLocks noChangeAspect="1"/>
+          </p:cNvPicPr>
+          <p:nvPr/>
+        </p:nvPicPr>
+        <p:blipFill>
+          <a:blip r:embed="rId4"/>
+          <a:stretch>
+            <a:fillRect/>
+          </a:stretch>
+        </p:blipFill>
+        <p:spPr>
+          <a:xfrm>
+            <a:off x="7436224" y="1822076"/>
+            <a:ext cx="2171700" cy="2227730"/>
+          </a:xfrm>
+          <a:prstGeom prst="rect">
+            <a:avLst/>
+          </a:prstGeom>
+        </p:spPr>
+      </p:pic>
+    </p:spTree>
+  </p:cSld>
+  <p:clrMapOvr>
+    <a:masterClrMapping/>
+  </p:clrMapOvr>
+  <mc:AlternateContent xmlns:mc="http://schemas.openxmlformats.org/markup-compatibility/2006" xmlns:p159="http://schemas.microsoft.com/office/powerpoint/2015/09/main">
+    <mc:Choice Requires="p159">
+      <p:transition xmlns:p14="http://schemas.microsoft.com/office/powerpoint/2010/main" spd="slow" p14:dur="2000">
+        <p159:morph option="byObject"/>
+      </p:transition>
+    </mc:Choice>
+    <mc:Fallback xmlns="">
+      <p:transition spd="slow">
+        <p:fade/>
+      </p:transition>
+    </mc:Fallback>
+  </mc:AlternateContent>
+</p:sld>
+</file>
+
+<file path=ppt/slides/slide4.xml><?xml version="1.0" encoding="utf-8"?>
+<p:sld xmlns:a="http://schemas.openxmlformats.org/drawingml/2006/main" xmlns:r="http://schemas.openxmlformats.org/officeDocument/2006/relationships" xmlns:p="http://schemas.openxmlformats.org/presentationml/2006/main">
+  <p:cSld>
+    <p:spTree>
+      <p:nvGrpSpPr>
         <p:cNvPr id="1" name="Shape 110"/>
         <p:cNvGrpSpPr/>
         <p:nvPr/>
@@ -7658,7 +8251,7 @@
 </p:sld>
 </file>
 
-<file path=ppt/slides/slide4.xml><?xml version="1.0" encoding="utf-8"?>
+<file path=ppt/slides/slide5.xml><?xml version="1.0" encoding="utf-8"?>
 <p:sld xmlns:a="http://schemas.openxmlformats.org/drawingml/2006/main" xmlns:r="http://schemas.openxmlformats.org/officeDocument/2006/relationships" xmlns:p="http://schemas.openxmlformats.org/presentationml/2006/main">
   <p:cSld>
     <p:spTree>
@@ -8433,7 +9026,7 @@
 </p:sld>
 </file>
 
-<file path=ppt/slides/slide5.xml><?xml version="1.0" encoding="utf-8"?>
+<file path=ppt/slides/slide6.xml><?xml version="1.0" encoding="utf-8"?>
 <p:sld xmlns:a="http://schemas.openxmlformats.org/drawingml/2006/main" xmlns:r="http://schemas.openxmlformats.org/officeDocument/2006/relationships" xmlns:p="http://schemas.openxmlformats.org/presentationml/2006/main">
   <p:cSld>
     <p:spTree>
@@ -8892,7 +9485,7 @@
 </p:sld>
 </file>
 
-<file path=ppt/slides/slide6.xml><?xml version="1.0" encoding="utf-8"?>
+<file path=ppt/slides/slide7.xml><?xml version="1.0" encoding="utf-8"?>
 <p:sld xmlns:a="http://schemas.openxmlformats.org/drawingml/2006/main" xmlns:r="http://schemas.openxmlformats.org/officeDocument/2006/relationships" xmlns:p="http://schemas.openxmlformats.org/presentationml/2006/main">
   <p:cSld>
     <p:spTree>
@@ -9304,7 +9897,7 @@
 </p:sld>
 </file>
 
-<file path=ppt/slides/slide7.xml><?xml version="1.0" encoding="utf-8"?>
+<file path=ppt/slides/slide8.xml><?xml version="1.0" encoding="utf-8"?>
 <p:sld xmlns:a="http://schemas.openxmlformats.org/drawingml/2006/main" xmlns:r="http://schemas.openxmlformats.org/officeDocument/2006/relationships" xmlns:p="http://schemas.openxmlformats.org/presentationml/2006/main">
   <p:cSld>
     <p:spTree>
@@ -9538,7 +10131,7 @@
 </p:sld>
 </file>
 
-<file path=ppt/slides/slide8.xml><?xml version="1.0" encoding="utf-8"?>
+<file path=ppt/slides/slide9.xml><?xml version="1.0" encoding="utf-8"?>
 <p:sld xmlns:a="http://schemas.openxmlformats.org/drawingml/2006/main" xmlns:r="http://schemas.openxmlformats.org/officeDocument/2006/relationships" xmlns:p="http://schemas.openxmlformats.org/presentationml/2006/main">
   <p:cSld>
     <p:spTree>
@@ -10113,441 +10706,6 @@
               </a14:hiddenFill>
             </a:ext>
           </a:extLst>
-        </p:spPr>
-      </p:pic>
-    </p:spTree>
-  </p:cSld>
-  <p:clrMapOvr>
-    <a:masterClrMapping/>
-  </p:clrMapOvr>
-  <mc:AlternateContent xmlns:mc="http://schemas.openxmlformats.org/markup-compatibility/2006" xmlns:p159="http://schemas.microsoft.com/office/powerpoint/2015/09/main">
-    <mc:Choice Requires="p159">
-      <p:transition xmlns:p14="http://schemas.microsoft.com/office/powerpoint/2010/main" spd="slow" p14:dur="2000">
-        <p159:morph option="byObject"/>
-      </p:transition>
-    </mc:Choice>
-    <mc:Fallback xmlns="">
-      <p:transition spd="slow">
-        <p:fade/>
-      </p:transition>
-    </mc:Fallback>
-  </mc:AlternateContent>
-</p:sld>
-</file>
-
-<file path=ppt/slides/slide9.xml><?xml version="1.0" encoding="utf-8"?>
-<p:sld xmlns:a="http://schemas.openxmlformats.org/drawingml/2006/main" xmlns:r="http://schemas.openxmlformats.org/officeDocument/2006/relationships" xmlns:p="http://schemas.openxmlformats.org/presentationml/2006/main">
-  <p:cSld>
-    <p:spTree>
-      <p:nvGrpSpPr>
-        <p:cNvPr id="1" name="Shape 169"/>
-        <p:cNvGrpSpPr/>
-        <p:nvPr/>
-      </p:nvGrpSpPr>
-      <p:grpSpPr>
-        <a:xfrm>
-          <a:off x="0" y="0"/>
-          <a:ext cx="0" cy="0"/>
-          <a:chOff x="0" y="0"/>
-          <a:chExt cx="0" cy="0"/>
-        </a:xfrm>
-      </p:grpSpPr>
-      <p:sp>
-        <p:nvSpPr>
-          <p:cNvPr id="170" name="Google Shape;170;p8"/>
-          <p:cNvSpPr txBox="1">
-            <a:spLocks noGrp="1"/>
-          </p:cNvSpPr>
-          <p:nvPr>
-            <p:ph type="title"/>
-          </p:nvPr>
-        </p:nvSpPr>
-        <p:spPr>
-          <a:prstGeom prst="rect">
-            <a:avLst/>
-          </a:prstGeom>
-          <a:noFill/>
-          <a:ln>
-            <a:noFill/>
-          </a:ln>
-        </p:spPr>
-        <p:txBody>
-          <a:bodyPr spcFirstLastPara="1" wrap="square" lIns="91425" tIns="45700" rIns="91425" bIns="45700" anchor="ctr" anchorCtr="0">
-            <a:normAutofit/>
-          </a:bodyPr>
-          <a:lstStyle/>
-          <a:p>
-            <a:pPr marL="0" lvl="0" indent="0" algn="ctr" rtl="0">
-              <a:lnSpc>
-                <a:spcPct val="90000"/>
-              </a:lnSpc>
-              <a:spcBef>
-                <a:spcPts val="0"/>
-              </a:spcBef>
-              <a:spcAft>
-                <a:spcPts val="0"/>
-              </a:spcAft>
-              <a:buClr>
-                <a:srgbClr val="000000"/>
-              </a:buClr>
-              <a:buSzPts val="4400"/>
-              <a:buFont typeface="Cambria"/>
-              <a:buNone/>
-            </a:pPr>
-            <a:r>
-              <a:rPr lang="hu-HU" dirty="0">
-                <a:solidFill>
-                  <a:srgbClr val="000000"/>
-                </a:solidFill>
-                <a:latin typeface="Cambria"/>
-                <a:ea typeface="Cambria"/>
-                <a:cs typeface="Cambria"/>
-                <a:sym typeface="Cambria"/>
-              </a:rPr>
-              <a:t>Minőségbiztosítás (Tesztelési stratégia</a:t>
-            </a:r>
-            <a:r>
-              <a:rPr lang="hu-HU" sz="4400" i="0" u="none" strike="noStrike" dirty="0">
-                <a:solidFill>
-                  <a:srgbClr val="000000"/>
-                </a:solidFill>
-                <a:latin typeface="Cambria"/>
-                <a:ea typeface="Cambria"/>
-                <a:cs typeface="Cambria"/>
-                <a:sym typeface="Cambria"/>
-              </a:rPr>
-              <a:t>)</a:t>
-            </a:r>
-            <a:endParaRPr dirty="0">
-              <a:latin typeface="Cambria"/>
-              <a:ea typeface="Cambria"/>
-              <a:cs typeface="Cambria"/>
-              <a:sym typeface="Cambria"/>
-            </a:endParaRPr>
-          </a:p>
-        </p:txBody>
-      </p:sp>
-      <p:sp>
-        <p:nvSpPr>
-          <p:cNvPr id="171" name="Google Shape;171;p8"/>
-          <p:cNvSpPr txBox="1">
-            <a:spLocks noGrp="1"/>
-          </p:cNvSpPr>
-          <p:nvPr>
-            <p:ph idx="1"/>
-          </p:nvPr>
-        </p:nvSpPr>
-        <p:spPr>
-          <a:xfrm>
-            <a:off x="838200" y="1825625"/>
-            <a:ext cx="4848225" cy="4351338"/>
-          </a:xfrm>
-          <a:prstGeom prst="rect">
-            <a:avLst/>
-          </a:prstGeom>
-          <a:noFill/>
-          <a:ln>
-            <a:noFill/>
-          </a:ln>
-        </p:spPr>
-        <p:txBody>
-          <a:bodyPr spcFirstLastPara="1" wrap="square" lIns="91425" tIns="45700" rIns="91425" bIns="45700" anchor="t" anchorCtr="0">
-            <a:normAutofit/>
-          </a:bodyPr>
-          <a:lstStyle/>
-          <a:p>
-            <a:pPr marL="228600" lvl="0" indent="-228600" algn="l" rtl="0">
-              <a:lnSpc>
-                <a:spcPct val="90000"/>
-              </a:lnSpc>
-              <a:spcBef>
-                <a:spcPts val="0"/>
-              </a:spcBef>
-              <a:spcAft>
-                <a:spcPts val="0"/>
-              </a:spcAft>
-              <a:buClr>
-                <a:srgbClr val="000000"/>
-              </a:buClr>
-              <a:buSzPts val="1800"/>
-              <a:buFont typeface="Arial"/>
-              <a:buChar char="•"/>
-            </a:pPr>
-            <a:r>
-              <a:rPr lang="hu-HU" sz="1700" b="1" i="0" u="none" strike="noStrike" dirty="0">
-                <a:solidFill>
-                  <a:srgbClr val="000000"/>
-                </a:solidFill>
-                <a:latin typeface="Cambria"/>
-                <a:ea typeface="Cambria"/>
-                <a:cs typeface="Times New Roman"/>
-                <a:sym typeface="Arial"/>
-              </a:rPr>
-              <a:t>Backend Tesztelés:</a:t>
-            </a:r>
-            <a:r>
-              <a:rPr lang="hu-HU" sz="1700" b="0" i="0" u="none" strike="noStrike" dirty="0">
-                <a:solidFill>
-                  <a:srgbClr val="000000"/>
-                </a:solidFill>
-                <a:latin typeface="Cambria"/>
-                <a:ea typeface="Cambria"/>
-                <a:cs typeface="Times New Roman"/>
-                <a:sym typeface="Arial"/>
-              </a:rPr>
-              <a:t> </a:t>
-            </a:r>
-            <a:r>
-              <a:rPr lang="hu-HU" sz="1700" dirty="0">
-                <a:solidFill>
-                  <a:srgbClr val="000000"/>
-                </a:solidFill>
-                <a:latin typeface="Cambria"/>
-                <a:ea typeface="Cambria"/>
-                <a:cs typeface="Times New Roman"/>
-                <a:sym typeface="Arial"/>
-              </a:rPr>
-              <a:t>Jest.js</a:t>
-            </a:r>
-            <a:endParaRPr lang="hu-HU" sz="1700" dirty="0">
-              <a:latin typeface="Cambria"/>
-              <a:ea typeface="Cambria"/>
-              <a:cs typeface="Times New Roman"/>
-            </a:endParaRPr>
-          </a:p>
-          <a:p>
-            <a:pPr>
-              <a:spcBef>
-                <a:spcPts val="0"/>
-              </a:spcBef>
-              <a:buClr>
-                <a:srgbClr val="000000"/>
-              </a:buClr>
-              <a:buSzPts val="1800"/>
-              <a:buFont typeface="Arial"/>
-              <a:buChar char="•"/>
-            </a:pPr>
-            <a:endParaRPr lang="hu-HU" sz="1700" dirty="0">
-              <a:solidFill>
-                <a:srgbClr val="000000"/>
-              </a:solidFill>
-              <a:latin typeface="Cambria"/>
-              <a:ea typeface="Cambria"/>
-              <a:cs typeface="Times New Roman"/>
-              <a:sym typeface="Arial"/>
-            </a:endParaRPr>
-          </a:p>
-          <a:p>
-            <a:pPr>
-              <a:spcBef>
-                <a:spcPts val="0"/>
-              </a:spcBef>
-              <a:buClr>
-                <a:srgbClr val="000000"/>
-              </a:buClr>
-              <a:buSzPts val="1800"/>
-              <a:buFont typeface="Arial"/>
-              <a:buChar char="•"/>
-            </a:pPr>
-            <a:r>
-              <a:rPr lang="hu-HU" sz="1700" b="1" i="0" u="none" strike="noStrike" dirty="0">
-                <a:solidFill>
-                  <a:srgbClr val="000000"/>
-                </a:solidFill>
-                <a:latin typeface="Cambria"/>
-                <a:ea typeface="Cambria"/>
-                <a:cs typeface="Times New Roman"/>
-                <a:sym typeface="Arial"/>
-              </a:rPr>
-              <a:t>Frontend Tesztelés:</a:t>
-            </a:r>
-            <a:r>
-              <a:rPr lang="hu-HU" sz="1700" b="0" i="0" u="none" strike="noStrike" dirty="0">
-                <a:solidFill>
-                  <a:srgbClr val="000000"/>
-                </a:solidFill>
-                <a:latin typeface="Cambria"/>
-                <a:ea typeface="Cambria"/>
-                <a:cs typeface="Times New Roman"/>
-                <a:sym typeface="Arial"/>
-              </a:rPr>
-              <a:t> </a:t>
-            </a:r>
-            <a:r>
-              <a:rPr lang="hu-HU" sz="1700" dirty="0">
-                <a:solidFill>
-                  <a:srgbClr val="000000"/>
-                </a:solidFill>
-                <a:latin typeface="Times New Roman"/>
-                <a:ea typeface="Cambria"/>
-                <a:cs typeface="Times New Roman"/>
-                <a:sym typeface="Arial"/>
-              </a:rPr>
-              <a:t>RobotFramework</a:t>
-            </a:r>
-            <a:endParaRPr lang="hu-HU" sz="1700" b="0" i="0" u="none" strike="noStrike" dirty="0">
-              <a:solidFill>
-                <a:srgbClr val="000000"/>
-              </a:solidFill>
-              <a:latin typeface="Times New Roman" panose="02020603050405020304" pitchFamily="18" charset="0"/>
-              <a:ea typeface="Cambria"/>
-              <a:cs typeface="Times New Roman" panose="02020603050405020304" pitchFamily="18" charset="0"/>
-            </a:endParaRPr>
-          </a:p>
-          <a:p>
-            <a:pPr marL="228600" lvl="0" indent="-228600" algn="l" rtl="0">
-              <a:lnSpc>
-                <a:spcPct val="90000"/>
-              </a:lnSpc>
-              <a:spcBef>
-                <a:spcPts val="0"/>
-              </a:spcBef>
-              <a:spcAft>
-                <a:spcPts val="0"/>
-              </a:spcAft>
-              <a:buClr>
-                <a:srgbClr val="000000"/>
-              </a:buClr>
-              <a:buSzPts val="1800"/>
-              <a:buFont typeface="Arial"/>
-              <a:buChar char="•"/>
-            </a:pPr>
-            <a:endParaRPr sz="1700" dirty="0">
-              <a:latin typeface="Times New Roman" panose="02020603050405020304" pitchFamily="18" charset="0"/>
-              <a:cs typeface="Times New Roman" panose="02020603050405020304" pitchFamily="18" charset="0"/>
-            </a:endParaRPr>
-          </a:p>
-          <a:p>
-            <a:pPr marL="228600" lvl="0" indent="-228600" algn="l" rtl="0">
-              <a:lnSpc>
-                <a:spcPct val="90000"/>
-              </a:lnSpc>
-              <a:spcBef>
-                <a:spcPts val="0"/>
-              </a:spcBef>
-              <a:spcAft>
-                <a:spcPts val="0"/>
-              </a:spcAft>
-              <a:buClr>
-                <a:srgbClr val="000000"/>
-              </a:buClr>
-              <a:buSzPts val="1800"/>
-              <a:buFont typeface="Arial"/>
-              <a:buChar char="•"/>
-            </a:pPr>
-            <a:r>
-              <a:rPr lang="hu-HU" sz="1700" b="1" dirty="0">
-                <a:solidFill>
-                  <a:srgbClr val="000000"/>
-                </a:solidFill>
-                <a:latin typeface="Cambria" panose="02040503050406030204" pitchFamily="18" charset="0"/>
-                <a:ea typeface="Cambria" panose="02040503050406030204" pitchFamily="18" charset="0"/>
-                <a:cs typeface="Times New Roman" panose="02020603050405020304" pitchFamily="18" charset="0"/>
-                <a:sym typeface="Arial"/>
-              </a:rPr>
-              <a:t>Cél</a:t>
-            </a:r>
-            <a:r>
-              <a:rPr lang="hu-HU" sz="1700" b="1" i="0" u="none" strike="noStrike" dirty="0">
-                <a:solidFill>
-                  <a:srgbClr val="000000"/>
-                </a:solidFill>
-                <a:latin typeface="Cambria" panose="02040503050406030204" pitchFamily="18" charset="0"/>
-                <a:ea typeface="Cambria" panose="02040503050406030204" pitchFamily="18" charset="0"/>
-                <a:cs typeface="Times New Roman" panose="02020603050405020304" pitchFamily="18" charset="0"/>
-                <a:sym typeface="Arial"/>
-              </a:rPr>
-              <a:t>:</a:t>
-            </a:r>
-            <a:r>
-              <a:rPr lang="hu-HU" sz="1700" b="0" i="0" u="none" strike="noStrike" dirty="0">
-                <a:solidFill>
-                  <a:srgbClr val="000000"/>
-                </a:solidFill>
-                <a:latin typeface="Cambria" panose="02040503050406030204" pitchFamily="18" charset="0"/>
-                <a:ea typeface="Cambria" panose="02040503050406030204" pitchFamily="18" charset="0"/>
-                <a:cs typeface="Times New Roman" panose="02020603050405020304" pitchFamily="18" charset="0"/>
-                <a:sym typeface="Arial"/>
-              </a:rPr>
-              <a:t> </a:t>
-            </a:r>
-            <a:r>
-              <a:rPr lang="hu-HU" sz="1700" b="0" i="0" u="none" strike="noStrike" dirty="0">
-                <a:solidFill>
-                  <a:srgbClr val="000000"/>
-                </a:solidFill>
-                <a:latin typeface="Times New Roman" panose="02020603050405020304" pitchFamily="18" charset="0"/>
-                <a:ea typeface="Arial"/>
-                <a:cs typeface="Times New Roman" panose="02020603050405020304" pitchFamily="18" charset="0"/>
-                <a:sym typeface="Arial"/>
-              </a:rPr>
-              <a:t>Ellenőrzött adatforgalom és hibamentes kritikus útvonalak.</a:t>
-            </a:r>
-            <a:endParaRPr sz="1700" dirty="0">
-              <a:latin typeface="Times New Roman" panose="02020603050405020304" pitchFamily="18" charset="0"/>
-              <a:cs typeface="Times New Roman" panose="02020603050405020304" pitchFamily="18" charset="0"/>
-            </a:endParaRPr>
-          </a:p>
-        </p:txBody>
-      </p:sp>
-      <p:pic>
-        <p:nvPicPr>
-          <p:cNvPr id="2" name="Kép 1" descr="A képen szöveg, képernyőkép látható&#10;&#10;Lehet, hogy az AI által létrehozott tartalom helytelen.">
-            <a:extLst>
-              <a:ext uri="{FF2B5EF4-FFF2-40B4-BE49-F238E27FC236}">
-                <a16:creationId xmlns:a16="http://schemas.microsoft.com/office/drawing/2014/main" id="{25EFA4D6-020C-2244-9FEB-852C45CDFB93}"/>
-              </a:ext>
-            </a:extLst>
-          </p:cNvPr>
-          <p:cNvPicPr>
-            <a:picLocks noChangeAspect="1"/>
-          </p:cNvPicPr>
-          <p:nvPr/>
-        </p:nvPicPr>
-        <p:blipFill>
-          <a:blip r:embed="rId3"/>
-          <a:stretch>
-            <a:fillRect/>
-          </a:stretch>
-        </p:blipFill>
-        <p:spPr>
-          <a:xfrm>
-            <a:off x="7132264" y="1546972"/>
-            <a:ext cx="4438091" cy="2744321"/>
-          </a:xfrm>
-          <a:prstGeom prst="rect">
-            <a:avLst/>
-          </a:prstGeom>
-        </p:spPr>
-      </p:pic>
-      <p:pic>
-        <p:nvPicPr>
-          <p:cNvPr id="3" name="Kép 2" descr="A képen szöveg, képernyőkép látható&#10;&#10;Lehet, hogy az AI által létrehozott tartalom helytelen.">
-            <a:extLst>
-              <a:ext uri="{FF2B5EF4-FFF2-40B4-BE49-F238E27FC236}">
-                <a16:creationId xmlns:a16="http://schemas.microsoft.com/office/drawing/2014/main" id="{64272094-1702-8443-BCC2-444B4A28DADE}"/>
-              </a:ext>
-            </a:extLst>
-          </p:cNvPr>
-          <p:cNvPicPr>
-            <a:picLocks noChangeAspect="1"/>
-          </p:cNvPicPr>
-          <p:nvPr/>
-        </p:nvPicPr>
-        <p:blipFill>
-          <a:blip r:embed="rId4"/>
-          <a:stretch>
-            <a:fillRect/>
-          </a:stretch>
-        </p:blipFill>
-        <p:spPr>
-          <a:xfrm>
-            <a:off x="4374776" y="3759853"/>
-            <a:ext cx="4977653" cy="2868146"/>
-          </a:xfrm>
-          <a:prstGeom prst="rect">
-            <a:avLst/>
-          </a:prstGeom>
         </p:spPr>
       </p:pic>
     </p:spTree>

--- a/docs/Prezentáció/Corelytics presentation.pptx
+++ b/docs/Prezentáció/Corelytics presentation.pptx
@@ -134,7 +134,7 @@
       </p15:sldGuideLst>
     </p:ext>
     <p:ext uri="GoogleSlidesCustomDataVersion2">
-      <go:slidesCustomData xmlns:go="http://customooxmlschemas.google.com/" xmlns:ahyp="http://schemas.microsoft.com/office/drawing/2018/hyperlinkcolor" xmlns:p15="http://schemas.microsoft.com/office/powerpoint/2012/main" xmlns:p14="http://schemas.microsoft.com/office/powerpoint/2010/main" xmlns:com="http://schemas.openxmlformats.org/drawingml/2006/compatibility" xmlns:pvml="urn:schemas-microsoft-com:office:powerpoint" xmlns:v="urn:schemas-microsoft-com:vml" xmlns:o="urn:schemas-microsoft-com:office:office" xmlns:dgm="http://schemas.openxmlformats.org/drawingml/2006/diagram" xmlns:c="http://schemas.openxmlformats.org/drawingml/2006/chart" xmlns:mv="urn:schemas-microsoft-com:mac:vml" xmlns:mc="http://schemas.openxmlformats.org/markup-compatibility/2006" xmlns="" r:id="rId17" roundtripDataSignature="AMtx7mjjDdjNFoi+xjUiqIqv79dYRrq6Dw=="/>
+      <go:slidesCustomData xmlns="" xmlns:mc="http://schemas.openxmlformats.org/markup-compatibility/2006" xmlns:mv="urn:schemas-microsoft-com:mac:vml" xmlns:c="http://schemas.openxmlformats.org/drawingml/2006/chart" xmlns:dgm="http://schemas.openxmlformats.org/drawingml/2006/diagram" xmlns:o="urn:schemas-microsoft-com:office:office" xmlns:v="urn:schemas-microsoft-com:vml" xmlns:pvml="urn:schemas-microsoft-com:office:powerpoint" xmlns:com="http://schemas.openxmlformats.org/drawingml/2006/compatibility" xmlns:p14="http://schemas.microsoft.com/office/powerpoint/2010/main" xmlns:p15="http://schemas.microsoft.com/office/powerpoint/2012/main" xmlns:ahyp="http://schemas.microsoft.com/office/drawing/2018/hyperlinkcolor" xmlns:go="http://customooxmlschemas.google.com/" r:id="rId17" roundtripDataSignature="AMtx7mjjDdjNFoi+xjUiqIqv79dYRrq6Dw=="/>
     </p:ext>
   </p:extLst>
 </p:presentation>
@@ -5903,7 +5903,7 @@
               <a:t> </a:t>
             </a:r>
             <a:r>
-              <a:rPr lang="hu-HU" sz="1700" dirty="0">
+              <a:rPr lang="hu-HU" sz="1700" dirty="0" err="1">
                 <a:solidFill>
                   <a:srgbClr val="000000"/>
                 </a:solidFill>
@@ -5912,7 +5912,7 @@
                 <a:cs typeface="Times New Roman"/>
                 <a:sym typeface="Arial"/>
               </a:rPr>
-              <a:t>Jest.js</a:t>
+              <a:t>Jest</a:t>
             </a:r>
             <a:endParaRPr lang="hu-HU" sz="1700" dirty="0">
               <a:latin typeface="Cambria"/>
@@ -8057,16 +8057,16 @@
           <a:p>
             <a:pPr algn="ctr"/>
             <a:r>
-              <a:rPr lang="hu-HU">
+              <a:rPr lang="hu-HU" dirty="0">
                 <a:solidFill>
                   <a:srgbClr val="FFFFFF"/>
                 </a:solidFill>
                 <a:ea typeface="Calibri"/>
                 <a:cs typeface="Calibri"/>
               </a:rPr>
-              <a:t>Naplózás szerkesztés</a:t>
-            </a:r>
-            <a:endParaRPr lang="hu-HU">
+              <a:t>Naplózás, szerkesztés</a:t>
+            </a:r>
+            <a:endParaRPr lang="hu-HU" dirty="0">
               <a:solidFill>
                 <a:srgbClr val="000000"/>
               </a:solidFill>
@@ -8094,7 +8094,7 @@
                 <a:ea typeface="Calibri"/>
                 <a:cs typeface="Calibri"/>
               </a:rPr>
-              <a:t> olvasás</a:t>
+              <a:t> olvasás mobilos applikációban</a:t>
             </a:r>
             <a:endParaRPr lang="hu-HU" dirty="0"/>
           </a:p>
@@ -8321,53 +8321,6 @@
                 <a:sym typeface="Cambria"/>
               </a:rPr>
               <a:t>Rendszer felépítés </a:t>
-            </a:r>
-            <a:br>
-              <a:rPr lang="hu-HU" sz="4400" i="0" u="none" strike="noStrike" dirty="0">
-                <a:solidFill>
-                  <a:srgbClr val="000000"/>
-                </a:solidFill>
-                <a:latin typeface="Cambria"/>
-                <a:ea typeface="Cambria"/>
-                <a:cs typeface="Cambria"/>
-                <a:sym typeface="Cambria"/>
-              </a:rPr>
-            </a:br>
-            <a:r>
-              <a:rPr lang="hu-HU" sz="4400" i="0" u="none" strike="noStrike" dirty="0">
-                <a:solidFill>
-                  <a:srgbClr val="000000"/>
-                </a:solidFill>
-                <a:latin typeface="Cambria"/>
-                <a:ea typeface="Cambria"/>
-                <a:cs typeface="Cambria"/>
-                <a:sym typeface="Cambria"/>
-              </a:rPr>
-              <a:t>(Modern </a:t>
-            </a:r>
-            <a:r>
-              <a:rPr lang="hu-HU" dirty="0" err="1">
-                <a:solidFill>
-                  <a:srgbClr val="000000"/>
-                </a:solidFill>
-                <a:latin typeface="Cambria"/>
-                <a:ea typeface="Cambria"/>
-                <a:cs typeface="Cambria"/>
-                <a:sym typeface="Cambria"/>
-              </a:rPr>
-              <a:t>Stack</a:t>
-            </a:r>
-            <a:r>
-              <a:rPr lang="hu-HU" sz="4400" i="0" u="none" strike="noStrike" dirty="0">
-                <a:solidFill>
-                  <a:srgbClr val="000000"/>
-                </a:solidFill>
-                <a:latin typeface="Cambria"/>
-                <a:ea typeface="Cambria"/>
-                <a:cs typeface="Cambria"/>
-                <a:sym typeface="Cambria"/>
-              </a:rPr>
-              <a:t>)</a:t>
             </a:r>
             <a:endParaRPr dirty="0">
               <a:latin typeface="Cambria"/>
@@ -8983,6 +8936,20 @@
                 </a:rPr>
                 <a:t> </a:t>
               </a:r>
+            </a:p>
+            <a:p>
+              <a:pPr algn="ctr"/>
+              <a:r>
+                <a:rPr lang="hu-HU" sz="1700" dirty="0">
+                  <a:solidFill>
+                    <a:schemeClr val="dk1"/>
+                  </a:solidFill>
+                  <a:latin typeface="Times New Roman"/>
+                  <a:ea typeface="Times New Roman"/>
+                  <a:cs typeface="Times New Roman"/>
+                </a:rPr>
+                <a:t>ORM: </a:t>
+              </a:r>
               <a:r>
                 <a:rPr lang="hu-HU" sz="1700" dirty="0" err="1">
                   <a:solidFill>
@@ -9130,7 +9097,7 @@
           </a:ln>
         </p:spPr>
         <p:txBody>
-          <a:bodyPr spcFirstLastPara="1" wrap="square" lIns="91425" tIns="45700" rIns="91425" bIns="45700" anchor="t" anchorCtr="0">
+          <a:bodyPr spcFirstLastPara="1" wrap="square" lIns="91425" tIns="45700" rIns="91425" bIns="45700" numCol="1" anchor="ctr" anchorCtr="0">
             <a:normAutofit/>
           </a:bodyPr>
           <a:lstStyle/>
@@ -9171,7 +9138,21 @@
                 <a:latin typeface="Times New Roman" panose="02020603050405020304" pitchFamily="18" charset="0"/>
                 <a:cs typeface="Times New Roman" panose="02020603050405020304" pitchFamily="18" charset="0"/>
               </a:rPr>
-              <a:t> Rétegelt logika (Kontrollerek, Szolgáltatások, Adattárak).</a:t>
+              <a:t> </a:t>
+            </a:r>
+            <a:r>
+              <a:rPr lang="hu-HU" sz="1700" dirty="0" err="1">
+                <a:latin typeface="Times New Roman" panose="02020603050405020304" pitchFamily="18" charset="0"/>
+                <a:cs typeface="Times New Roman" panose="02020603050405020304" pitchFamily="18" charset="0"/>
+              </a:rPr>
+              <a:t>Serverless</a:t>
+            </a:r>
+            <a:r>
+              <a:rPr lang="hu-HU" sz="1700" dirty="0">
+                <a:latin typeface="Times New Roman" panose="02020603050405020304" pitchFamily="18" charset="0"/>
+                <a:cs typeface="Times New Roman" panose="02020603050405020304" pitchFamily="18" charset="0"/>
+              </a:rPr>
+              <a:t> (Frontend és Backend egyben fut)</a:t>
             </a:r>
             <a:br>
               <a:rPr lang="hu-HU" sz="1800" b="0" i="0" u="none" strike="noStrike" dirty="0">
@@ -9267,7 +9248,7 @@
                 <a:latin typeface="Times New Roman"/>
                 <a:cs typeface="Times New Roman"/>
               </a:rPr>
-              <a:t>.</a:t>
+              <a:t> a szerveroldalon.</a:t>
             </a:r>
             <a:br>
               <a:rPr lang="hu-HU" sz="1800" b="0" i="0" u="none" strike="noStrike" dirty="0">
@@ -9280,7 +9261,7 @@
                 <a:sym typeface="Arial"/>
               </a:rPr>
             </a:br>
-            <a:endParaRPr lang="hu-HU" sz="1800" b="0" i="0" u="none" strike="noStrike" dirty="0">
+            <a:endParaRPr lang="hu-HU" sz="1800" dirty="0">
               <a:solidFill>
                 <a:srgbClr val="000000"/>
               </a:solidFill>
@@ -9291,101 +9272,10 @@
             </a:endParaRPr>
           </a:p>
           <a:p>
-            <a:pPr marL="228600" lvl="0" indent="-228600" algn="l" rtl="0">
-              <a:lnSpc>
-                <a:spcPct val="90000"/>
-              </a:lnSpc>
+            <a:pPr>
               <a:spcBef>
                 <a:spcPts val="0"/>
               </a:spcBef>
-              <a:spcAft>
-                <a:spcPts val="0"/>
-              </a:spcAft>
-              <a:buClr>
-                <a:srgbClr val="000000"/>
-              </a:buClr>
-              <a:buSzPts val="1800"/>
-              <a:buFont typeface="Arial"/>
-              <a:buChar char="•"/>
-            </a:pPr>
-            <a:r>
-              <a:rPr lang="hu-HU" sz="1700" b="1" dirty="0">
-                <a:latin typeface="Cambria" panose="02040503050406030204" pitchFamily="18" charset="0"/>
-                <a:ea typeface="Cambria" panose="02040503050406030204" pitchFamily="18" charset="0"/>
-              </a:rPr>
-              <a:t>Valós idő</a:t>
-            </a:r>
-            <a:r>
-              <a:rPr lang="hu-HU" sz="1700" b="1" dirty="0"/>
-              <a:t>:</a:t>
-            </a:r>
-            <a:r>
-              <a:rPr lang="hu-HU" sz="1700" dirty="0"/>
-              <a:t> </a:t>
-            </a:r>
-            <a:r>
-              <a:rPr lang="hu-HU" sz="1700" dirty="0" err="1">
-                <a:latin typeface="Times New Roman" panose="02020603050405020304" pitchFamily="18" charset="0"/>
-                <a:cs typeface="Times New Roman" panose="02020603050405020304" pitchFamily="18" charset="0"/>
-              </a:rPr>
-              <a:t>WebSocket</a:t>
-            </a:r>
-            <a:r>
-              <a:rPr lang="hu-HU" sz="1700" dirty="0">
-                <a:latin typeface="Times New Roman" panose="02020603050405020304" pitchFamily="18" charset="0"/>
-                <a:cs typeface="Times New Roman" panose="02020603050405020304" pitchFamily="18" charset="0"/>
-              </a:rPr>
-              <a:t> </a:t>
-            </a:r>
-            <a:r>
-              <a:rPr lang="hu-HU" sz="1700" dirty="0" err="1">
-                <a:latin typeface="Times New Roman" panose="02020603050405020304" pitchFamily="18" charset="0"/>
-                <a:cs typeface="Times New Roman" panose="02020603050405020304" pitchFamily="18" charset="0"/>
-              </a:rPr>
-              <a:t>Gateway</a:t>
-            </a:r>
-            <a:r>
-              <a:rPr lang="hu-HU" sz="1700" dirty="0">
-                <a:latin typeface="Times New Roman" panose="02020603050405020304" pitchFamily="18" charset="0"/>
-                <a:cs typeface="Times New Roman" panose="02020603050405020304" pitchFamily="18" charset="0"/>
-              </a:rPr>
-              <a:t> az </a:t>
-            </a:r>
-            <a:r>
-              <a:rPr lang="hu-HU" sz="1700" dirty="0" err="1">
-                <a:latin typeface="Times New Roman" panose="02020603050405020304" pitchFamily="18" charset="0"/>
-                <a:cs typeface="Times New Roman" panose="02020603050405020304" pitchFamily="18" charset="0"/>
-              </a:rPr>
-              <a:t>eseményvezérelt</a:t>
-            </a:r>
-            <a:r>
-              <a:rPr lang="hu-HU" sz="1700" dirty="0">
-                <a:latin typeface="Times New Roman" panose="02020603050405020304" pitchFamily="18" charset="0"/>
-                <a:cs typeface="Times New Roman" panose="02020603050405020304" pitchFamily="18" charset="0"/>
-              </a:rPr>
-              <a:t> frissítésekhez.</a:t>
-            </a:r>
-            <a:endParaRPr lang="hu-HU" sz="1700" b="0" i="0" u="none" strike="noStrike" dirty="0">
-              <a:solidFill>
-                <a:srgbClr val="000000"/>
-              </a:solidFill>
-              <a:latin typeface="Times New Roman" panose="02020603050405020304" pitchFamily="18" charset="0"/>
-              <a:ea typeface="Arial"/>
-              <a:cs typeface="Times New Roman" panose="02020603050405020304" pitchFamily="18" charset="0"/>
-              <a:sym typeface="Arial"/>
-            </a:endParaRPr>
-          </a:p>
-          <a:p>
-            <a:pPr marL="228600" lvl="0" indent="-228600" algn="l" rtl="0">
-              <a:lnSpc>
-                <a:spcPct val="90000"/>
-              </a:lnSpc>
-              <a:spcBef>
-                <a:spcPts val="0"/>
-              </a:spcBef>
-              <a:spcAft>
-                <a:spcPts val="0"/>
-              </a:spcAft>
               <a:buClr>
                 <a:srgbClr val="000000"/>
               </a:buClr>
@@ -10485,102 +10375,6 @@
               </a:rPr>
               <a:t>dernizált felhasználói felület, különböző képernyő méretekre.</a:t>
             </a:r>
-          </a:p>
-          <a:p>
-            <a:pPr marL="228600" lvl="0" indent="-228600" algn="l" rtl="0">
-              <a:lnSpc>
-                <a:spcPct val="90000"/>
-              </a:lnSpc>
-              <a:spcBef>
-                <a:spcPts val="0"/>
-              </a:spcBef>
-              <a:spcAft>
-                <a:spcPts val="0"/>
-              </a:spcAft>
-              <a:buClr>
-                <a:srgbClr val="000000"/>
-              </a:buClr>
-              <a:buSzPts val="1800"/>
-              <a:buFont typeface="Arial"/>
-              <a:buChar char="•"/>
-            </a:pPr>
-            <a:endParaRPr lang="hu-HU" sz="1800" b="1" dirty="0">
-              <a:solidFill>
-                <a:srgbClr val="000000"/>
-              </a:solidFill>
-              <a:latin typeface="Times New Roman" panose="02020603050405020304" pitchFamily="18" charset="0"/>
-              <a:cs typeface="Times New Roman" panose="02020603050405020304" pitchFamily="18" charset="0"/>
-              <a:sym typeface="Arial"/>
-            </a:endParaRPr>
-          </a:p>
-          <a:p>
-            <a:pPr marL="228600" lvl="0" indent="-228600" algn="l" rtl="0">
-              <a:lnSpc>
-                <a:spcPct val="90000"/>
-              </a:lnSpc>
-              <a:spcBef>
-                <a:spcPts val="0"/>
-              </a:spcBef>
-              <a:spcAft>
-                <a:spcPts val="0"/>
-              </a:spcAft>
-              <a:buClr>
-                <a:srgbClr val="000000"/>
-              </a:buClr>
-              <a:buSzPts val="1800"/>
-              <a:buFont typeface="Arial"/>
-              <a:buChar char="•"/>
-            </a:pPr>
-            <a:r>
-              <a:rPr lang="hu-HU" sz="1700" b="1" dirty="0">
-                <a:solidFill>
-                  <a:srgbClr val="000000"/>
-                </a:solidFill>
-                <a:latin typeface="Cambria" panose="02040503050406030204" pitchFamily="18" charset="0"/>
-                <a:ea typeface="Cambria" panose="02040503050406030204" pitchFamily="18" charset="0"/>
-                <a:cs typeface="Times New Roman" panose="02020603050405020304" pitchFamily="18" charset="0"/>
-                <a:sym typeface="Arial"/>
-              </a:rPr>
-              <a:t>Keretrendszer:</a:t>
-            </a:r>
-            <a:r>
-              <a:rPr lang="hu-HU" sz="1800" b="1" dirty="0">
-                <a:solidFill>
-                  <a:srgbClr val="000000"/>
-                </a:solidFill>
-                <a:latin typeface="Cambria" panose="02040503050406030204" pitchFamily="18" charset="0"/>
-                <a:ea typeface="Cambria" panose="02040503050406030204" pitchFamily="18" charset="0"/>
-                <a:cs typeface="Times New Roman" panose="02020603050405020304" pitchFamily="18" charset="0"/>
-                <a:sym typeface="Arial"/>
-              </a:rPr>
-              <a:t> </a:t>
-            </a:r>
-            <a:r>
-              <a:rPr lang="hu-HU" sz="1800" dirty="0" err="1">
-                <a:solidFill>
-                  <a:srgbClr val="000000"/>
-                </a:solidFill>
-                <a:latin typeface="Times New Roman" panose="02020603050405020304" pitchFamily="18" charset="0"/>
-                <a:cs typeface="Times New Roman" panose="02020603050405020304" pitchFamily="18" charset="0"/>
-                <a:sym typeface="Arial"/>
-              </a:rPr>
-              <a:t>React</a:t>
-            </a:r>
-            <a:r>
-              <a:rPr lang="hu-HU" sz="1800" dirty="0">
-                <a:solidFill>
-                  <a:srgbClr val="000000"/>
-                </a:solidFill>
-                <a:latin typeface="Times New Roman" panose="02020603050405020304" pitchFamily="18" charset="0"/>
-                <a:cs typeface="Times New Roman" panose="02020603050405020304" pitchFamily="18" charset="0"/>
-                <a:sym typeface="Arial"/>
-              </a:rPr>
-              <a:t> JS.</a:t>
-            </a:r>
-            <a:endParaRPr dirty="0">
-              <a:latin typeface="Times New Roman" panose="02020603050405020304" pitchFamily="18" charset="0"/>
-              <a:cs typeface="Times New Roman" panose="02020603050405020304" pitchFamily="18" charset="0"/>
-            </a:endParaRPr>
           </a:p>
         </p:txBody>
       </p:sp>

--- a/docs/Prezentáció/Corelytics presentation.pptx
+++ b/docs/Prezentáció/Corelytics presentation.pptx
@@ -134,7 +134,7 @@
       </p15:sldGuideLst>
     </p:ext>
     <p:ext uri="GoogleSlidesCustomDataVersion2">
-      <go:slidesCustomData xmlns="" xmlns:mc="http://schemas.openxmlformats.org/markup-compatibility/2006" xmlns:mv="urn:schemas-microsoft-com:mac:vml" xmlns:c="http://schemas.openxmlformats.org/drawingml/2006/chart" xmlns:dgm="http://schemas.openxmlformats.org/drawingml/2006/diagram" xmlns:o="urn:schemas-microsoft-com:office:office" xmlns:v="urn:schemas-microsoft-com:vml" xmlns:pvml="urn:schemas-microsoft-com:office:powerpoint" xmlns:com="http://schemas.openxmlformats.org/drawingml/2006/compatibility" xmlns:p14="http://schemas.microsoft.com/office/powerpoint/2010/main" xmlns:p15="http://schemas.microsoft.com/office/powerpoint/2012/main" xmlns:ahyp="http://schemas.microsoft.com/office/drawing/2018/hyperlinkcolor" xmlns:go="http://customooxmlschemas.google.com/" r:id="rId17" roundtripDataSignature="AMtx7mjjDdjNFoi+xjUiqIqv79dYRrq6Dw=="/>
+      <go:slidesCustomData xmlns:go="http://customooxmlschemas.google.com/" xmlns:ahyp="http://schemas.microsoft.com/office/drawing/2018/hyperlinkcolor" xmlns:p15="http://schemas.microsoft.com/office/powerpoint/2012/main" xmlns:p14="http://schemas.microsoft.com/office/powerpoint/2010/main" xmlns:com="http://schemas.openxmlformats.org/drawingml/2006/compatibility" xmlns:pvml="urn:schemas-microsoft-com:office:powerpoint" xmlns:v="urn:schemas-microsoft-com:vml" xmlns:o="urn:schemas-microsoft-com:office:office" xmlns:dgm="http://schemas.openxmlformats.org/drawingml/2006/diagram" xmlns:c="http://schemas.openxmlformats.org/drawingml/2006/chart" xmlns:mv="urn:schemas-microsoft-com:mac:vml" xmlns:mc="http://schemas.openxmlformats.org/markup-compatibility/2006" xmlns="" r:id="rId17" roundtripDataSignature="AMtx7mjjDdjNFoi+xjUiqIqv79dYRrq6Dw=="/>
     </p:ext>
   </p:extLst>
 </p:presentation>
@@ -5009,241 +5009,6 @@
           <a:chExt cx="0" cy="0"/>
         </a:xfrm>
       </p:grpSpPr>
-      <p:pic>
-        <p:nvPicPr>
-          <p:cNvPr id="84" name="Google Shape;84;p1"/>
-          <p:cNvPicPr preferRelativeResize="0"/>
-          <p:nvPr/>
-        </p:nvPicPr>
-        <p:blipFill rotWithShape="1">
-          <a:blip r:embed="rId3">
-            <a:alphaModFix/>
-          </a:blip>
-          <a:srcRect/>
-          <a:stretch/>
-        </p:blipFill>
-        <p:spPr>
-          <a:xfrm>
-            <a:off x="5484568" y="694317"/>
-            <a:ext cx="1187004" cy="1187004"/>
-          </a:xfrm>
-          <a:prstGeom prst="rect">
-            <a:avLst/>
-          </a:prstGeom>
-          <a:noFill/>
-          <a:ln>
-            <a:noFill/>
-          </a:ln>
-        </p:spPr>
-      </p:pic>
-      <p:sp>
-        <p:nvSpPr>
-          <p:cNvPr id="90" name="Google Shape;90;p1"/>
-          <p:cNvSpPr txBox="1"/>
-          <p:nvPr/>
-        </p:nvSpPr>
-        <p:spPr>
-          <a:xfrm>
-            <a:off x="6832937" y="776275"/>
-            <a:ext cx="4098863" cy="738623"/>
-          </a:xfrm>
-          <a:prstGeom prst="rect">
-            <a:avLst/>
-          </a:prstGeom>
-          <a:noFill/>
-          <a:ln>
-            <a:noFill/>
-          </a:ln>
-        </p:spPr>
-        <p:txBody>
-          <a:bodyPr spcFirstLastPara="1" wrap="square" lIns="91425" tIns="45700" rIns="91425" bIns="45700" anchor="t" anchorCtr="0">
-            <a:spAutoFit/>
-          </a:bodyPr>
-          <a:lstStyle/>
-          <a:p>
-            <a:pPr marL="0" marR="0" lvl="0" indent="0" algn="l" rtl="0">
-              <a:spcBef>
-                <a:spcPts val="0"/>
-              </a:spcBef>
-              <a:spcAft>
-                <a:spcPts val="0"/>
-              </a:spcAft>
-              <a:buNone/>
-            </a:pPr>
-            <a:r>
-              <a:rPr lang="hu-HU" sz="1400" b="0" i="0" u="none" strike="noStrike" cap="none" dirty="0">
-                <a:solidFill>
-                  <a:schemeClr val="dk1"/>
-                </a:solidFill>
-                <a:latin typeface="Times New Roman" panose="02020603050405020304" pitchFamily="18" charset="0"/>
-                <a:ea typeface="Cambria"/>
-                <a:cs typeface="Times New Roman" panose="02020603050405020304" pitchFamily="18" charset="0"/>
-                <a:sym typeface="Cambria"/>
-              </a:rPr>
-              <a:t>⚲ 6100 Kiskunfélegyháza, Kossuth u. 24.</a:t>
-            </a:r>
-            <a:endParaRPr dirty="0">
-              <a:latin typeface="Times New Roman" panose="02020603050405020304" pitchFamily="18" charset="0"/>
-              <a:cs typeface="Times New Roman" panose="02020603050405020304" pitchFamily="18" charset="0"/>
-            </a:endParaRPr>
-          </a:p>
-          <a:p>
-            <a:pPr marL="0" marR="0" lvl="0" indent="0" algn="l" rtl="0">
-              <a:spcBef>
-                <a:spcPts val="0"/>
-              </a:spcBef>
-              <a:spcAft>
-                <a:spcPts val="0"/>
-              </a:spcAft>
-              <a:buNone/>
-            </a:pPr>
-            <a:r>
-              <a:rPr lang="hu-HU" sz="1400" b="0" i="0" u="none" strike="noStrike" cap="none" dirty="0">
-                <a:solidFill>
-                  <a:schemeClr val="dk1"/>
-                </a:solidFill>
-                <a:latin typeface="Times New Roman" panose="02020603050405020304" pitchFamily="18" charset="0"/>
-                <a:ea typeface="Cambria"/>
-                <a:cs typeface="Times New Roman" panose="02020603050405020304" pitchFamily="18" charset="0"/>
-                <a:sym typeface="Cambria"/>
-              </a:rPr>
-              <a:t>☏ +36 76 462 332</a:t>
-            </a:r>
-            <a:endParaRPr dirty="0">
-              <a:latin typeface="Times New Roman" panose="02020603050405020304" pitchFamily="18" charset="0"/>
-              <a:cs typeface="Times New Roman" panose="02020603050405020304" pitchFamily="18" charset="0"/>
-            </a:endParaRPr>
-          </a:p>
-          <a:p>
-            <a:pPr marL="0" marR="0" lvl="0" indent="0" algn="l" rtl="0">
-              <a:spcBef>
-                <a:spcPts val="0"/>
-              </a:spcBef>
-              <a:spcAft>
-                <a:spcPts val="0"/>
-              </a:spcAft>
-              <a:buNone/>
-            </a:pPr>
-            <a:r>
-              <a:rPr lang="hu-HU" sz="1400" b="0" i="0" u="none" strike="noStrike" cap="none" dirty="0">
-                <a:solidFill>
-                  <a:schemeClr val="dk1"/>
-                </a:solidFill>
-                <a:latin typeface="Times New Roman" panose="02020603050405020304" pitchFamily="18" charset="0"/>
-                <a:ea typeface="Cambria"/>
-                <a:cs typeface="Times New Roman" panose="02020603050405020304" pitchFamily="18" charset="0"/>
-                <a:sym typeface="Cambria"/>
-              </a:rPr>
-              <a:t>@ </a:t>
-            </a:r>
-            <a:r>
-              <a:rPr lang="hu-HU" sz="1400" b="0" i="0" u="sng" strike="noStrike" cap="none" dirty="0">
-                <a:solidFill>
-                  <a:schemeClr val="dk1"/>
-                </a:solidFill>
-                <a:latin typeface="Times New Roman" panose="02020603050405020304" pitchFamily="18" charset="0"/>
-                <a:ea typeface="Cambria"/>
-                <a:cs typeface="Times New Roman" panose="02020603050405020304" pitchFamily="18" charset="0"/>
-                <a:sym typeface="Cambria"/>
-                <a:hlinkClick r:id="rId4">
-                  <a:extLst>
-                    <a:ext uri="{A12FA001-AC4F-418D-AE19-62706E023703}">
-                      <ahyp:hlinkClr xmlns:ahyp="http://schemas.microsoft.com/office/drawing/2018/hyperlinkcolor" val="tx"/>
-                    </a:ext>
-                  </a:extLst>
-                </a:hlinkClick>
-              </a:rPr>
-              <a:t>titkarsag@szbi-pg.hu</a:t>
-            </a:r>
-            <a:endParaRPr sz="1400" b="0" i="0" u="none" strike="noStrike" cap="none" dirty="0">
-              <a:solidFill>
-                <a:schemeClr val="dk1"/>
-              </a:solidFill>
-              <a:latin typeface="Times New Roman" panose="02020603050405020304" pitchFamily="18" charset="0"/>
-              <a:ea typeface="Cambria"/>
-              <a:cs typeface="Times New Roman" panose="02020603050405020304" pitchFamily="18" charset="0"/>
-              <a:sym typeface="Cambria"/>
-            </a:endParaRPr>
-          </a:p>
-        </p:txBody>
-      </p:sp>
-      <p:sp>
-        <p:nvSpPr>
-          <p:cNvPr id="91" name="Google Shape;91;p1"/>
-          <p:cNvSpPr txBox="1"/>
-          <p:nvPr/>
-        </p:nvSpPr>
-        <p:spPr>
-          <a:xfrm>
-            <a:off x="1335742" y="830593"/>
-            <a:ext cx="4098862" cy="646290"/>
-          </a:xfrm>
-          <a:prstGeom prst="rect">
-            <a:avLst/>
-          </a:prstGeom>
-          <a:noFill/>
-          <a:ln>
-            <a:noFill/>
-          </a:ln>
-        </p:spPr>
-        <p:txBody>
-          <a:bodyPr spcFirstLastPara="1" wrap="square" lIns="91425" tIns="45700" rIns="91425" bIns="45700" anchor="t" anchorCtr="0">
-            <a:spAutoFit/>
-          </a:bodyPr>
-          <a:lstStyle/>
-          <a:p>
-            <a:pPr marL="0" marR="0" lvl="0" indent="0" algn="l" rtl="0">
-              <a:spcBef>
-                <a:spcPts val="0"/>
-              </a:spcBef>
-              <a:spcAft>
-                <a:spcPts val="0"/>
-              </a:spcAft>
-              <a:buNone/>
-            </a:pPr>
-            <a:r>
-              <a:rPr lang="hu-HU" sz="1800" b="0" i="0" u="none" strike="noStrike" cap="none" dirty="0">
-                <a:solidFill>
-                  <a:schemeClr val="dk1"/>
-                </a:solidFill>
-                <a:latin typeface="Times New Roman" panose="02020603050405020304" pitchFamily="18" charset="0"/>
-                <a:ea typeface="Calibri"/>
-                <a:cs typeface="Times New Roman" panose="02020603050405020304" pitchFamily="18" charset="0"/>
-                <a:sym typeface="Calibri"/>
-              </a:rPr>
-              <a:t>Kiskunfélegyházi Szent Benedek PG Két Tanítási </a:t>
-            </a:r>
-            <a:r>
-              <a:rPr lang="hu-HU" sz="1800" dirty="0">
-                <a:solidFill>
-                  <a:schemeClr val="dk1"/>
-                </a:solidFill>
-                <a:latin typeface="Times New Roman" panose="02020603050405020304" pitchFamily="18" charset="0"/>
-                <a:ea typeface="Calibri"/>
-                <a:cs typeface="Times New Roman" panose="02020603050405020304" pitchFamily="18" charset="0"/>
-                <a:sym typeface="Calibri"/>
-              </a:rPr>
-              <a:t>N</a:t>
-            </a:r>
-            <a:r>
-              <a:rPr lang="hu-HU" sz="1800" b="0" i="0" u="none" strike="noStrike" cap="none" dirty="0">
-                <a:solidFill>
-                  <a:schemeClr val="dk1"/>
-                </a:solidFill>
-                <a:latin typeface="Times New Roman" panose="02020603050405020304" pitchFamily="18" charset="0"/>
-                <a:ea typeface="Calibri"/>
-                <a:cs typeface="Times New Roman" panose="02020603050405020304" pitchFamily="18" charset="0"/>
-                <a:sym typeface="Calibri"/>
-              </a:rPr>
-              <a:t>yelvű Technikum és Kollégium</a:t>
-            </a:r>
-            <a:endParaRPr dirty="0">
-              <a:latin typeface="Times New Roman" panose="02020603050405020304" pitchFamily="18" charset="0"/>
-              <a:cs typeface="Times New Roman" panose="02020603050405020304" pitchFamily="18" charset="0"/>
-            </a:endParaRPr>
-          </a:p>
-        </p:txBody>
-      </p:sp>
       <p:sp>
         <p:nvSpPr>
           <p:cNvPr id="21" name="Google Shape;87;p1">
@@ -5572,126 +5337,6 @@
       </p:sp>
       <p:pic>
         <p:nvPicPr>
-          <p:cNvPr id="4" name="Kép 3" descr="A képen Emberi arc, ruházat, személy, portré látható&#10;&#10;Lehet, hogy az AI által létrehozott tartalom helytelen.">
-            <a:extLst>
-              <a:ext uri="{FF2B5EF4-FFF2-40B4-BE49-F238E27FC236}">
-                <a16:creationId xmlns:a16="http://schemas.microsoft.com/office/drawing/2014/main" id="{B91F6906-154E-394E-EBE2-897293079776}"/>
-              </a:ext>
-            </a:extLst>
-          </p:cNvPr>
-          <p:cNvPicPr>
-            <a:picLocks noChangeAspect="1"/>
-          </p:cNvPicPr>
-          <p:nvPr/>
-        </p:nvPicPr>
-        <p:blipFill>
-          <a:blip r:embed="rId5"/>
-          <a:stretch>
-            <a:fillRect/>
-          </a:stretch>
-        </p:blipFill>
-        <p:spPr>
-          <a:xfrm>
-            <a:off x="8879771" y="2039471"/>
-            <a:ext cx="1738693" cy="2554942"/>
-          </a:xfrm>
-          <a:prstGeom prst="rect">
-            <a:avLst/>
-          </a:prstGeom>
-          <a:solidFill>
-            <a:srgbClr val="FFFFFF">
-              <a:shade val="85000"/>
-            </a:srgbClr>
-          </a:solidFill>
-          <a:ln w="88900" cap="sq">
-            <a:solidFill>
-              <a:srgbClr val="FFFFFF"/>
-            </a:solidFill>
-            <a:miter lim="800000"/>
-          </a:ln>
-          <a:effectLst>
-            <a:outerShdw blurRad="55000" dist="18000" dir="5400000" algn="tl" rotWithShape="0">
-              <a:srgbClr val="000000">
-                <a:alpha val="40000"/>
-              </a:srgbClr>
-            </a:outerShdw>
-          </a:effectLst>
-          <a:scene3d>
-            <a:camera prst="orthographicFront"/>
-            <a:lightRig rig="twoPt" dir="t">
-              <a:rot lat="0" lon="0" rev="7200000"/>
-            </a:lightRig>
-          </a:scene3d>
-          <a:sp3d>
-            <a:bevelT w="25400" h="19050"/>
-            <a:contourClr>
-              <a:srgbClr val="FFFFFF"/>
-            </a:contourClr>
-          </a:sp3d>
-        </p:spPr>
-      </p:pic>
-      <p:pic>
-        <p:nvPicPr>
-          <p:cNvPr id="5" name="Kép 4" descr="A képen Emberi arc, ruházat, személy, nyakkendő látható&#10;&#10;Lehet, hogy az AI által létrehozott tartalom helytelen.">
-            <a:extLst>
-              <a:ext uri="{FF2B5EF4-FFF2-40B4-BE49-F238E27FC236}">
-                <a16:creationId xmlns:a16="http://schemas.microsoft.com/office/drawing/2014/main" id="{09A1E59B-70A8-C93F-2EDA-D57F52213E7C}"/>
-              </a:ext>
-            </a:extLst>
-          </p:cNvPr>
-          <p:cNvPicPr>
-            <a:picLocks noChangeAspect="1"/>
-          </p:cNvPicPr>
-          <p:nvPr/>
-        </p:nvPicPr>
-        <p:blipFill>
-          <a:blip r:embed="rId6"/>
-          <a:stretch>
-            <a:fillRect/>
-          </a:stretch>
-        </p:blipFill>
-        <p:spPr>
-          <a:xfrm>
-            <a:off x="1338213" y="2061883"/>
-            <a:ext cx="1705075" cy="2532530"/>
-          </a:xfrm>
-          <a:prstGeom prst="rect">
-            <a:avLst/>
-          </a:prstGeom>
-          <a:solidFill>
-            <a:srgbClr val="FFFFFF">
-              <a:shade val="85000"/>
-            </a:srgbClr>
-          </a:solidFill>
-          <a:ln w="88900" cap="sq">
-            <a:solidFill>
-              <a:srgbClr val="FFFFFF"/>
-            </a:solidFill>
-            <a:miter lim="800000"/>
-          </a:ln>
-          <a:effectLst>
-            <a:outerShdw blurRad="55000" dist="18000" dir="5400000" algn="tl" rotWithShape="0">
-              <a:srgbClr val="000000">
-                <a:alpha val="40000"/>
-              </a:srgbClr>
-            </a:outerShdw>
-          </a:effectLst>
-          <a:scene3d>
-            <a:camera prst="orthographicFront"/>
-            <a:lightRig rig="twoPt" dir="t">
-              <a:rot lat="0" lon="0" rev="7200000"/>
-            </a:lightRig>
-          </a:scene3d>
-          <a:sp3d>
-            <a:bevelT w="25400" h="19050"/>
-            <a:contourClr>
-              <a:srgbClr val="FFFFFF"/>
-            </a:contourClr>
-          </a:sp3d>
-        </p:spPr>
-      </p:pic>
-      <p:pic>
-        <p:nvPicPr>
           <p:cNvPr id="6" name="Kép 5" descr="A képen Betűtípus, szimbólum, Grafika, embléma látható&#10;&#10;Lehet, hogy az AI által létrehozott tartalom helytelen.">
             <a:extLst>
               <a:ext uri="{FF2B5EF4-FFF2-40B4-BE49-F238E27FC236}">
@@ -5705,7 +5350,7 @@
           <p:nvPr/>
         </p:nvPicPr>
         <p:blipFill>
-          <a:blip r:embed="rId7"/>
+          <a:blip r:embed="rId3"/>
           <a:stretch>
             <a:fillRect/>
           </a:stretch>
@@ -6598,33 +6243,6 @@
           <a:chExt cx="0" cy="0"/>
         </a:xfrm>
       </p:grpSpPr>
-      <p:pic>
-        <p:nvPicPr>
-          <p:cNvPr id="96" name="Google Shape;96;p2"/>
-          <p:cNvPicPr preferRelativeResize="0"/>
-          <p:nvPr/>
-        </p:nvPicPr>
-        <p:blipFill rotWithShape="1">
-          <a:blip r:embed="rId3">
-            <a:alphaModFix/>
-          </a:blip>
-          <a:srcRect/>
-          <a:stretch/>
-        </p:blipFill>
-        <p:spPr>
-          <a:xfrm>
-            <a:off x="10651789" y="264493"/>
-            <a:ext cx="1187004" cy="1187004"/>
-          </a:xfrm>
-          <a:prstGeom prst="rect">
-            <a:avLst/>
-          </a:prstGeom>
-          <a:noFill/>
-          <a:ln>
-            <a:noFill/>
-          </a:ln>
-        </p:spPr>
-      </p:pic>
       <p:sp>
         <p:nvSpPr>
           <p:cNvPr id="98" name="Google Shape;98;p2"/>
@@ -6706,7 +6324,7 @@
         </p:nvSpPr>
         <p:spPr>
           <a:xfrm>
-            <a:off x="1587000" y="1845373"/>
+            <a:off x="1453273" y="1712789"/>
             <a:ext cx="9056350" cy="1090652"/>
           </a:xfrm>
           <a:prstGeom prst="rect">
@@ -6826,8 +6444,8 @@
         </p:nvSpPr>
         <p:spPr>
           <a:xfrm>
-            <a:off x="1587000" y="1869025"/>
-            <a:ext cx="4509000" cy="4309800"/>
+            <a:off x="1606174" y="2615124"/>
+            <a:ext cx="8903450" cy="1848872"/>
           </a:xfrm>
           <a:prstGeom prst="rect">
             <a:avLst/>
@@ -6863,7 +6481,7 @@
               </a:spcAft>
               <a:buNone/>
             </a:pPr>
-            <a:endParaRPr>
+            <a:endParaRPr dirty="0">
               <a:latin typeface="Calibri"/>
               <a:ea typeface="Calibri"/>
               <a:cs typeface="Calibri"/>
@@ -6880,8 +6498,8 @@
         </p:nvSpPr>
         <p:spPr>
           <a:xfrm>
-            <a:off x="6096000" y="1869025"/>
-            <a:ext cx="4509000" cy="4309800"/>
+            <a:off x="1606174" y="3678034"/>
+            <a:ext cx="8903449" cy="908224"/>
           </a:xfrm>
           <a:prstGeom prst="rect">
             <a:avLst/>
@@ -6934,8 +6552,8 @@
         </p:nvSpPr>
         <p:spPr>
           <a:xfrm>
-            <a:off x="1586950" y="3366075"/>
-            <a:ext cx="4509000" cy="2812800"/>
+            <a:off x="1529723" y="2734671"/>
+            <a:ext cx="8903450" cy="908225"/>
           </a:xfrm>
           <a:prstGeom prst="rect">
             <a:avLst/>
@@ -6951,7 +6569,7 @@
           </a:bodyPr>
           <a:lstStyle/>
           <a:p>
-            <a:pPr marL="228600" algn="ctr">
+            <a:pPr marL="228600">
               <a:lnSpc>
                 <a:spcPct val="90000"/>
               </a:lnSpc>
@@ -6995,133 +6613,14 @@
       </p:sp>
       <p:sp>
         <p:nvSpPr>
-          <p:cNvPr id="103" name="Google Shape;103;p2"/>
-          <p:cNvSpPr/>
-          <p:nvPr/>
-        </p:nvSpPr>
-        <p:spPr>
-          <a:xfrm>
-            <a:off x="1583400" y="1804321"/>
-            <a:ext cx="9021600" cy="1048500"/>
-          </a:xfrm>
-          <a:prstGeom prst="rect">
-            <a:avLst/>
-          </a:prstGeom>
-          <a:solidFill>
-            <a:schemeClr val="lt2"/>
-          </a:solidFill>
-          <a:ln w="9525" cap="flat" cmpd="sng">
-            <a:solidFill>
-              <a:schemeClr val="dk2"/>
-            </a:solidFill>
-            <a:prstDash val="solid"/>
-            <a:round/>
-            <a:headEnd type="none" w="sm" len="sm"/>
-            <a:tailEnd type="none" w="sm" len="sm"/>
-          </a:ln>
-        </p:spPr>
-        <p:txBody>
-          <a:bodyPr spcFirstLastPara="1" wrap="square" lIns="91425" tIns="91425" rIns="91425" bIns="91425" anchor="ctr" anchorCtr="0">
-            <a:noAutofit/>
-          </a:bodyPr>
-          <a:lstStyle/>
-          <a:p>
-            <a:pPr marL="228600" lvl="0" indent="0" algn="ctr" rtl="0">
-              <a:lnSpc>
-                <a:spcPct val="90000"/>
-              </a:lnSpc>
-              <a:spcBef>
-                <a:spcPts val="0"/>
-              </a:spcBef>
-              <a:spcAft>
-                <a:spcPts val="0"/>
-              </a:spcAft>
-              <a:buNone/>
-            </a:pPr>
-            <a:r>
-              <a:rPr lang="hu-HU" sz="1800" b="1" dirty="0">
-                <a:latin typeface="Times New Roman"/>
-                <a:ea typeface="Times New Roman"/>
-                <a:cs typeface="Times New Roman"/>
-                <a:sym typeface="Times New Roman"/>
-              </a:rPr>
-              <a:t>Projekt név:</a:t>
-            </a:r>
-            <a:r>
-              <a:rPr lang="hu-HU" sz="1800" dirty="0">
-                <a:latin typeface="Times New Roman"/>
-                <a:ea typeface="Times New Roman"/>
-                <a:cs typeface="Times New Roman"/>
-                <a:sym typeface="Times New Roman"/>
-              </a:rPr>
-              <a:t> </a:t>
-            </a:r>
-            <a:r>
-              <a:rPr lang="hu-HU" dirty="0" err="1">
-                <a:latin typeface="Times New Roman"/>
-                <a:ea typeface="Times New Roman"/>
-                <a:cs typeface="Times New Roman"/>
-                <a:sym typeface="Times New Roman"/>
-              </a:rPr>
-              <a:t>Corelytics</a:t>
-            </a:r>
-            <a:endParaRPr lang="hu-HU" sz="1800">
-              <a:latin typeface="Times New Roman"/>
-              <a:ea typeface="Times New Roman"/>
-              <a:cs typeface="Times New Roman"/>
-            </a:endParaRPr>
-          </a:p>
-          <a:p>
-            <a:pPr marL="228600" algn="ctr">
-              <a:lnSpc>
-                <a:spcPct val="90000"/>
-              </a:lnSpc>
-            </a:pPr>
-            <a:r>
-              <a:rPr lang="hu-HU" sz="1800" b="1" dirty="0">
-                <a:latin typeface="Times New Roman"/>
-                <a:ea typeface="Times New Roman"/>
-                <a:cs typeface="Times New Roman"/>
-                <a:sym typeface="Times New Roman"/>
-              </a:rPr>
-              <a:t>Cél:</a:t>
-            </a:r>
-            <a:r>
-              <a:rPr lang="hu-HU" sz="1800" dirty="0">
-                <a:latin typeface="Times New Roman"/>
-                <a:ea typeface="Times New Roman"/>
-                <a:cs typeface="Times New Roman"/>
-                <a:sym typeface="Times New Roman"/>
-              </a:rPr>
-              <a:t> </a:t>
-            </a:r>
-            <a:r>
-              <a:rPr lang="hu-HU" dirty="0">
-                <a:latin typeface="Times New Roman"/>
-                <a:ea typeface="Times New Roman"/>
-                <a:cs typeface="Times New Roman"/>
-                <a:sym typeface="Times New Roman"/>
-              </a:rPr>
-              <a:t>Az edzés és étel naplózása egy egységes, letisztult alkalmazásban.</a:t>
-            </a:r>
-            <a:endParaRPr lang="hu-HU" dirty="0">
-              <a:latin typeface="Cambria"/>
-              <a:ea typeface="Cambria"/>
-              <a:cs typeface="Times New Roman"/>
-            </a:endParaRPr>
-          </a:p>
-        </p:txBody>
-      </p:sp>
-      <p:sp>
-        <p:nvSpPr>
           <p:cNvPr id="104" name="Google Shape;104;p2"/>
           <p:cNvSpPr txBox="1"/>
           <p:nvPr/>
         </p:nvSpPr>
         <p:spPr>
           <a:xfrm>
-            <a:off x="6095950" y="3366175"/>
-            <a:ext cx="4547400" cy="2812800"/>
+            <a:off x="1606174" y="3748310"/>
+            <a:ext cx="8903449" cy="906182"/>
           </a:xfrm>
           <a:prstGeom prst="rect">
             <a:avLst/>
@@ -7137,7 +6636,7 @@
           </a:bodyPr>
           <a:lstStyle/>
           <a:p>
-            <a:pPr marL="228600" algn="ctr">
+            <a:pPr marL="228600" algn="r">
               <a:lnSpc>
                 <a:spcPct val="90000"/>
               </a:lnSpc>
@@ -7471,156 +6970,6 @@
               <a:sym typeface="Arial"/>
             </a:endParaRPr>
           </a:p>
-          <a:p>
-            <a:pPr marL="228600" lvl="0" indent="-228600" algn="l" rtl="0">
-              <a:lnSpc>
-                <a:spcPct val="90000"/>
-              </a:lnSpc>
-              <a:spcBef>
-                <a:spcPts val="0"/>
-              </a:spcBef>
-              <a:spcAft>
-                <a:spcPts val="0"/>
-              </a:spcAft>
-              <a:buClr>
-                <a:srgbClr val="000000"/>
-              </a:buClr>
-              <a:buSzPts val="1800"/>
-              <a:buFont typeface="Arial"/>
-              <a:buChar char="•"/>
-            </a:pPr>
-            <a:r>
-              <a:rPr lang="hu-HU" sz="1700" b="1" dirty="0">
-                <a:solidFill>
-                  <a:srgbClr val="000000"/>
-                </a:solidFill>
-                <a:latin typeface="Times New Roman" panose="02020603050405020304" pitchFamily="18" charset="0"/>
-                <a:cs typeface="Times New Roman" panose="02020603050405020304" pitchFamily="18" charset="0"/>
-                <a:sym typeface="Arial"/>
-              </a:rPr>
-              <a:t>Backend &amp; API</a:t>
-            </a:r>
-            <a:r>
-              <a:rPr lang="hu-HU" sz="1700" dirty="0">
-                <a:solidFill>
-                  <a:srgbClr val="000000"/>
-                </a:solidFill>
-                <a:latin typeface="Times New Roman" panose="02020603050405020304" pitchFamily="18" charset="0"/>
-                <a:cs typeface="Times New Roman" panose="02020603050405020304" pitchFamily="18" charset="0"/>
-                <a:sym typeface="Arial"/>
-              </a:rPr>
-              <a:t>: </a:t>
-            </a:r>
-            <a:r>
-              <a:rPr lang="hu-HU" sz="1700" dirty="0" err="1">
-                <a:solidFill>
-                  <a:srgbClr val="000000"/>
-                </a:solidFill>
-                <a:latin typeface="Times New Roman" panose="02020603050405020304" pitchFamily="18" charset="0"/>
-                <a:cs typeface="Times New Roman" panose="02020603050405020304" pitchFamily="18" charset="0"/>
-                <a:sym typeface="Arial"/>
-              </a:rPr>
-              <a:t>Gubek</a:t>
-            </a:r>
-            <a:r>
-              <a:rPr lang="hu-HU" sz="1700" dirty="0">
-                <a:solidFill>
-                  <a:srgbClr val="000000"/>
-                </a:solidFill>
-                <a:latin typeface="Times New Roman" panose="02020603050405020304" pitchFamily="18" charset="0"/>
-                <a:cs typeface="Times New Roman" panose="02020603050405020304" pitchFamily="18" charset="0"/>
-                <a:sym typeface="Arial"/>
-              </a:rPr>
-              <a:t>-Szabó Tamás</a:t>
-            </a:r>
-          </a:p>
-          <a:p>
-            <a:pPr marL="228600" lvl="0" indent="-228600" algn="l" rtl="0">
-              <a:lnSpc>
-                <a:spcPct val="90000"/>
-              </a:lnSpc>
-              <a:spcBef>
-                <a:spcPts val="0"/>
-              </a:spcBef>
-              <a:spcAft>
-                <a:spcPts val="0"/>
-              </a:spcAft>
-              <a:buClr>
-                <a:srgbClr val="000000"/>
-              </a:buClr>
-              <a:buSzPts val="1800"/>
-              <a:buFont typeface="Arial"/>
-              <a:buChar char="•"/>
-            </a:pPr>
-            <a:endParaRPr lang="hu-HU" sz="1700" b="1" dirty="0">
-              <a:solidFill>
-                <a:srgbClr val="000000"/>
-              </a:solidFill>
-              <a:latin typeface="Times New Roman" panose="02020603050405020304" pitchFamily="18" charset="0"/>
-              <a:cs typeface="Times New Roman" panose="02020603050405020304" pitchFamily="18" charset="0"/>
-              <a:sym typeface="Arial"/>
-            </a:endParaRPr>
-          </a:p>
-          <a:p>
-            <a:pPr marL="228600" lvl="0" indent="-228600" algn="l" rtl="0">
-              <a:lnSpc>
-                <a:spcPct val="90000"/>
-              </a:lnSpc>
-              <a:spcBef>
-                <a:spcPts val="0"/>
-              </a:spcBef>
-              <a:spcAft>
-                <a:spcPts val="0"/>
-              </a:spcAft>
-              <a:buClr>
-                <a:srgbClr val="000000"/>
-              </a:buClr>
-              <a:buSzPts val="1800"/>
-              <a:buFont typeface="Arial"/>
-              <a:buChar char="•"/>
-            </a:pPr>
-            <a:r>
-              <a:rPr lang="hu-HU" sz="1700" b="1" dirty="0">
-                <a:solidFill>
-                  <a:srgbClr val="000000"/>
-                </a:solidFill>
-                <a:latin typeface="Times New Roman" panose="02020603050405020304" pitchFamily="18" charset="0"/>
-                <a:cs typeface="Times New Roman" panose="02020603050405020304" pitchFamily="18" charset="0"/>
-                <a:sym typeface="Arial"/>
-              </a:rPr>
-              <a:t>Frontend &amp; Dokumentumok</a:t>
-            </a:r>
-            <a:r>
-              <a:rPr lang="hu-HU" sz="1700" dirty="0">
-                <a:solidFill>
-                  <a:srgbClr val="000000"/>
-                </a:solidFill>
-                <a:latin typeface="Times New Roman" panose="02020603050405020304" pitchFamily="18" charset="0"/>
-                <a:cs typeface="Times New Roman" panose="02020603050405020304" pitchFamily="18" charset="0"/>
-                <a:sym typeface="Arial"/>
-              </a:rPr>
-              <a:t>: </a:t>
-            </a:r>
-            <a:r>
-              <a:rPr lang="hu-HU" sz="1700">
-                <a:solidFill>
-                  <a:srgbClr val="000000"/>
-                </a:solidFill>
-                <a:latin typeface="Times New Roman" panose="02020603050405020304" pitchFamily="18" charset="0"/>
-                <a:cs typeface="Times New Roman" panose="02020603050405020304" pitchFamily="18" charset="0"/>
-                <a:sym typeface="Arial"/>
-              </a:rPr>
-              <a:t>Mészáros Imre</a:t>
-            </a:r>
-            <a:endParaRPr lang="hu-HU" sz="1700" b="1" dirty="0">
-              <a:solidFill>
-                <a:srgbClr val="000000"/>
-              </a:solidFill>
-              <a:latin typeface="Times New Roman" panose="02020603050405020304" pitchFamily="18" charset="0"/>
-              <a:cs typeface="Times New Roman" panose="02020603050405020304" pitchFamily="18" charset="0"/>
-              <a:sym typeface="Arial"/>
-            </a:endParaRPr>
-          </a:p>
         </p:txBody>
       </p:sp>
       <p:sp>
@@ -7697,8 +7046,8 @@
         </p:blipFill>
         <p:spPr bwMode="auto">
           <a:xfrm>
-            <a:off x="9079657" y="3429000"/>
-            <a:ext cx="2905125" cy="2905125"/>
+            <a:off x="3706195" y="2278441"/>
+            <a:ext cx="441647" cy="441647"/>
           </a:xfrm>
           <a:prstGeom prst="rect">
             <a:avLst/>
@@ -7737,14 +7086,335 @@
         </p:blipFill>
         <p:spPr>
           <a:xfrm>
-            <a:off x="7436224" y="1822076"/>
-            <a:ext cx="2171700" cy="2227730"/>
+            <a:off x="3706195" y="1803729"/>
+            <a:ext cx="352575" cy="361671"/>
           </a:xfrm>
           <a:prstGeom prst="rect">
             <a:avLst/>
           </a:prstGeom>
         </p:spPr>
       </p:pic>
+      <p:pic>
+        <p:nvPicPr>
+          <p:cNvPr id="7" name="Kép 6" descr="A képen Emberi arc, ruházat, személy, nyakkendő látható&#10;&#10;Lehet, hogy az AI által létrehozott tartalom helytelen.">
+            <a:extLst>
+              <a:ext uri="{FF2B5EF4-FFF2-40B4-BE49-F238E27FC236}">
+                <a16:creationId xmlns:a16="http://schemas.microsoft.com/office/drawing/2014/main" id="{FA08A92C-0B82-430C-BCC6-45097E31233B}"/>
+              </a:ext>
+            </a:extLst>
+          </p:cNvPr>
+          <p:cNvPicPr>
+            <a:picLocks noChangeAspect="1"/>
+          </p:cNvPicPr>
+          <p:nvPr/>
+        </p:nvPicPr>
+        <p:blipFill>
+          <a:blip r:embed="rId5"/>
+          <a:stretch>
+            <a:fillRect/>
+          </a:stretch>
+        </p:blipFill>
+        <p:spPr>
+          <a:xfrm>
+            <a:off x="4092387" y="3890683"/>
+            <a:ext cx="1705075" cy="2532530"/>
+          </a:xfrm>
+          <a:prstGeom prst="rect">
+            <a:avLst/>
+          </a:prstGeom>
+          <a:solidFill>
+            <a:srgbClr val="FFFFFF">
+              <a:shade val="85000"/>
+            </a:srgbClr>
+          </a:solidFill>
+          <a:ln w="88900" cap="sq">
+            <a:solidFill>
+              <a:srgbClr val="FFFFFF"/>
+            </a:solidFill>
+            <a:miter lim="800000"/>
+          </a:ln>
+          <a:effectLst>
+            <a:outerShdw blurRad="55000" dist="18000" dir="5400000" algn="tl" rotWithShape="0">
+              <a:srgbClr val="000000">
+                <a:alpha val="40000"/>
+              </a:srgbClr>
+            </a:outerShdw>
+          </a:effectLst>
+          <a:scene3d>
+            <a:camera prst="orthographicFront"/>
+            <a:lightRig rig="twoPt" dir="t">
+              <a:rot lat="0" lon="0" rev="7200000"/>
+            </a:lightRig>
+          </a:scene3d>
+          <a:sp3d>
+            <a:bevelT w="25400" h="19050"/>
+            <a:contourClr>
+              <a:srgbClr val="FFFFFF"/>
+            </a:contourClr>
+          </a:sp3d>
+        </p:spPr>
+      </p:pic>
+      <p:pic>
+        <p:nvPicPr>
+          <p:cNvPr id="8" name="Kép 7" descr="A képen Emberi arc, ruházat, személy, portré látható&#10;&#10;Lehet, hogy az AI által létrehozott tartalom helytelen.">
+            <a:extLst>
+              <a:ext uri="{FF2B5EF4-FFF2-40B4-BE49-F238E27FC236}">
+                <a16:creationId xmlns:a16="http://schemas.microsoft.com/office/drawing/2014/main" id="{554E4A63-4BFF-432D-B92A-CE0ED1F1AB81}"/>
+              </a:ext>
+            </a:extLst>
+          </p:cNvPr>
+          <p:cNvPicPr>
+            <a:picLocks noChangeAspect="1"/>
+          </p:cNvPicPr>
+          <p:nvPr/>
+        </p:nvPicPr>
+        <p:blipFill>
+          <a:blip r:embed="rId6"/>
+          <a:stretch>
+            <a:fillRect/>
+          </a:stretch>
+        </p:blipFill>
+        <p:spPr>
+          <a:xfrm>
+            <a:off x="6394539" y="3890683"/>
+            <a:ext cx="1738693" cy="2554942"/>
+          </a:xfrm>
+          <a:prstGeom prst="rect">
+            <a:avLst/>
+          </a:prstGeom>
+          <a:solidFill>
+            <a:srgbClr val="FFFFFF">
+              <a:shade val="85000"/>
+            </a:srgbClr>
+          </a:solidFill>
+          <a:ln w="88900" cap="sq">
+            <a:solidFill>
+              <a:srgbClr val="FFFFFF"/>
+            </a:solidFill>
+            <a:miter lim="800000"/>
+          </a:ln>
+          <a:effectLst>
+            <a:outerShdw blurRad="55000" dist="18000" dir="5400000" algn="tl" rotWithShape="0">
+              <a:srgbClr val="000000">
+                <a:alpha val="40000"/>
+              </a:srgbClr>
+            </a:outerShdw>
+          </a:effectLst>
+          <a:scene3d>
+            <a:camera prst="orthographicFront"/>
+            <a:lightRig rig="twoPt" dir="t">
+              <a:rot lat="0" lon="0" rev="7200000"/>
+            </a:lightRig>
+          </a:scene3d>
+          <a:sp3d>
+            <a:bevelT w="25400" h="19050"/>
+            <a:contourClr>
+              <a:srgbClr val="FFFFFF"/>
+            </a:contourClr>
+          </a:sp3d>
+        </p:spPr>
+      </p:pic>
+      <p:sp>
+        <p:nvSpPr>
+          <p:cNvPr id="4" name="Szövegdoboz 3">
+            <a:extLst>
+              <a:ext uri="{FF2B5EF4-FFF2-40B4-BE49-F238E27FC236}">
+                <a16:creationId xmlns:a16="http://schemas.microsoft.com/office/drawing/2014/main" id="{51B7F9F0-A84E-4B64-86C6-C136A9044FA2}"/>
+              </a:ext>
+            </a:extLst>
+          </p:cNvPr>
+          <p:cNvSpPr txBox="1"/>
+          <p:nvPr/>
+        </p:nvSpPr>
+        <p:spPr>
+          <a:xfrm>
+            <a:off x="592071" y="4014560"/>
+            <a:ext cx="3511348" cy="867930"/>
+          </a:xfrm>
+          <a:prstGeom prst="rect">
+            <a:avLst/>
+          </a:prstGeom>
+          <a:noFill/>
+        </p:spPr>
+        <p:txBody>
+          <a:bodyPr wrap="square" rtlCol="0">
+            <a:spAutoFit/>
+          </a:bodyPr>
+          <a:lstStyle/>
+          <a:p>
+            <a:pPr marL="285750" lvl="0" indent="-285750" algn="l" rtl="0">
+              <a:lnSpc>
+                <a:spcPct val="90000"/>
+              </a:lnSpc>
+              <a:spcBef>
+                <a:spcPts val="0"/>
+              </a:spcBef>
+              <a:spcAft>
+                <a:spcPts val="0"/>
+              </a:spcAft>
+              <a:buClr>
+                <a:srgbClr val="000000"/>
+              </a:buClr>
+              <a:buSzPts val="1800"/>
+              <a:buFont typeface="Arial" panose="020B0604020202020204" pitchFamily="34" charset="0"/>
+              <a:buChar char="•"/>
+            </a:pPr>
+            <a:r>
+              <a:rPr lang="hu-HU" sz="1800" b="1" dirty="0">
+                <a:solidFill>
+                  <a:srgbClr val="000000"/>
+                </a:solidFill>
+                <a:latin typeface="Times New Roman" panose="02020603050405020304" pitchFamily="18" charset="0"/>
+                <a:cs typeface="Times New Roman" panose="02020603050405020304" pitchFamily="18" charset="0"/>
+                <a:sym typeface="Arial"/>
+              </a:rPr>
+              <a:t>Frontend &amp; Dokumentumok</a:t>
+            </a:r>
+            <a:r>
+              <a:rPr lang="hu-HU" sz="1800" dirty="0">
+                <a:solidFill>
+                  <a:srgbClr val="000000"/>
+                </a:solidFill>
+                <a:latin typeface="Times New Roman" panose="02020603050405020304" pitchFamily="18" charset="0"/>
+                <a:cs typeface="Times New Roman" panose="02020603050405020304" pitchFamily="18" charset="0"/>
+                <a:sym typeface="Arial"/>
+              </a:rPr>
+              <a:t>: Mészáros Imre</a:t>
+            </a:r>
+            <a:endParaRPr lang="hu-HU" sz="1800" b="1" dirty="0">
+              <a:solidFill>
+                <a:srgbClr val="000000"/>
+              </a:solidFill>
+              <a:latin typeface="Times New Roman" panose="02020603050405020304" pitchFamily="18" charset="0"/>
+              <a:cs typeface="Times New Roman" panose="02020603050405020304" pitchFamily="18" charset="0"/>
+              <a:sym typeface="Arial"/>
+            </a:endParaRPr>
+          </a:p>
+          <a:p>
+            <a:endParaRPr lang="hu-HU" dirty="0"/>
+          </a:p>
+        </p:txBody>
+      </p:sp>
+      <p:sp>
+        <p:nvSpPr>
+          <p:cNvPr id="5" name="Szövegdoboz 4">
+            <a:extLst>
+              <a:ext uri="{FF2B5EF4-FFF2-40B4-BE49-F238E27FC236}">
+                <a16:creationId xmlns:a16="http://schemas.microsoft.com/office/drawing/2014/main" id="{685BCA3C-D0CC-4697-8CA4-DA757253FDF2}"/>
+              </a:ext>
+            </a:extLst>
+          </p:cNvPr>
+          <p:cNvSpPr txBox="1"/>
+          <p:nvPr/>
+        </p:nvSpPr>
+        <p:spPr>
+          <a:xfrm>
+            <a:off x="8256494" y="3974401"/>
+            <a:ext cx="3097306" cy="590931"/>
+          </a:xfrm>
+          <a:prstGeom prst="rect">
+            <a:avLst/>
+          </a:prstGeom>
+          <a:noFill/>
+        </p:spPr>
+        <p:txBody>
+          <a:bodyPr wrap="square" rtlCol="0">
+            <a:spAutoFit/>
+          </a:bodyPr>
+          <a:lstStyle/>
+          <a:p>
+            <a:pPr marL="228600" lvl="0" indent="-228600" algn="l" rtl="0">
+              <a:lnSpc>
+                <a:spcPct val="90000"/>
+              </a:lnSpc>
+              <a:spcBef>
+                <a:spcPts val="0"/>
+              </a:spcBef>
+              <a:spcAft>
+                <a:spcPts val="0"/>
+              </a:spcAft>
+              <a:buClr>
+                <a:srgbClr val="000000"/>
+              </a:buClr>
+              <a:buSzPts val="1800"/>
+              <a:buFont typeface="Arial"/>
+              <a:buChar char="•"/>
+            </a:pPr>
+            <a:r>
+              <a:rPr lang="hu-HU" sz="1800" b="1" dirty="0">
+                <a:solidFill>
+                  <a:srgbClr val="000000"/>
+                </a:solidFill>
+                <a:latin typeface="Times New Roman" panose="02020603050405020304" pitchFamily="18" charset="0"/>
+                <a:cs typeface="Times New Roman" panose="02020603050405020304" pitchFamily="18" charset="0"/>
+                <a:sym typeface="Arial"/>
+              </a:rPr>
+              <a:t>Backend &amp; API</a:t>
+            </a:r>
+            <a:r>
+              <a:rPr lang="hu-HU" sz="1800" dirty="0">
+                <a:solidFill>
+                  <a:srgbClr val="000000"/>
+                </a:solidFill>
+                <a:latin typeface="Times New Roman" panose="02020603050405020304" pitchFamily="18" charset="0"/>
+                <a:cs typeface="Times New Roman" panose="02020603050405020304" pitchFamily="18" charset="0"/>
+                <a:sym typeface="Arial"/>
+              </a:rPr>
+              <a:t>: </a:t>
+            </a:r>
+          </a:p>
+          <a:p>
+            <a:pPr lvl="0" algn="l" rtl="0">
+              <a:lnSpc>
+                <a:spcPct val="90000"/>
+              </a:lnSpc>
+              <a:spcBef>
+                <a:spcPts val="0"/>
+              </a:spcBef>
+              <a:spcAft>
+                <a:spcPts val="0"/>
+              </a:spcAft>
+              <a:buClr>
+                <a:srgbClr val="000000"/>
+              </a:buClr>
+              <a:buSzPts val="1800"/>
+            </a:pPr>
+            <a:r>
+              <a:rPr lang="hu-HU" sz="1800" dirty="0">
+                <a:solidFill>
+                  <a:srgbClr val="000000"/>
+                </a:solidFill>
+                <a:latin typeface="Times New Roman" panose="02020603050405020304" pitchFamily="18" charset="0"/>
+                <a:cs typeface="Times New Roman" panose="02020603050405020304" pitchFamily="18" charset="0"/>
+                <a:sym typeface="Arial"/>
+              </a:rPr>
+              <a:t>    </a:t>
+            </a:r>
+            <a:r>
+              <a:rPr lang="hu-HU" sz="1800" dirty="0" err="1">
+                <a:solidFill>
+                  <a:srgbClr val="000000"/>
+                </a:solidFill>
+                <a:latin typeface="Times New Roman" panose="02020603050405020304" pitchFamily="18" charset="0"/>
+                <a:cs typeface="Times New Roman" panose="02020603050405020304" pitchFamily="18" charset="0"/>
+                <a:sym typeface="Arial"/>
+              </a:rPr>
+              <a:t>Gubek</a:t>
+            </a:r>
+            <a:r>
+              <a:rPr lang="hu-HU" sz="1800" dirty="0">
+                <a:solidFill>
+                  <a:srgbClr val="000000"/>
+                </a:solidFill>
+                <a:latin typeface="Times New Roman" panose="02020603050405020304" pitchFamily="18" charset="0"/>
+                <a:cs typeface="Times New Roman" panose="02020603050405020304" pitchFamily="18" charset="0"/>
+                <a:sym typeface="Arial"/>
+              </a:rPr>
+              <a:t>-Szabó Tamás</a:t>
+            </a:r>
+          </a:p>
+        </p:txBody>
+      </p:sp>
     </p:spTree>
   </p:cSld>
   <p:clrMapOvr>
@@ -7836,33 +7506,6 @@
           </a:p>
         </p:txBody>
       </p:sp>
-      <p:pic>
-        <p:nvPicPr>
-          <p:cNvPr id="112" name="Google Shape;112;p3"/>
-          <p:cNvPicPr preferRelativeResize="0"/>
-          <p:nvPr/>
-        </p:nvPicPr>
-        <p:blipFill rotWithShape="1">
-          <a:blip r:embed="rId3">
-            <a:alphaModFix/>
-          </a:blip>
-          <a:srcRect/>
-          <a:stretch/>
-        </p:blipFill>
-        <p:spPr>
-          <a:xfrm>
-            <a:off x="10443022" y="682028"/>
-            <a:ext cx="1187004" cy="1187004"/>
-          </a:xfrm>
-          <a:prstGeom prst="rect">
-            <a:avLst/>
-          </a:prstGeom>
-          <a:noFill/>
-          <a:ln>
-            <a:noFill/>
-          </a:ln>
-        </p:spPr>
-      </p:pic>
       <p:sp>
         <p:nvSpPr>
           <p:cNvPr id="6" name="Trapezoid 5">
@@ -8331,33 +7974,6 @@
           </a:p>
         </p:txBody>
       </p:sp>
-      <p:pic>
-        <p:nvPicPr>
-          <p:cNvPr id="133" name="Google Shape;133;p4"/>
-          <p:cNvPicPr preferRelativeResize="0"/>
-          <p:nvPr/>
-        </p:nvPicPr>
-        <p:blipFill rotWithShape="1">
-          <a:blip r:embed="rId3">
-            <a:alphaModFix/>
-          </a:blip>
-          <a:srcRect/>
-          <a:stretch/>
-        </p:blipFill>
-        <p:spPr>
-          <a:xfrm>
-            <a:off x="10443022" y="682028"/>
-            <a:ext cx="1187004" cy="1187004"/>
-          </a:xfrm>
-          <a:prstGeom prst="rect">
-            <a:avLst/>
-          </a:prstGeom>
-          <a:noFill/>
-          <a:ln>
-            <a:noFill/>
-          </a:ln>
-        </p:spPr>
-      </p:pic>
       <p:grpSp>
         <p:nvGrpSpPr>
           <p:cNvPr id="4" name="Csoportba foglalás 3">
@@ -8653,7 +8269,7 @@
                 </a:rPr>
                 <a:t>Futtatási környezet</a:t>
               </a:r>
-              <a:endParaRPr lang="hu-HU" sz="2900" b="1" i="1">
+              <a:endParaRPr lang="hu-HU" sz="2900" b="1" i="1" dirty="0">
                 <a:solidFill>
                   <a:schemeClr val="dk1"/>
                 </a:solidFill>
@@ -8683,12 +8299,56 @@
             </a:p>
             <a:p>
               <a:pPr algn="ctr"/>
-              <a:endParaRPr lang="hu-HU" sz="900" b="1" dirty="0">
+              <a:r>
+                <a:rPr lang="hu-HU" sz="1700" dirty="0" err="1">
+                  <a:solidFill>
+                    <a:schemeClr val="dk1"/>
+                  </a:solidFill>
+                  <a:latin typeface="Calibri"/>
+                  <a:ea typeface="Calibri"/>
+                  <a:cs typeface="Calibri"/>
+                </a:rPr>
+                <a:t>Hosting</a:t>
+              </a:r>
+              <a:r>
+                <a:rPr lang="hu-HU" sz="1700" dirty="0">
+                  <a:solidFill>
+                    <a:schemeClr val="dk1"/>
+                  </a:solidFill>
+                  <a:latin typeface="Calibri"/>
+                  <a:ea typeface="Calibri"/>
+                  <a:cs typeface="Calibri"/>
+                </a:rPr>
+                <a:t>: </a:t>
+              </a:r>
+              <a:r>
+                <a:rPr lang="hu-HU" sz="1700" dirty="0" err="1">
+                  <a:solidFill>
+                    <a:schemeClr val="dk1"/>
+                  </a:solidFill>
+                  <a:latin typeface="Calibri"/>
+                  <a:ea typeface="Calibri"/>
+                  <a:cs typeface="Calibri"/>
+                </a:rPr>
+                <a:t>Vercel</a:t>
+              </a:r>
+              <a:endParaRPr lang="hu-HU" sz="1700" dirty="0">
                 <a:solidFill>
                   <a:schemeClr val="dk1"/>
                 </a:solidFill>
-                <a:latin typeface="Cambria"/>
-                <a:ea typeface="Cambria"/>
+                <a:latin typeface="Calibri"/>
+                <a:ea typeface="Calibri"/>
+                <a:cs typeface="Calibri"/>
+              </a:endParaRPr>
+            </a:p>
+            <a:p>
+              <a:pPr algn="ctr"/>
+              <a:endParaRPr lang="hu-HU" sz="1700" dirty="0">
+                <a:solidFill>
+                  <a:schemeClr val="dk1"/>
+                </a:solidFill>
+                <a:latin typeface="Calibri"/>
+                <a:ea typeface="Calibri"/>
                 <a:cs typeface="Calibri"/>
               </a:endParaRPr>
             </a:p>
@@ -8705,11 +8365,19 @@
                 </a:rPr>
                 <a:t>Node.Js</a:t>
               </a:r>
+              <a:endParaRPr lang="hu-HU" sz="1700" dirty="0">
+                <a:solidFill>
+                  <a:schemeClr val="dk1"/>
+                </a:solidFill>
+                <a:latin typeface="Calibri"/>
+                <a:ea typeface="Calibri"/>
+                <a:cs typeface="Calibri"/>
+              </a:endParaRPr>
             </a:p>
             <a:p>
               <a:pPr algn="ctr"/>
               <a:r>
-                <a:rPr lang="hu-HU" sz="1700">
+                <a:rPr lang="hu-HU" sz="1700" dirty="0">
                   <a:solidFill>
                     <a:schemeClr val="dk1"/>
                   </a:solidFill>
@@ -8719,14 +8387,6 @@
                 </a:rPr>
                 <a:t>Böngésző(Chrome, Firefox)</a:t>
               </a:r>
-              <a:endParaRPr lang="hu-HU" sz="1700" dirty="0">
-                <a:solidFill>
-                  <a:schemeClr val="dk1"/>
-                </a:solidFill>
-                <a:latin typeface="Calibri"/>
-                <a:ea typeface="Calibri"/>
-                <a:cs typeface="Calibri"/>
-              </a:endParaRPr>
             </a:p>
             <a:p>
               <a:pPr algn="ctr"/>
@@ -10376,6 +10036,93 @@
               <a:t>dernizált felhasználói felület, különböző képernyő méretekre.</a:t>
             </a:r>
           </a:p>
+          <a:p>
+            <a:pPr marL="228600" lvl="0" indent="-228600" algn="l" rtl="0">
+              <a:lnSpc>
+                <a:spcPct val="90000"/>
+              </a:lnSpc>
+              <a:spcBef>
+                <a:spcPts val="0"/>
+              </a:spcBef>
+              <a:spcAft>
+                <a:spcPts val="0"/>
+              </a:spcAft>
+              <a:buClr>
+                <a:srgbClr val="000000"/>
+              </a:buClr>
+              <a:buSzPts val="1800"/>
+              <a:buFont typeface="Arial"/>
+              <a:buChar char="•"/>
+            </a:pPr>
+            <a:endParaRPr lang="hu-HU" sz="1800" dirty="0">
+              <a:solidFill>
+                <a:srgbClr val="000000"/>
+              </a:solidFill>
+              <a:latin typeface="Times New Roman" panose="02020603050405020304" pitchFamily="18" charset="0"/>
+              <a:cs typeface="Times New Roman" panose="02020603050405020304" pitchFamily="18" charset="0"/>
+              <a:sym typeface="Arial"/>
+            </a:endParaRPr>
+          </a:p>
+          <a:p>
+            <a:pPr marL="228600" lvl="0" indent="-228600" algn="l" rtl="0">
+              <a:lnSpc>
+                <a:spcPct val="90000"/>
+              </a:lnSpc>
+              <a:spcBef>
+                <a:spcPts val="0"/>
+              </a:spcBef>
+              <a:spcAft>
+                <a:spcPts val="0"/>
+              </a:spcAft>
+              <a:buClr>
+                <a:srgbClr val="000000"/>
+              </a:buClr>
+              <a:buSzPts val="1800"/>
+              <a:buFont typeface="Arial"/>
+              <a:buChar char="•"/>
+            </a:pPr>
+            <a:r>
+              <a:rPr lang="hu-HU" sz="1800" b="1" dirty="0">
+                <a:solidFill>
+                  <a:srgbClr val="000000"/>
+                </a:solidFill>
+                <a:latin typeface="Times New Roman" panose="02020603050405020304" pitchFamily="18" charset="0"/>
+                <a:cs typeface="Times New Roman" panose="02020603050405020304" pitchFamily="18" charset="0"/>
+                <a:sym typeface="Arial"/>
+              </a:rPr>
+              <a:t>Nyelv</a:t>
+            </a:r>
+            <a:r>
+              <a:rPr lang="hu-HU" sz="1800" dirty="0">
+                <a:solidFill>
+                  <a:srgbClr val="000000"/>
+                </a:solidFill>
+                <a:latin typeface="Times New Roman" panose="02020603050405020304" pitchFamily="18" charset="0"/>
+                <a:cs typeface="Times New Roman" panose="02020603050405020304" pitchFamily="18" charset="0"/>
+                <a:sym typeface="Arial"/>
+              </a:rPr>
+              <a:t>: </a:t>
+            </a:r>
+            <a:r>
+              <a:rPr lang="hu-HU" sz="1800" dirty="0" err="1">
+                <a:solidFill>
+                  <a:srgbClr val="000000"/>
+                </a:solidFill>
+                <a:latin typeface="Times New Roman" panose="02020603050405020304" pitchFamily="18" charset="0"/>
+                <a:cs typeface="Times New Roman" panose="02020603050405020304" pitchFamily="18" charset="0"/>
+                <a:sym typeface="Arial"/>
+              </a:rPr>
+              <a:t>Typescript</a:t>
+            </a:r>
+            <a:endParaRPr lang="hu-HU" sz="1800" dirty="0">
+              <a:solidFill>
+                <a:srgbClr val="000000"/>
+              </a:solidFill>
+              <a:latin typeface="Times New Roman" panose="02020603050405020304" pitchFamily="18" charset="0"/>
+              <a:cs typeface="Times New Roman" panose="02020603050405020304" pitchFamily="18" charset="0"/>
+              <a:sym typeface="Arial"/>
+            </a:endParaRPr>
+          </a:p>
         </p:txBody>
       </p:sp>
       <p:pic>
@@ -10437,55 +10184,8 @@
         </p:blipFill>
         <p:spPr bwMode="auto">
           <a:xfrm>
-            <a:off x="4597282" y="1219580"/>
+            <a:off x="1405848" y="4506271"/>
             <a:ext cx="2158695" cy="2130040"/>
-          </a:xfrm>
-          <a:prstGeom prst="rect">
-            <a:avLst/>
-          </a:prstGeom>
-          <a:noFill/>
-          <a:extLst>
-            <a:ext uri="{909E8E84-426E-40DD-AFC4-6F175D3DCCD1}">
-              <a14:hiddenFill xmlns:a14="http://schemas.microsoft.com/office/drawing/2010/main">
-                <a:solidFill>
-                  <a:srgbClr val="FFFFFF"/>
-                </a:solidFill>
-              </a14:hiddenFill>
-            </a:ext>
-          </a:extLst>
-        </p:spPr>
-      </p:pic>
-      <p:pic>
-        <p:nvPicPr>
-          <p:cNvPr id="3074" name="Picture 2" descr="React.js Folder Structure on Windows: A Comprehensive Guide | by Anant |  JavaScript in Plain English">
-            <a:extLst>
-              <a:ext uri="{FF2B5EF4-FFF2-40B4-BE49-F238E27FC236}">
-                <a16:creationId xmlns:a16="http://schemas.microsoft.com/office/drawing/2014/main" id="{B5256701-8FB6-4D84-8131-963E4ED5A754}"/>
-              </a:ext>
-            </a:extLst>
-          </p:cNvPr>
-          <p:cNvPicPr>
-            <a:picLocks noChangeAspect="1" noChangeArrowheads="1"/>
-          </p:cNvPicPr>
-          <p:nvPr/>
-        </p:nvPicPr>
-        <p:blipFill>
-          <a:blip r:embed="rId5">
-            <a:extLst>
-              <a:ext uri="{28A0092B-C50C-407E-A947-70E740481C1C}">
-                <a14:useLocalDpi xmlns:a14="http://schemas.microsoft.com/office/drawing/2010/main" val="0"/>
-              </a:ext>
-            </a:extLst>
-          </a:blip>
-          <a:srcRect/>
-          <a:stretch>
-            <a:fillRect/>
-          </a:stretch>
-        </p:blipFill>
-        <p:spPr bwMode="auto">
-          <a:xfrm>
-            <a:off x="9690717" y="4257239"/>
-            <a:ext cx="2352152" cy="1545571"/>
           </a:xfrm>
           <a:prstGeom prst="rect">
             <a:avLst/>

--- a/docs/Prezentáció/Corelytics presentation.pptx
+++ b/docs/Prezentáció/Corelytics presentation.pptx
@@ -134,7 +134,7 @@
       </p15:sldGuideLst>
     </p:ext>
     <p:ext uri="GoogleSlidesCustomDataVersion2">
-      <go:slidesCustomData xmlns:go="http://customooxmlschemas.google.com/" xmlns:ahyp="http://schemas.microsoft.com/office/drawing/2018/hyperlinkcolor" xmlns:p15="http://schemas.microsoft.com/office/powerpoint/2012/main" xmlns:p14="http://schemas.microsoft.com/office/powerpoint/2010/main" xmlns:com="http://schemas.openxmlformats.org/drawingml/2006/compatibility" xmlns:pvml="urn:schemas-microsoft-com:office:powerpoint" xmlns:v="urn:schemas-microsoft-com:vml" xmlns:o="urn:schemas-microsoft-com:office:office" xmlns:dgm="http://schemas.openxmlformats.org/drawingml/2006/diagram" xmlns:c="http://schemas.openxmlformats.org/drawingml/2006/chart" xmlns:mv="urn:schemas-microsoft-com:mac:vml" xmlns:mc="http://schemas.openxmlformats.org/markup-compatibility/2006" xmlns="" r:id="rId17" roundtripDataSignature="AMtx7mjjDdjNFoi+xjUiqIqv79dYRrq6Dw=="/>
+      <go:slidesCustomData xmlns="" xmlns:mc="http://schemas.openxmlformats.org/markup-compatibility/2006" xmlns:mv="urn:schemas-microsoft-com:mac:vml" xmlns:c="http://schemas.openxmlformats.org/drawingml/2006/chart" xmlns:dgm="http://schemas.openxmlformats.org/drawingml/2006/diagram" xmlns:o="urn:schemas-microsoft-com:office:office" xmlns:v="urn:schemas-microsoft-com:vml" xmlns:pvml="urn:schemas-microsoft-com:office:powerpoint" xmlns:com="http://schemas.openxmlformats.org/drawingml/2006/compatibility" xmlns:p14="http://schemas.microsoft.com/office/powerpoint/2010/main" xmlns:p15="http://schemas.microsoft.com/office/powerpoint/2012/main" xmlns:ahyp="http://schemas.microsoft.com/office/drawing/2018/hyperlinkcolor" xmlns:go="http://customooxmlschemas.google.com/" r:id="rId17" roundtripDataSignature="AMtx7mjjDdjNFoi+xjUiqIqv79dYRrq6Dw=="/>
     </p:ext>
   </p:extLst>
 </p:presentation>
@@ -6371,23 +6371,8 @@
                 <a:cs typeface="Times New Roman"/>
                 <a:sym typeface="Times New Roman"/>
               </a:rPr>
-              <a:t> </a:t>
-            </a:r>
-            <a:r>
-              <a:rPr lang="hu-HU" sz="1700" dirty="0" err="1">
-                <a:latin typeface="Times New Roman"/>
-                <a:ea typeface="Times New Roman"/>
-                <a:cs typeface="Times New Roman"/>
-                <a:sym typeface="Times New Roman"/>
-              </a:rPr>
-              <a:t>Studify</a:t>
-            </a:r>
-            <a:endParaRPr lang="hu-HU" sz="1700" dirty="0">
-              <a:latin typeface="Times New Roman"/>
-              <a:ea typeface="Times New Roman"/>
-              <a:cs typeface="Times New Roman"/>
-              <a:sym typeface="Times New Roman"/>
-            </a:endParaRPr>
+              <a:t> Corelytics</a:t>
+            </a:r>
           </a:p>
           <a:p>
             <a:pPr marL="228600" lvl="0" indent="0" algn="ctr" rtl="0">
@@ -6409,7 +6394,7 @@
                 <a:cs typeface="Times New Roman"/>
                 <a:sym typeface="Times New Roman"/>
               </a:rPr>
-              <a:t>Cél:</a:t>
+              <a:t>Cél: E</a:t>
             </a:r>
             <a:r>
               <a:rPr lang="hu-HU" sz="1700" dirty="0">
@@ -6418,14 +6403,7 @@
                 <a:cs typeface="Times New Roman"/>
                 <a:sym typeface="Times New Roman"/>
               </a:rPr>
-              <a:t> </a:t>
-            </a:r>
-            <a:r>
-              <a:rPr lang="hu-HU" sz="1700" dirty="0">
-                <a:latin typeface="Cambria" panose="02040503050406030204" pitchFamily="18" charset="0"/>
-                <a:ea typeface="Cambria" panose="02040503050406030204" pitchFamily="18" charset="0"/>
-              </a:rPr>
-              <a:t>A tanárok és diákok közötti együttműködés egyszerűsítése az átláthatóság és az azonnali visszajelzés révén.</a:t>
+              <a:t>gy egységes és egyszerű edzés és étel naplózó weboldal és applikáció.</a:t>
             </a:r>
             <a:endParaRPr lang="hu-HU" sz="1700" dirty="0">
               <a:latin typeface="Cambria" panose="02040503050406030204" pitchFamily="18" charset="0"/>
@@ -6499,7 +6477,7 @@
         <p:spPr>
           <a:xfrm>
             <a:off x="1606174" y="3678034"/>
-            <a:ext cx="8903449" cy="908224"/>
+            <a:ext cx="8903449" cy="905509"/>
           </a:xfrm>
           <a:prstGeom prst="rect">
             <a:avLst/>
@@ -6552,7 +6530,7 @@
         </p:nvSpPr>
         <p:spPr>
           <a:xfrm>
-            <a:off x="1529723" y="2734671"/>
+            <a:off x="1529723" y="2833984"/>
             <a:ext cx="8903450" cy="908225"/>
           </a:xfrm>
           <a:prstGeom prst="rect">
@@ -6619,7 +6597,7 @@
         </p:nvSpPr>
         <p:spPr>
           <a:xfrm>
-            <a:off x="1606174" y="3748310"/>
+            <a:off x="1606174" y="3813625"/>
             <a:ext cx="8903449" cy="906182"/>
           </a:xfrm>
           <a:prstGeom prst="rect">

--- a/docs/Prezentáció/Corelytics presentation.pptx
+++ b/docs/Prezentáció/Corelytics presentation.pptx
@@ -19,7 +19,7 @@
     <p:sldId id="262" r:id="rId10"/>
     <p:sldId id="263" r:id="rId11"/>
     <p:sldId id="265" r:id="rId12"/>
-    <p:sldId id="266" r:id="rId13"/>
+    <p:sldId id="268" r:id="rId13"/>
   </p:sldIdLst>
   <p:sldSz cx="12192000" cy="6858000"/>
   <p:notesSz cx="6858000" cy="9144000"/>
@@ -134,7 +134,7 @@
       </p15:sldGuideLst>
     </p:ext>
     <p:ext uri="GoogleSlidesCustomDataVersion2">
-      <go:slidesCustomData xmlns="" xmlns:mc="http://schemas.openxmlformats.org/markup-compatibility/2006" xmlns:mv="urn:schemas-microsoft-com:mac:vml" xmlns:c="http://schemas.openxmlformats.org/drawingml/2006/chart" xmlns:dgm="http://schemas.openxmlformats.org/drawingml/2006/diagram" xmlns:o="urn:schemas-microsoft-com:office:office" xmlns:v="urn:schemas-microsoft-com:vml" xmlns:pvml="urn:schemas-microsoft-com:office:powerpoint" xmlns:com="http://schemas.openxmlformats.org/drawingml/2006/compatibility" xmlns:p14="http://schemas.microsoft.com/office/powerpoint/2010/main" xmlns:p15="http://schemas.microsoft.com/office/powerpoint/2012/main" xmlns:ahyp="http://schemas.microsoft.com/office/drawing/2018/hyperlinkcolor" xmlns:go="http://customooxmlschemas.google.com/" r:id="rId17" roundtripDataSignature="AMtx7mjjDdjNFoi+xjUiqIqv79dYRrq6Dw=="/>
+      <go:slidesCustomData xmlns:go="http://customooxmlschemas.google.com/" xmlns:ahyp="http://schemas.microsoft.com/office/drawing/2018/hyperlinkcolor" xmlns:p15="http://schemas.microsoft.com/office/powerpoint/2012/main" xmlns:p14="http://schemas.microsoft.com/office/powerpoint/2010/main" xmlns:com="http://schemas.openxmlformats.org/drawingml/2006/compatibility" xmlns:pvml="urn:schemas-microsoft-com:office:powerpoint" xmlns:v="urn:schemas-microsoft-com:vml" xmlns:o="urn:schemas-microsoft-com:office:office" xmlns:dgm="http://schemas.openxmlformats.org/drawingml/2006/diagram" xmlns:c="http://schemas.openxmlformats.org/drawingml/2006/chart" xmlns:mv="urn:schemas-microsoft-com:mac:vml" xmlns:mc="http://schemas.openxmlformats.org/markup-compatibility/2006" xmlns="" r:id="rId17" roundtripDataSignature="AMtx7mjjDdjNFoi+xjUiqIqv79dYRrq6Dw=="/>
     </p:ext>
   </p:extLst>
 </p:presentation>
@@ -797,110 +797,6 @@
 </p:notes>
 </file>
 
-<file path=ppt/notesSlides/notesSlide11.xml><?xml version="1.0" encoding="utf-8"?>
-<p:notes xmlns:a="http://schemas.openxmlformats.org/drawingml/2006/main" xmlns:r="http://schemas.openxmlformats.org/officeDocument/2006/relationships" xmlns:p="http://schemas.openxmlformats.org/presentationml/2006/main" showMasterSp="0" showMasterPhAnim="0">
-  <p:cSld>
-    <p:spTree>
-      <p:nvGrpSpPr>
-        <p:cNvPr id="1" name="Shape 184"/>
-        <p:cNvGrpSpPr/>
-        <p:nvPr/>
-      </p:nvGrpSpPr>
-      <p:grpSpPr>
-        <a:xfrm>
-          <a:off x="0" y="0"/>
-          <a:ext cx="0" cy="0"/>
-          <a:chOff x="0" y="0"/>
-          <a:chExt cx="0" cy="0"/>
-        </a:xfrm>
-      </p:grpSpPr>
-      <p:sp>
-        <p:nvSpPr>
-          <p:cNvPr id="185" name="Google Shape;185;p11:notes"/>
-          <p:cNvSpPr txBox="1">
-            <a:spLocks noGrp="1"/>
-          </p:cNvSpPr>
-          <p:nvPr>
-            <p:ph type="body" idx="1"/>
-          </p:nvPr>
-        </p:nvSpPr>
-        <p:spPr>
-          <a:xfrm>
-            <a:off x="685800" y="4343400"/>
-            <a:ext cx="5486400" cy="4114800"/>
-          </a:xfrm>
-          <a:prstGeom prst="rect">
-            <a:avLst/>
-          </a:prstGeom>
-        </p:spPr>
-        <p:txBody>
-          <a:bodyPr spcFirstLastPara="1" wrap="square" lIns="91425" tIns="91425" rIns="91425" bIns="91425" anchor="t" anchorCtr="0">
-            <a:noAutofit/>
-          </a:bodyPr>
-          <a:lstStyle/>
-          <a:p>
-            <a:pPr marL="0" lvl="0" indent="0" algn="l" rtl="0">
-              <a:spcBef>
-                <a:spcPts val="0"/>
-              </a:spcBef>
-              <a:spcAft>
-                <a:spcPts val="0"/>
-              </a:spcAft>
-              <a:buNone/>
-            </a:pPr>
-            <a:endParaRPr/>
-          </a:p>
-        </p:txBody>
-      </p:sp>
-      <p:sp>
-        <p:nvSpPr>
-          <p:cNvPr id="186" name="Google Shape;186;p11:notes"/>
-          <p:cNvSpPr>
-            <a:spLocks noGrp="1" noRot="1" noChangeAspect="1"/>
-          </p:cNvSpPr>
-          <p:nvPr>
-            <p:ph type="sldImg" idx="2"/>
-          </p:nvPr>
-        </p:nvSpPr>
-        <p:spPr>
-          <a:xfrm>
-            <a:off x="381000" y="685800"/>
-            <a:ext cx="6096000" cy="3429000"/>
-          </a:xfrm>
-          <a:custGeom>
-            <a:avLst/>
-            <a:gdLst/>
-            <a:ahLst/>
-            <a:cxnLst/>
-            <a:rect l="l" t="t" r="r" b="b"/>
-            <a:pathLst>
-              <a:path w="120000" h="120000" extrusionOk="0">
-                <a:moveTo>
-                  <a:pt x="0" y="0"/>
-                </a:moveTo>
-                <a:lnTo>
-                  <a:pt x="120000" y="0"/>
-                </a:lnTo>
-                <a:lnTo>
-                  <a:pt x="120000" y="120000"/>
-                </a:lnTo>
-                <a:lnTo>
-                  <a:pt x="0" y="120000"/>
-                </a:lnTo>
-                <a:close/>
-              </a:path>
-            </a:pathLst>
-          </a:custGeom>
-        </p:spPr>
-      </p:sp>
-    </p:spTree>
-  </p:cSld>
-  <p:clrMapOvr>
-    <a:masterClrMapping/>
-  </p:clrMapOvr>
-</p:notes>
-</file>
-
 <file path=ppt/notesSlides/notesSlide2.xml><?xml version="1.0" encoding="utf-8"?>
 <p:notes xmlns:a="http://schemas.openxmlformats.org/drawingml/2006/main" xmlns:r="http://schemas.openxmlformats.org/officeDocument/2006/relationships" xmlns:p="http://schemas.openxmlformats.org/presentationml/2006/main" showMasterSp="0" showMasterPhAnim="0">
   <p:cSld>
@@ -1955,6 +1851,18 @@
   <p:clrMapOvr>
     <a:masterClrMapping/>
   </p:clrMapOvr>
+  <mc:AlternateContent xmlns:mc="http://schemas.openxmlformats.org/markup-compatibility/2006">
+    <mc:Choice xmlns:p159="http://schemas.microsoft.com/office/powerpoint/2015/09/main" Requires="p159">
+      <p:transition xmlns:p14="http://schemas.microsoft.com/office/powerpoint/2010/main" spd="slow" p14:dur="2000">
+        <p159:morph option="byObject"/>
+      </p:transition>
+    </mc:Choice>
+    <mc:Fallback>
+      <p:transition spd="slow">
+        <p:fade/>
+      </p:transition>
+    </mc:Fallback>
+  </mc:AlternateContent>
 </p:sldLayout>
 </file>
 
@@ -2564,6 +2472,110 @@
           </a:p>
         </p:txBody>
       </p:sp>
+      <p:sp>
+        <p:nvSpPr>
+          <p:cNvPr id="10" name="Téglalap 9">
+            <a:extLst>
+              <a:ext uri="{FF2B5EF4-FFF2-40B4-BE49-F238E27FC236}">
+                <a16:creationId xmlns:a16="http://schemas.microsoft.com/office/drawing/2014/main" id="{11E80D90-5456-4FC9-9A94-4D6EB0CDABD7}"/>
+              </a:ext>
+            </a:extLst>
+          </p:cNvPr>
+          <p:cNvSpPr/>
+          <p:nvPr userDrawn="1"/>
+        </p:nvSpPr>
+        <p:spPr>
+          <a:xfrm rot="2301359">
+            <a:off x="9156113" y="-550108"/>
+            <a:ext cx="4311205" cy="2115149"/>
+          </a:xfrm>
+          <a:prstGeom prst="rect">
+            <a:avLst/>
+          </a:prstGeom>
+          <a:solidFill>
+            <a:srgbClr val="B5D9FF"/>
+          </a:solidFill>
+          <a:ln>
+            <a:noFill/>
+          </a:ln>
+        </p:spPr>
+        <p:style>
+          <a:lnRef idx="2">
+            <a:schemeClr val="accent1">
+              <a:shade val="50000"/>
+            </a:schemeClr>
+          </a:lnRef>
+          <a:fillRef idx="1">
+            <a:schemeClr val="accent1"/>
+          </a:fillRef>
+          <a:effectRef idx="0">
+            <a:schemeClr val="accent1"/>
+          </a:effectRef>
+          <a:fontRef idx="minor">
+            <a:schemeClr val="lt1"/>
+          </a:fontRef>
+        </p:style>
+        <p:txBody>
+          <a:bodyPr rtlCol="0" anchor="ctr"/>
+          <a:lstStyle/>
+          <a:p>
+            <a:pPr algn="ctr"/>
+            <a:endParaRPr lang="hu-HU"/>
+          </a:p>
+        </p:txBody>
+      </p:sp>
+      <p:sp>
+        <p:nvSpPr>
+          <p:cNvPr id="11" name="Téglalap 10">
+            <a:extLst>
+              <a:ext uri="{FF2B5EF4-FFF2-40B4-BE49-F238E27FC236}">
+                <a16:creationId xmlns:a16="http://schemas.microsoft.com/office/drawing/2014/main" id="{E80C4DBF-3208-4837-A0FD-FE5FCB28E5DE}"/>
+              </a:ext>
+            </a:extLst>
+          </p:cNvPr>
+          <p:cNvSpPr/>
+          <p:nvPr userDrawn="1"/>
+        </p:nvSpPr>
+        <p:spPr>
+          <a:xfrm rot="2301359">
+            <a:off x="-649443" y="6214605"/>
+            <a:ext cx="2066250" cy="1013737"/>
+          </a:xfrm>
+          <a:prstGeom prst="rect">
+            <a:avLst/>
+          </a:prstGeom>
+          <a:solidFill>
+            <a:srgbClr val="479FFF"/>
+          </a:solidFill>
+          <a:ln>
+            <a:noFill/>
+          </a:ln>
+        </p:spPr>
+        <p:style>
+          <a:lnRef idx="2">
+            <a:schemeClr val="accent1">
+              <a:shade val="50000"/>
+            </a:schemeClr>
+          </a:lnRef>
+          <a:fillRef idx="1">
+            <a:schemeClr val="accent1"/>
+          </a:fillRef>
+          <a:effectRef idx="0">
+            <a:schemeClr val="accent1"/>
+          </a:effectRef>
+          <a:fontRef idx="minor">
+            <a:schemeClr val="lt1"/>
+          </a:fontRef>
+        </p:style>
+        <p:txBody>
+          <a:bodyPr rtlCol="0" anchor="ctr"/>
+          <a:lstStyle/>
+          <a:p>
+            <a:pPr algn="ctr"/>
+            <a:endParaRPr lang="hu-HU"/>
+          </a:p>
+        </p:txBody>
+      </p:sp>
     </p:spTree>
     <p:extLst>
       <p:ext uri="{BB962C8B-B14F-4D97-AF65-F5344CB8AC3E}">
@@ -2574,6 +2586,18 @@
   <p:clrMapOvr>
     <a:masterClrMapping/>
   </p:clrMapOvr>
+  <mc:AlternateContent xmlns:mc="http://schemas.openxmlformats.org/markup-compatibility/2006">
+    <mc:Choice xmlns:p159="http://schemas.microsoft.com/office/powerpoint/2015/09/main" Requires="p159">
+      <p:transition xmlns:p14="http://schemas.microsoft.com/office/powerpoint/2010/main" spd="slow" p14:dur="2000">
+        <p159:morph option="byObject"/>
+      </p:transition>
+    </mc:Choice>
+    <mc:Fallback>
+      <p:transition spd="slow">
+        <p:fade/>
+      </p:transition>
+    </mc:Fallback>
+  </mc:AlternateContent>
 </p:sldLayout>
 </file>
 
@@ -5009,6 +5033,43 @@
           <a:chExt cx="0" cy="0"/>
         </a:xfrm>
       </p:grpSpPr>
+      <p:pic>
+        <p:nvPicPr>
+          <p:cNvPr id="8" name="Ábra 7">
+            <a:extLst>
+              <a:ext uri="{FF2B5EF4-FFF2-40B4-BE49-F238E27FC236}">
+                <a16:creationId xmlns:a16="http://schemas.microsoft.com/office/drawing/2014/main" id="{7D33FE9B-3A88-4257-8ACC-AF2375826573}"/>
+              </a:ext>
+            </a:extLst>
+          </p:cNvPr>
+          <p:cNvPicPr>
+            <a:picLocks noChangeAspect="1"/>
+          </p:cNvPicPr>
+          <p:nvPr/>
+        </p:nvPicPr>
+        <p:blipFill>
+          <a:blip r:embed="rId3">
+            <a:alphaModFix/>
+            <a:extLst>
+              <a:ext uri="{96DAC541-7B7A-43D3-8B79-37D633B846F1}">
+                <asvg:svgBlip xmlns:asvg="http://schemas.microsoft.com/office/drawing/2016/SVG/main" r:embed="rId4"/>
+              </a:ext>
+            </a:extLst>
+          </a:blip>
+          <a:stretch>
+            <a:fillRect/>
+          </a:stretch>
+        </p:blipFill>
+        <p:spPr>
+          <a:xfrm>
+            <a:off x="4038600" y="1219200"/>
+            <a:ext cx="4286407" cy="4419600"/>
+          </a:xfrm>
+          <a:prstGeom prst="rect">
+            <a:avLst/>
+          </a:prstGeom>
+        </p:spPr>
+      </p:pic>
       <p:sp>
         <p:nvSpPr>
           <p:cNvPr id="21" name="Google Shape;87;p1">
@@ -5335,48 +5396,59 @@
           </a:p>
         </p:txBody>
       </p:sp>
-      <p:pic>
-        <p:nvPicPr>
-          <p:cNvPr id="6" name="Kép 5" descr="A képen Betűtípus, szimbólum, Grafika, embléma látható&#10;&#10;Lehet, hogy az AI által létrehozott tartalom helytelen.">
-            <a:extLst>
-              <a:ext uri="{FF2B5EF4-FFF2-40B4-BE49-F238E27FC236}">
-                <a16:creationId xmlns:a16="http://schemas.microsoft.com/office/drawing/2014/main" id="{F9161672-0AC4-5C52-73C8-0072337FE0AC}"/>
-              </a:ext>
-            </a:extLst>
-          </p:cNvPr>
-          <p:cNvPicPr>
-            <a:picLocks noChangeAspect="1"/>
-          </p:cNvPicPr>
+      <p:sp>
+        <p:nvSpPr>
+          <p:cNvPr id="2" name="Szövegdoboz 1">
+            <a:extLst>
+              <a:ext uri="{FF2B5EF4-FFF2-40B4-BE49-F238E27FC236}">
+                <a16:creationId xmlns:a16="http://schemas.microsoft.com/office/drawing/2014/main" id="{E3034C36-D15F-4CDB-9B29-92D383F4064B}"/>
+              </a:ext>
+            </a:extLst>
+          </p:cNvPr>
+          <p:cNvSpPr txBox="1"/>
           <p:nvPr/>
-        </p:nvPicPr>
-        <p:blipFill>
-          <a:blip r:embed="rId3"/>
-          <a:stretch>
-            <a:fillRect/>
-          </a:stretch>
-        </p:blipFill>
+        </p:nvSpPr>
         <p:spPr>
           <a:xfrm>
-            <a:off x="3924860" y="2356317"/>
-            <a:ext cx="4342279" cy="1932454"/>
+            <a:off x="2962770" y="2394820"/>
+            <a:ext cx="6266459" cy="1754326"/>
           </a:xfrm>
           <a:prstGeom prst="rect">
             <a:avLst/>
           </a:prstGeom>
-        </p:spPr>
-      </p:pic>
+          <a:noFill/>
+        </p:spPr>
+        <p:txBody>
+          <a:bodyPr wrap="none" rtlCol="0">
+            <a:spAutoFit/>
+          </a:bodyPr>
+          <a:lstStyle/>
+          <a:p>
+            <a:r>
+              <a:rPr lang="hu-HU" sz="10800" dirty="0">
+                <a:solidFill>
+                  <a:srgbClr val="479FFF"/>
+                </a:solidFill>
+                <a:latin typeface="Arial" panose="020B0604020202020204" pitchFamily="34" charset="0"/>
+                <a:cs typeface="Arial" panose="020B0604020202020204" pitchFamily="34" charset="0"/>
+              </a:rPr>
+              <a:t>Corelytics</a:t>
+            </a:r>
+          </a:p>
+        </p:txBody>
+      </p:sp>
     </p:spTree>
   </p:cSld>
   <p:clrMapOvr>
     <a:masterClrMapping/>
   </p:clrMapOvr>
-  <mc:AlternateContent xmlns:mc="http://schemas.openxmlformats.org/markup-compatibility/2006" xmlns:p159="http://schemas.microsoft.com/office/powerpoint/2015/09/main">
-    <mc:Choice Requires="p159">
+  <mc:AlternateContent xmlns:mc="http://schemas.openxmlformats.org/markup-compatibility/2006">
+    <mc:Choice xmlns:p159="http://schemas.microsoft.com/office/powerpoint/2015/09/main" Requires="p159">
       <p:transition xmlns:p14="http://schemas.microsoft.com/office/powerpoint/2010/main" spd="slow" p14:dur="2000">
         <p159:morph option="byObject"/>
       </p:transition>
     </mc:Choice>
-    <mc:Fallback xmlns="">
+    <mc:Fallback>
       <p:transition spd="slow">
         <p:fade/>
       </p:transition>
@@ -5402,6 +5474,43 @@
           <a:chExt cx="0" cy="0"/>
         </a:xfrm>
       </p:grpSpPr>
+      <p:pic>
+        <p:nvPicPr>
+          <p:cNvPr id="6" name="Ábra 5">
+            <a:extLst>
+              <a:ext uri="{FF2B5EF4-FFF2-40B4-BE49-F238E27FC236}">
+                <a16:creationId xmlns:a16="http://schemas.microsoft.com/office/drawing/2014/main" id="{50F6E4D0-A2B2-4105-8BF1-C12B12ED6905}"/>
+              </a:ext>
+            </a:extLst>
+          </p:cNvPr>
+          <p:cNvPicPr>
+            <a:picLocks noChangeAspect="1"/>
+          </p:cNvPicPr>
+          <p:nvPr/>
+        </p:nvPicPr>
+        <p:blipFill>
+          <a:blip r:embed="rId3">
+            <a:alphaModFix/>
+            <a:extLst>
+              <a:ext uri="{96DAC541-7B7A-43D3-8B79-37D633B846F1}">
+                <asvg:svgBlip xmlns:asvg="http://schemas.microsoft.com/office/drawing/2016/SVG/main" r:embed="rId4"/>
+              </a:ext>
+            </a:extLst>
+          </a:blip>
+          <a:stretch>
+            <a:fillRect/>
+          </a:stretch>
+        </p:blipFill>
+        <p:spPr>
+          <a:xfrm>
+            <a:off x="612282" y="3734601"/>
+            <a:ext cx="3580045" cy="3691289"/>
+          </a:xfrm>
+          <a:prstGeom prst="rect">
+            <a:avLst/>
+          </a:prstGeom>
+        </p:spPr>
+      </p:pic>
       <p:sp>
         <p:nvSpPr>
           <p:cNvPr id="170" name="Google Shape;170;p8"/>
@@ -5755,7 +5864,7 @@
           <p:nvPr/>
         </p:nvPicPr>
         <p:blipFill>
-          <a:blip r:embed="rId3"/>
+          <a:blip r:embed="rId5"/>
           <a:stretch>
             <a:fillRect/>
           </a:stretch>
@@ -5768,6 +5877,11 @@
           <a:prstGeom prst="rect">
             <a:avLst/>
           </a:prstGeom>
+          <a:ln w="38100">
+            <a:solidFill>
+              <a:srgbClr val="479FFF"/>
+            </a:solidFill>
+          </a:ln>
         </p:spPr>
       </p:pic>
       <p:pic>
@@ -5785,7 +5899,7 @@
           <p:nvPr/>
         </p:nvPicPr>
         <p:blipFill>
-          <a:blip r:embed="rId4"/>
+          <a:blip r:embed="rId6"/>
           <a:stretch>
             <a:fillRect/>
           </a:stretch>
@@ -5798,6 +5912,105 @@
           <a:prstGeom prst="rect">
             <a:avLst/>
           </a:prstGeom>
+          <a:ln w="38100">
+            <a:solidFill>
+              <a:srgbClr val="479FFF"/>
+            </a:solidFill>
+          </a:ln>
+        </p:spPr>
+      </p:pic>
+      <p:pic>
+        <p:nvPicPr>
+          <p:cNvPr id="1026" name="Picture 2" descr="Jest Logo PNG Transparent &amp; SVG Vector - Freebie Supply">
+            <a:extLst>
+              <a:ext uri="{FF2B5EF4-FFF2-40B4-BE49-F238E27FC236}">
+                <a16:creationId xmlns:a16="http://schemas.microsoft.com/office/drawing/2014/main" id="{E5689836-6CED-453B-AAEE-522CC5161331}"/>
+              </a:ext>
+            </a:extLst>
+          </p:cNvPr>
+          <p:cNvPicPr>
+            <a:picLocks noChangeAspect="1" noChangeArrowheads="1"/>
+          </p:cNvPicPr>
+          <p:nvPr/>
+        </p:nvPicPr>
+        <p:blipFill>
+          <a:blip r:embed="rId7">
+            <a:extLst>
+              <a:ext uri="{28A0092B-C50C-407E-A947-70E740481C1C}">
+                <a14:useLocalDpi xmlns:a14="http://schemas.microsoft.com/office/drawing/2010/main" val="0"/>
+              </a:ext>
+            </a:extLst>
+          </a:blip>
+          <a:srcRect/>
+          <a:stretch>
+            <a:fillRect/>
+          </a:stretch>
+        </p:blipFill>
+        <p:spPr bwMode="auto">
+          <a:xfrm>
+            <a:off x="2710702" y="5217053"/>
+            <a:ext cx="2112497" cy="1584373"/>
+          </a:xfrm>
+          <a:prstGeom prst="rect">
+            <a:avLst/>
+          </a:prstGeom>
+          <a:noFill/>
+          <a:extLst>
+            <a:ext uri="{909E8E84-426E-40DD-AFC4-6F175D3DCCD1}">
+              <a14:hiddenFill xmlns:a14="http://schemas.microsoft.com/office/drawing/2010/main">
+                <a:solidFill>
+                  <a:srgbClr val="FFFFFF"/>
+                </a:solidFill>
+              </a14:hiddenFill>
+            </a:ext>
+          </a:extLst>
+        </p:spPr>
+      </p:pic>
+      <p:pic>
+        <p:nvPicPr>
+          <p:cNvPr id="1028" name="Picture 4">
+            <a:extLst>
+              <a:ext uri="{FF2B5EF4-FFF2-40B4-BE49-F238E27FC236}">
+                <a16:creationId xmlns:a16="http://schemas.microsoft.com/office/drawing/2014/main" id="{1E895D8D-18D3-4A01-85EF-53394A8C1456}"/>
+              </a:ext>
+            </a:extLst>
+          </p:cNvPr>
+          <p:cNvPicPr>
+            <a:picLocks noChangeAspect="1" noChangeArrowheads="1"/>
+          </p:cNvPicPr>
+          <p:nvPr/>
+        </p:nvPicPr>
+        <p:blipFill>
+          <a:blip r:embed="rId8">
+            <a:extLst>
+              <a:ext uri="{28A0092B-C50C-407E-A947-70E740481C1C}">
+                <a14:useLocalDpi xmlns:a14="http://schemas.microsoft.com/office/drawing/2010/main" val="0"/>
+              </a:ext>
+            </a:extLst>
+          </a:blip>
+          <a:srcRect/>
+          <a:stretch>
+            <a:fillRect/>
+          </a:stretch>
+        </p:blipFill>
+        <p:spPr bwMode="auto">
+          <a:xfrm>
+            <a:off x="10662958" y="3765452"/>
+            <a:ext cx="1814793" cy="1814793"/>
+          </a:xfrm>
+          <a:prstGeom prst="rect">
+            <a:avLst/>
+          </a:prstGeom>
+          <a:noFill/>
+          <a:extLst>
+            <a:ext uri="{909E8E84-426E-40DD-AFC4-6F175D3DCCD1}">
+              <a14:hiddenFill xmlns:a14="http://schemas.microsoft.com/office/drawing/2010/main">
+                <a:solidFill>
+                  <a:srgbClr val="FFFFFF"/>
+                </a:solidFill>
+              </a14:hiddenFill>
+            </a:ext>
+          </a:extLst>
         </p:spPr>
       </p:pic>
     </p:spTree>
@@ -5805,13 +6018,13 @@
   <p:clrMapOvr>
     <a:masterClrMapping/>
   </p:clrMapOvr>
-  <mc:AlternateContent xmlns:mc="http://schemas.openxmlformats.org/markup-compatibility/2006" xmlns:p159="http://schemas.microsoft.com/office/powerpoint/2015/09/main">
-    <mc:Choice Requires="p159">
+  <mc:AlternateContent xmlns:mc="http://schemas.openxmlformats.org/markup-compatibility/2006">
+    <mc:Choice xmlns:p159="http://schemas.microsoft.com/office/powerpoint/2015/09/main" Requires="p159">
       <p:transition xmlns:p14="http://schemas.microsoft.com/office/powerpoint/2010/main" spd="slow" p14:dur="2000">
         <p159:morph option="byObject"/>
       </p:transition>
     </mc:Choice>
-    <mc:Fallback xmlns="">
+    <mc:Fallback>
       <p:transition spd="slow">
         <p:fade/>
       </p:transition>
@@ -5837,6 +6050,43 @@
           <a:chExt cx="0" cy="0"/>
         </a:xfrm>
       </p:grpSpPr>
+      <p:pic>
+        <p:nvPicPr>
+          <p:cNvPr id="5" name="Ábra 4">
+            <a:extLst>
+              <a:ext uri="{FF2B5EF4-FFF2-40B4-BE49-F238E27FC236}">
+                <a16:creationId xmlns:a16="http://schemas.microsoft.com/office/drawing/2014/main" id="{8ECF2034-D1A3-48B5-9E77-062129C09808}"/>
+              </a:ext>
+            </a:extLst>
+          </p:cNvPr>
+          <p:cNvPicPr>
+            <a:picLocks noChangeAspect="1"/>
+          </p:cNvPicPr>
+          <p:nvPr/>
+        </p:nvPicPr>
+        <p:blipFill>
+          <a:blip r:embed="rId3">
+            <a:alphaModFix/>
+            <a:extLst>
+              <a:ext uri="{96DAC541-7B7A-43D3-8B79-37D633B846F1}">
+                <asvg:svgBlip xmlns:asvg="http://schemas.microsoft.com/office/drawing/2016/SVG/main" r:embed="rId4"/>
+              </a:ext>
+            </a:extLst>
+          </a:blip>
+          <a:stretch>
+            <a:fillRect/>
+          </a:stretch>
+        </p:blipFill>
+        <p:spPr>
+          <a:xfrm>
+            <a:off x="612282" y="3734601"/>
+            <a:ext cx="3580045" cy="3691289"/>
+          </a:xfrm>
+          <a:prstGeom prst="rect">
+            <a:avLst/>
+          </a:prstGeom>
+        </p:spPr>
+      </p:pic>
       <p:sp>
         <p:nvSpPr>
           <p:cNvPr id="182" name="Google Shape;182;p10"/>
@@ -6071,13 +6321,13 @@
   <p:clrMapOvr>
     <a:masterClrMapping/>
   </p:clrMapOvr>
-  <mc:AlternateContent xmlns:mc="http://schemas.openxmlformats.org/markup-compatibility/2006" xmlns:p159="http://schemas.microsoft.com/office/powerpoint/2015/09/main">
-    <mc:Choice Requires="p159">
+  <mc:AlternateContent xmlns:mc="http://schemas.openxmlformats.org/markup-compatibility/2006">
+    <mc:Choice xmlns:p159="http://schemas.microsoft.com/office/powerpoint/2015/09/main" Requires="p159">
       <p:transition xmlns:p14="http://schemas.microsoft.com/office/powerpoint/2010/main" spd="slow" p14:dur="2000">
         <p159:morph option="byObject"/>
       </p:transition>
     </mc:Choice>
-    <mc:Fallback xmlns="">
+    <mc:Fallback>
       <p:transition spd="slow">
         <p:fade/>
       </p:transition>
@@ -6091,7 +6341,7 @@
   <p:cSld>
     <p:spTree>
       <p:nvGrpSpPr>
-        <p:cNvPr id="1" name="Shape 187"/>
+        <p:cNvPr id="1" name=""/>
         <p:cNvGrpSpPr/>
         <p:nvPr/>
       </p:nvGrpSpPr>
@@ -6103,121 +6353,113 @@
           <a:chExt cx="0" cy="0"/>
         </a:xfrm>
       </p:grpSpPr>
-      <p:sp>
-        <p:nvSpPr>
-          <p:cNvPr id="188" name="Google Shape;188;p11"/>
-          <p:cNvSpPr txBox="1">
+      <p:pic>
+        <p:nvPicPr>
+          <p:cNvPr id="4" name="Ábra 3">
+            <a:extLst>
+              <a:ext uri="{FF2B5EF4-FFF2-40B4-BE49-F238E27FC236}">
+                <a16:creationId xmlns:a16="http://schemas.microsoft.com/office/drawing/2014/main" id="{C831D527-A21E-47C5-87E1-36E51285508A}"/>
+              </a:ext>
+            </a:extLst>
+          </p:cNvPr>
+          <p:cNvPicPr>
+            <a:picLocks noChangeAspect="1"/>
+          </p:cNvPicPr>
+          <p:nvPr/>
+        </p:nvPicPr>
+        <p:blipFill>
+          <a:blip r:embed="rId2">
+            <a:alphaModFix/>
+            <a:extLst>
+              <a:ext uri="{96DAC541-7B7A-43D3-8B79-37D633B846F1}">
+                <asvg:svgBlip xmlns:asvg="http://schemas.microsoft.com/office/drawing/2016/SVG/main" r:embed="rId3"/>
+              </a:ext>
+            </a:extLst>
+          </a:blip>
+          <a:stretch>
+            <a:fillRect/>
+          </a:stretch>
+        </p:blipFill>
+        <p:spPr>
+          <a:xfrm>
+            <a:off x="4038600" y="1219200"/>
+            <a:ext cx="4286407" cy="4419600"/>
+          </a:xfrm>
+          <a:prstGeom prst="rect">
+            <a:avLst/>
+          </a:prstGeom>
+        </p:spPr>
+      </p:pic>
+      <p:sp>
+        <p:nvSpPr>
+          <p:cNvPr id="2" name="Cím 1">
+            <a:extLst>
+              <a:ext uri="{FF2B5EF4-FFF2-40B4-BE49-F238E27FC236}">
+                <a16:creationId xmlns:a16="http://schemas.microsoft.com/office/drawing/2014/main" id="{069B1655-DFB8-49C4-893B-E7BB44F34CD4}"/>
+              </a:ext>
+            </a:extLst>
+          </p:cNvPr>
+          <p:cNvSpPr>
             <a:spLocks noGrp="1"/>
           </p:cNvSpPr>
           <p:nvPr>
-            <p:ph type="title"/>
+            <p:ph type="ctrTitle"/>
           </p:nvPr>
         </p:nvSpPr>
-        <p:spPr>
-          <a:prstGeom prst="rect">
-            <a:avLst/>
-          </a:prstGeom>
-          <a:noFill/>
-          <a:ln>
-            <a:noFill/>
-          </a:ln>
-        </p:spPr>
-        <p:txBody>
-          <a:bodyPr spcFirstLastPara="1" wrap="square" lIns="91425" tIns="45700" rIns="91425" bIns="45700" anchor="ctr" anchorCtr="0">
-            <a:normAutofit/>
-          </a:bodyPr>
+        <p:spPr/>
+        <p:txBody>
+          <a:bodyPr/>
           <a:lstStyle/>
           <a:p>
-            <a:pPr marL="0" lvl="0" indent="0" algn="l" rtl="0">
-              <a:lnSpc>
-                <a:spcPct val="90000"/>
-              </a:lnSpc>
-              <a:spcBef>
-                <a:spcPts val="0"/>
-              </a:spcBef>
-              <a:spcAft>
-                <a:spcPts val="0"/>
-              </a:spcAft>
-              <a:buClr>
-                <a:schemeClr val="dk1"/>
-              </a:buClr>
-              <a:buSzPts val="4400"/>
-              <a:buFont typeface="Calibri"/>
-              <a:buNone/>
-            </a:pPr>
-            <a:endParaRPr dirty="0"/>
-          </a:p>
-        </p:txBody>
-      </p:sp>
-      <p:sp>
-        <p:nvSpPr>
-          <p:cNvPr id="189" name="Google Shape;189;p11"/>
-          <p:cNvSpPr txBox="1">
+            <a:r>
+              <a:rPr lang="hu-HU" dirty="0"/>
+              <a:t>Köszönjük a figyelmet!</a:t>
+            </a:r>
+          </a:p>
+        </p:txBody>
+      </p:sp>
+      <p:sp>
+        <p:nvSpPr>
+          <p:cNvPr id="3" name="Alcím 2">
+            <a:extLst>
+              <a:ext uri="{FF2B5EF4-FFF2-40B4-BE49-F238E27FC236}">
+                <a16:creationId xmlns:a16="http://schemas.microsoft.com/office/drawing/2014/main" id="{BB9A9ECB-30B0-4388-BB0F-C481F339C9D1}"/>
+              </a:ext>
+            </a:extLst>
+          </p:cNvPr>
+          <p:cNvSpPr>
             <a:spLocks noGrp="1"/>
           </p:cNvSpPr>
           <p:nvPr>
-            <p:ph idx="1"/>
+            <p:ph type="subTitle" idx="1"/>
           </p:nvPr>
         </p:nvSpPr>
-        <p:spPr>
-          <a:prstGeom prst="rect">
-            <a:avLst/>
-          </a:prstGeom>
-          <a:noFill/>
-          <a:ln>
-            <a:noFill/>
-          </a:ln>
-        </p:spPr>
-        <p:txBody>
-          <a:bodyPr spcFirstLastPara="1" wrap="square" lIns="91425" tIns="45700" rIns="91425" bIns="45700" anchor="t" anchorCtr="0">
-            <a:normAutofit/>
-          </a:bodyPr>
+        <p:spPr/>
+        <p:txBody>
+          <a:bodyPr/>
           <a:lstStyle/>
           <a:p>
-            <a:pPr marL="0" lvl="0" indent="0" algn="ctr" rtl="0">
-              <a:lnSpc>
-                <a:spcPct val="90000"/>
-              </a:lnSpc>
-              <a:spcBef>
-                <a:spcPts val="0"/>
-              </a:spcBef>
-              <a:spcAft>
-                <a:spcPts val="0"/>
-              </a:spcAft>
-              <a:buClr>
-                <a:schemeClr val="dk1"/>
-              </a:buClr>
-              <a:buSzPts val="2800"/>
-              <a:buNone/>
-            </a:pPr>
-            <a:r>
-              <a:rPr lang="hu-HU" sz="5400" b="1" i="1" dirty="0">
-                <a:latin typeface="Cambria" panose="02040503050406030204" pitchFamily="18" charset="0"/>
-                <a:ea typeface="Cambria" panose="02040503050406030204" pitchFamily="18" charset="0"/>
-                <a:cs typeface="Times New Roman" panose="02020603050405020304" pitchFamily="18" charset="0"/>
-              </a:rPr>
-              <a:t>Köszönjük figyelmüket!</a:t>
-            </a:r>
-            <a:endParaRPr sz="5400" b="1" i="1" dirty="0">
-              <a:latin typeface="Cambria" panose="02040503050406030204" pitchFamily="18" charset="0"/>
-              <a:ea typeface="Cambria" panose="02040503050406030204" pitchFamily="18" charset="0"/>
-              <a:cs typeface="Times New Roman" panose="02020603050405020304" pitchFamily="18" charset="0"/>
-            </a:endParaRPr>
+            <a:endParaRPr lang="hu-HU"/>
           </a:p>
         </p:txBody>
       </p:sp>
     </p:spTree>
+    <p:extLst>
+      <p:ext uri="{BB962C8B-B14F-4D97-AF65-F5344CB8AC3E}">
+        <p14:creationId xmlns:p14="http://schemas.microsoft.com/office/powerpoint/2010/main" val="611288818"/>
+      </p:ext>
+    </p:extLst>
   </p:cSld>
   <p:clrMapOvr>
     <a:masterClrMapping/>
   </p:clrMapOvr>
-  <mc:AlternateContent xmlns:mc="http://schemas.openxmlformats.org/markup-compatibility/2006" xmlns:p159="http://schemas.microsoft.com/office/powerpoint/2015/09/main">
-    <mc:Choice Requires="p159">
+  <mc:AlternateContent xmlns:mc="http://schemas.openxmlformats.org/markup-compatibility/2006">
+    <mc:Choice xmlns:p159="http://schemas.microsoft.com/office/powerpoint/2015/09/main" Requires="p159">
       <p:transition xmlns:p14="http://schemas.microsoft.com/office/powerpoint/2010/main" spd="slow" p14:dur="2000">
         <p159:morph option="byObject"/>
       </p:transition>
     </mc:Choice>
-    <mc:Fallback xmlns="">
+    <mc:Fallback>
       <p:transition spd="slow">
         <p:fade/>
       </p:transition>
@@ -6243,6 +6485,147 @@
           <a:chExt cx="0" cy="0"/>
         </a:xfrm>
       </p:grpSpPr>
+      <p:pic>
+        <p:nvPicPr>
+          <p:cNvPr id="13" name="Ábra 12">
+            <a:extLst>
+              <a:ext uri="{FF2B5EF4-FFF2-40B4-BE49-F238E27FC236}">
+                <a16:creationId xmlns:a16="http://schemas.microsoft.com/office/drawing/2014/main" id="{729D7A69-9940-4747-AFBA-384F44A89628}"/>
+              </a:ext>
+            </a:extLst>
+          </p:cNvPr>
+          <p:cNvPicPr>
+            <a:picLocks noChangeAspect="1"/>
+          </p:cNvPicPr>
+          <p:nvPr/>
+        </p:nvPicPr>
+        <p:blipFill>
+          <a:blip r:embed="rId3">
+            <a:alphaModFix/>
+            <a:extLst>
+              <a:ext uri="{96DAC541-7B7A-43D3-8B79-37D633B846F1}">
+                <asvg:svgBlip xmlns:asvg="http://schemas.microsoft.com/office/drawing/2016/SVG/main" r:embed="rId4"/>
+              </a:ext>
+            </a:extLst>
+          </a:blip>
+          <a:stretch>
+            <a:fillRect/>
+          </a:stretch>
+        </p:blipFill>
+        <p:spPr>
+          <a:xfrm>
+            <a:off x="612282" y="3734601"/>
+            <a:ext cx="3580045" cy="3691289"/>
+          </a:xfrm>
+          <a:prstGeom prst="rect">
+            <a:avLst/>
+          </a:prstGeom>
+        </p:spPr>
+      </p:pic>
+      <p:sp>
+        <p:nvSpPr>
+          <p:cNvPr id="12" name="Téglalap 11">
+            <a:extLst>
+              <a:ext uri="{FF2B5EF4-FFF2-40B4-BE49-F238E27FC236}">
+                <a16:creationId xmlns:a16="http://schemas.microsoft.com/office/drawing/2014/main" id="{6DD3400B-8620-483E-AF5F-1EA6140AD060}"/>
+              </a:ext>
+            </a:extLst>
+          </p:cNvPr>
+          <p:cNvSpPr/>
+          <p:nvPr/>
+        </p:nvSpPr>
+        <p:spPr>
+          <a:xfrm>
+            <a:off x="1644275" y="3574934"/>
+            <a:ext cx="8865348" cy="841469"/>
+          </a:xfrm>
+          <a:prstGeom prst="rect">
+            <a:avLst/>
+          </a:prstGeom>
+          <a:solidFill>
+            <a:srgbClr val="93C6FF"/>
+          </a:solidFill>
+          <a:ln>
+            <a:noFill/>
+          </a:ln>
+        </p:spPr>
+        <p:style>
+          <a:lnRef idx="2">
+            <a:schemeClr val="accent1">
+              <a:shade val="50000"/>
+            </a:schemeClr>
+          </a:lnRef>
+          <a:fillRef idx="1">
+            <a:schemeClr val="accent1"/>
+          </a:fillRef>
+          <a:effectRef idx="0">
+            <a:schemeClr val="accent1"/>
+          </a:effectRef>
+          <a:fontRef idx="minor">
+            <a:schemeClr val="lt1"/>
+          </a:fontRef>
+        </p:style>
+        <p:txBody>
+          <a:bodyPr rtlCol="0" anchor="ctr"/>
+          <a:lstStyle/>
+          <a:p>
+            <a:pPr algn="ctr"/>
+            <a:endParaRPr lang="hu-HU"/>
+          </a:p>
+        </p:txBody>
+      </p:sp>
+      <p:sp>
+        <p:nvSpPr>
+          <p:cNvPr id="2" name="Téglalap 1">
+            <a:extLst>
+              <a:ext uri="{FF2B5EF4-FFF2-40B4-BE49-F238E27FC236}">
+                <a16:creationId xmlns:a16="http://schemas.microsoft.com/office/drawing/2014/main" id="{3AB089C9-98D5-4C81-A6B0-2CFBC0D4E157}"/>
+              </a:ext>
+            </a:extLst>
+          </p:cNvPr>
+          <p:cNvSpPr/>
+          <p:nvPr/>
+        </p:nvSpPr>
+        <p:spPr>
+          <a:xfrm>
+            <a:off x="1644275" y="2725310"/>
+            <a:ext cx="8865348" cy="841469"/>
+          </a:xfrm>
+          <a:prstGeom prst="rect">
+            <a:avLst/>
+          </a:prstGeom>
+          <a:solidFill>
+            <a:srgbClr val="479FFF"/>
+          </a:solidFill>
+          <a:ln>
+            <a:noFill/>
+          </a:ln>
+        </p:spPr>
+        <p:style>
+          <a:lnRef idx="2">
+            <a:schemeClr val="accent1">
+              <a:shade val="50000"/>
+            </a:schemeClr>
+          </a:lnRef>
+          <a:fillRef idx="1">
+            <a:schemeClr val="accent1"/>
+          </a:fillRef>
+          <a:effectRef idx="0">
+            <a:schemeClr val="accent1"/>
+          </a:effectRef>
+          <a:fontRef idx="minor">
+            <a:schemeClr val="lt1"/>
+          </a:fontRef>
+        </p:style>
+        <p:txBody>
+          <a:bodyPr rtlCol="0" anchor="ctr"/>
+          <a:lstStyle/>
+          <a:p>
+            <a:pPr algn="ctr"/>
+            <a:endParaRPr lang="hu-HU"/>
+          </a:p>
+        </p:txBody>
+      </p:sp>
       <p:sp>
         <p:nvSpPr>
           <p:cNvPr id="98" name="Google Shape;98;p2"/>
@@ -6325,7 +6708,7 @@
         <p:spPr>
           <a:xfrm>
             <a:off x="1453273" y="1712789"/>
-            <a:ext cx="9056350" cy="1090652"/>
+            <a:ext cx="9056350" cy="824877"/>
           </a:xfrm>
           <a:prstGeom prst="rect">
             <a:avLst/>
@@ -6416,122 +6799,14 @@
       </p:sp>
       <p:sp>
         <p:nvSpPr>
-          <p:cNvPr id="99" name="Google Shape;99;p2"/>
-          <p:cNvSpPr/>
-          <p:nvPr/>
-        </p:nvSpPr>
-        <p:spPr>
-          <a:xfrm>
-            <a:off x="1606174" y="2615124"/>
-            <a:ext cx="8903450" cy="1848872"/>
-          </a:xfrm>
-          <a:prstGeom prst="rect">
-            <a:avLst/>
-          </a:prstGeom>
-          <a:solidFill>
-            <a:schemeClr val="accent1">
-              <a:lumMod val="60000"/>
-              <a:lumOff val="40000"/>
-            </a:schemeClr>
-          </a:solidFill>
-          <a:ln w="9525" cap="flat" cmpd="sng">
-            <a:solidFill>
-              <a:schemeClr val="dk2"/>
-            </a:solidFill>
-            <a:prstDash val="solid"/>
-            <a:round/>
-            <a:headEnd type="none" w="sm" len="sm"/>
-            <a:tailEnd type="none" w="sm" len="sm"/>
-          </a:ln>
-        </p:spPr>
-        <p:txBody>
-          <a:bodyPr spcFirstLastPara="1" wrap="square" lIns="91425" tIns="91425" rIns="91425" bIns="91425" anchor="ctr" anchorCtr="0">
-            <a:noAutofit/>
-          </a:bodyPr>
-          <a:lstStyle/>
-          <a:p>
-            <a:pPr marL="0" lvl="0" indent="0" algn="ctr" rtl="0">
-              <a:spcBef>
-                <a:spcPts val="0"/>
-              </a:spcBef>
-              <a:spcAft>
-                <a:spcPts val="0"/>
-              </a:spcAft>
-              <a:buNone/>
-            </a:pPr>
-            <a:endParaRPr dirty="0">
-              <a:latin typeface="Calibri"/>
-              <a:ea typeface="Calibri"/>
-              <a:cs typeface="Calibri"/>
-              <a:sym typeface="Calibri"/>
-            </a:endParaRPr>
-          </a:p>
-        </p:txBody>
-      </p:sp>
-      <p:sp>
-        <p:nvSpPr>
-          <p:cNvPr id="100" name="Google Shape;100;p2"/>
-          <p:cNvSpPr/>
-          <p:nvPr/>
-        </p:nvSpPr>
-        <p:spPr>
-          <a:xfrm>
-            <a:off x="1606174" y="3678034"/>
-            <a:ext cx="8903449" cy="905509"/>
-          </a:xfrm>
-          <a:prstGeom prst="rect">
-            <a:avLst/>
-          </a:prstGeom>
-          <a:solidFill>
-            <a:schemeClr val="accent5">
-              <a:lumMod val="40000"/>
-              <a:lumOff val="60000"/>
-            </a:schemeClr>
-          </a:solidFill>
-          <a:ln w="9525" cap="flat" cmpd="sng">
-            <a:solidFill>
-              <a:schemeClr val="dk2"/>
-            </a:solidFill>
-            <a:prstDash val="solid"/>
-            <a:round/>
-            <a:headEnd type="none" w="sm" len="sm"/>
-            <a:tailEnd type="none" w="sm" len="sm"/>
-          </a:ln>
-        </p:spPr>
-        <p:txBody>
-          <a:bodyPr spcFirstLastPara="1" wrap="square" lIns="91425" tIns="91425" rIns="91425" bIns="91425" anchor="ctr" anchorCtr="0">
-            <a:noAutofit/>
-          </a:bodyPr>
-          <a:lstStyle/>
-          <a:p>
-            <a:pPr marL="0" lvl="0" indent="0" algn="ctr" rtl="0">
-              <a:spcBef>
-                <a:spcPts val="0"/>
-              </a:spcBef>
-              <a:spcAft>
-                <a:spcPts val="0"/>
-              </a:spcAft>
-              <a:buNone/>
-            </a:pPr>
-            <a:endParaRPr>
-              <a:latin typeface="Calibri"/>
-              <a:ea typeface="Calibri"/>
-              <a:cs typeface="Calibri"/>
-              <a:sym typeface="Calibri"/>
-            </a:endParaRPr>
-          </a:p>
-        </p:txBody>
-      </p:sp>
-      <p:sp>
-        <p:nvSpPr>
           <p:cNvPr id="102" name="Google Shape;102;p2"/>
           <p:cNvSpPr txBox="1"/>
           <p:nvPr/>
         </p:nvSpPr>
         <p:spPr>
           <a:xfrm>
-            <a:off x="1529723" y="2833984"/>
-            <a:ext cx="8903450" cy="908225"/>
+            <a:off x="1453272" y="2725310"/>
+            <a:ext cx="7575673" cy="565912"/>
           </a:xfrm>
           <a:prstGeom prst="rect">
             <a:avLst/>
@@ -6597,8 +6872,8 @@
         </p:nvSpPr>
         <p:spPr>
           <a:xfrm>
-            <a:off x="1606174" y="3813625"/>
-            <a:ext cx="8903449" cy="906182"/>
+            <a:off x="1644275" y="3633348"/>
+            <a:ext cx="8903449" cy="599524"/>
           </a:xfrm>
           <a:prstGeom prst="rect">
             <a:avLst/>
@@ -6669,13 +6944,13 @@
   <p:clrMapOvr>
     <a:masterClrMapping/>
   </p:clrMapOvr>
-  <mc:AlternateContent xmlns:mc="http://schemas.openxmlformats.org/markup-compatibility/2006" xmlns:p159="http://schemas.microsoft.com/office/powerpoint/2015/09/main">
-    <mc:Choice Requires="p159">
+  <mc:AlternateContent xmlns:mc="http://schemas.openxmlformats.org/markup-compatibility/2006">
+    <mc:Choice xmlns:p159="http://schemas.microsoft.com/office/powerpoint/2015/09/main" Requires="p159">
       <p:transition xmlns:p14="http://schemas.microsoft.com/office/powerpoint/2010/main" spd="slow" p14:dur="2000">
         <p159:morph option="byObject"/>
       </p:transition>
     </mc:Choice>
-    <mc:Fallback xmlns="">
+    <mc:Fallback>
       <p:transition spd="slow">
         <p:fade/>
       </p:transition>
@@ -6701,6 +6976,43 @@
           <a:chExt cx="0" cy="0"/>
         </a:xfrm>
       </p:grpSpPr>
+      <p:pic>
+        <p:nvPicPr>
+          <p:cNvPr id="19" name="Ábra 18">
+            <a:extLst>
+              <a:ext uri="{FF2B5EF4-FFF2-40B4-BE49-F238E27FC236}">
+                <a16:creationId xmlns:a16="http://schemas.microsoft.com/office/drawing/2014/main" id="{2424207F-CD7F-4DE1-90C3-4B964185C44C}"/>
+              </a:ext>
+            </a:extLst>
+          </p:cNvPr>
+          <p:cNvPicPr>
+            <a:picLocks noChangeAspect="1"/>
+          </p:cNvPicPr>
+          <p:nvPr/>
+        </p:nvPicPr>
+        <p:blipFill>
+          <a:blip r:embed="rId3">
+            <a:alphaModFix/>
+            <a:extLst>
+              <a:ext uri="{96DAC541-7B7A-43D3-8B79-37D633B846F1}">
+                <asvg:svgBlip xmlns:asvg="http://schemas.microsoft.com/office/drawing/2016/SVG/main" r:embed="rId4"/>
+              </a:ext>
+            </a:extLst>
+          </a:blip>
+          <a:stretch>
+            <a:fillRect/>
+          </a:stretch>
+        </p:blipFill>
+        <p:spPr>
+          <a:xfrm>
+            <a:off x="612282" y="3734601"/>
+            <a:ext cx="3580045" cy="3691289"/>
+          </a:xfrm>
+          <a:prstGeom prst="rect">
+            <a:avLst/>
+          </a:prstGeom>
+        </p:spPr>
+      </p:pic>
       <p:sp>
         <p:nvSpPr>
           <p:cNvPr id="176" name="Google Shape;176;p9"/>
@@ -7010,7 +7322,7 @@
           <p:nvPr/>
         </p:nvPicPr>
         <p:blipFill>
-          <a:blip r:embed="rId3">
+          <a:blip r:embed="rId5">
             <a:extLst>
               <a:ext uri="{28A0092B-C50C-407E-A947-70E740481C1C}">
                 <a14:useLocalDpi xmlns:a14="http://schemas.microsoft.com/office/drawing/2010/main" val="0"/>
@@ -7057,7 +7369,7 @@
           <p:nvPr/>
         </p:nvPicPr>
         <p:blipFill>
-          <a:blip r:embed="rId4"/>
+          <a:blip r:embed="rId6"/>
           <a:stretch>
             <a:fillRect/>
           </a:stretch>
@@ -7087,7 +7399,7 @@
           <p:nvPr/>
         </p:nvPicPr>
         <p:blipFill>
-          <a:blip r:embed="rId5"/>
+          <a:blip r:embed="rId7"/>
           <a:stretch>
             <a:fillRect/>
           </a:stretch>
@@ -7147,7 +7459,7 @@
           <p:nvPr/>
         </p:nvPicPr>
         <p:blipFill>
-          <a:blip r:embed="rId6"/>
+          <a:blip r:embed="rId8"/>
           <a:stretch>
             <a:fillRect/>
           </a:stretch>
@@ -7393,18 +7705,230 @@
           </a:p>
         </p:txBody>
       </p:sp>
+      <p:sp>
+        <p:nvSpPr>
+          <p:cNvPr id="17" name="Téglalap 16">
+            <a:extLst>
+              <a:ext uri="{FF2B5EF4-FFF2-40B4-BE49-F238E27FC236}">
+                <a16:creationId xmlns:a16="http://schemas.microsoft.com/office/drawing/2014/main" id="{A9354F7B-8B49-4AE0-AC52-15940795F551}"/>
+              </a:ext>
+            </a:extLst>
+          </p:cNvPr>
+          <p:cNvSpPr/>
+          <p:nvPr/>
+        </p:nvSpPr>
+        <p:spPr>
+          <a:xfrm>
+            <a:off x="4103419" y="3890683"/>
+            <a:ext cx="1694043" cy="2532530"/>
+          </a:xfrm>
+          <a:prstGeom prst="rect">
+            <a:avLst/>
+          </a:prstGeom>
+          <a:solidFill>
+            <a:srgbClr val="479FFF">
+              <a:alpha val="0"/>
+            </a:srgbClr>
+          </a:solidFill>
+          <a:ln>
+            <a:noFill/>
+          </a:ln>
+        </p:spPr>
+        <p:style>
+          <a:lnRef idx="2">
+            <a:schemeClr val="accent1">
+              <a:shade val="50000"/>
+            </a:schemeClr>
+          </a:lnRef>
+          <a:fillRef idx="1">
+            <a:schemeClr val="accent1"/>
+          </a:fillRef>
+          <a:effectRef idx="0">
+            <a:schemeClr val="accent1"/>
+          </a:effectRef>
+          <a:fontRef idx="minor">
+            <a:schemeClr val="lt1"/>
+          </a:fontRef>
+        </p:style>
+        <p:txBody>
+          <a:bodyPr rtlCol="0" anchor="ctr"/>
+          <a:lstStyle/>
+          <a:p>
+            <a:pPr algn="ctr"/>
+            <a:endParaRPr lang="hu-HU"/>
+          </a:p>
+        </p:txBody>
+      </p:sp>
+      <p:sp>
+        <p:nvSpPr>
+          <p:cNvPr id="18" name="Téglalap 17">
+            <a:extLst>
+              <a:ext uri="{FF2B5EF4-FFF2-40B4-BE49-F238E27FC236}">
+                <a16:creationId xmlns:a16="http://schemas.microsoft.com/office/drawing/2014/main" id="{4E8A85A5-E426-4C68-A4CA-029373DD2F9D}"/>
+              </a:ext>
+            </a:extLst>
+          </p:cNvPr>
+          <p:cNvSpPr/>
+          <p:nvPr/>
+        </p:nvSpPr>
+        <p:spPr>
+          <a:xfrm>
+            <a:off x="6394539" y="3890682"/>
+            <a:ext cx="1694043" cy="2532529"/>
+          </a:xfrm>
+          <a:prstGeom prst="rect">
+            <a:avLst/>
+          </a:prstGeom>
+          <a:solidFill>
+            <a:srgbClr val="93C6FF">
+              <a:alpha val="0"/>
+            </a:srgbClr>
+          </a:solidFill>
+          <a:ln>
+            <a:noFill/>
+          </a:ln>
+        </p:spPr>
+        <p:style>
+          <a:lnRef idx="2">
+            <a:schemeClr val="accent1">
+              <a:shade val="50000"/>
+            </a:schemeClr>
+          </a:lnRef>
+          <a:fillRef idx="1">
+            <a:schemeClr val="accent1"/>
+          </a:fillRef>
+          <a:effectRef idx="0">
+            <a:schemeClr val="accent1"/>
+          </a:effectRef>
+          <a:fontRef idx="minor">
+            <a:schemeClr val="lt1"/>
+          </a:fontRef>
+        </p:style>
+        <p:txBody>
+          <a:bodyPr rtlCol="0" anchor="ctr"/>
+          <a:lstStyle/>
+          <a:p>
+            <a:pPr algn="ctr"/>
+            <a:endParaRPr lang="hu-HU"/>
+          </a:p>
+        </p:txBody>
+      </p:sp>
+      <p:sp>
+        <p:nvSpPr>
+          <p:cNvPr id="21" name="Trapezoid 20">
+            <a:extLst>
+              <a:ext uri="{FF2B5EF4-FFF2-40B4-BE49-F238E27FC236}">
+                <a16:creationId xmlns:a16="http://schemas.microsoft.com/office/drawing/2014/main" id="{DD6BA8C7-0672-4CD3-ABC6-1BB1F1E1D04F}"/>
+              </a:ext>
+            </a:extLst>
+          </p:cNvPr>
+          <p:cNvSpPr/>
+          <p:nvPr/>
+        </p:nvSpPr>
+        <p:spPr>
+          <a:xfrm rot="10800000">
+            <a:off x="1315265" y="7212167"/>
+            <a:ext cx="1610924" cy="855053"/>
+          </a:xfrm>
+          <a:prstGeom prst="trapezoid">
+            <a:avLst/>
+          </a:prstGeom>
+          <a:solidFill>
+            <a:srgbClr val="479FFF"/>
+          </a:solidFill>
+          <a:ln>
+            <a:noFill/>
+          </a:ln>
+        </p:spPr>
+        <p:style>
+          <a:lnRef idx="2">
+            <a:schemeClr val="accent1">
+              <a:shade val="15000"/>
+            </a:schemeClr>
+          </a:lnRef>
+          <a:fillRef idx="1">
+            <a:schemeClr val="accent1"/>
+          </a:fillRef>
+          <a:effectRef idx="0">
+            <a:schemeClr val="accent1"/>
+          </a:effectRef>
+          <a:fontRef idx="minor">
+            <a:schemeClr val="lt1"/>
+          </a:fontRef>
+        </p:style>
+        <p:txBody>
+          <a:bodyPr rtlCol="0" anchor="ctr"/>
+          <a:lstStyle/>
+          <a:p>
+            <a:pPr algn="ctr"/>
+            <a:endParaRPr lang="hu-HU"/>
+          </a:p>
+        </p:txBody>
+      </p:sp>
+      <p:sp>
+        <p:nvSpPr>
+          <p:cNvPr id="22" name="Trapezoid 21">
+            <a:extLst>
+              <a:ext uri="{FF2B5EF4-FFF2-40B4-BE49-F238E27FC236}">
+                <a16:creationId xmlns:a16="http://schemas.microsoft.com/office/drawing/2014/main" id="{05C4641E-93CE-4E72-B242-06FA90CD5E85}"/>
+              </a:ext>
+            </a:extLst>
+          </p:cNvPr>
+          <p:cNvSpPr/>
+          <p:nvPr/>
+        </p:nvSpPr>
+        <p:spPr>
+          <a:xfrm>
+            <a:off x="9144000" y="-964158"/>
+            <a:ext cx="1610924" cy="855053"/>
+          </a:xfrm>
+          <a:prstGeom prst="trapezoid">
+            <a:avLst/>
+          </a:prstGeom>
+          <a:solidFill>
+            <a:srgbClr val="B4D8FF"/>
+          </a:solidFill>
+          <a:ln>
+            <a:noFill/>
+          </a:ln>
+        </p:spPr>
+        <p:style>
+          <a:lnRef idx="2">
+            <a:schemeClr val="accent1">
+              <a:shade val="15000"/>
+            </a:schemeClr>
+          </a:lnRef>
+          <a:fillRef idx="1">
+            <a:schemeClr val="accent1"/>
+          </a:fillRef>
+          <a:effectRef idx="0">
+            <a:schemeClr val="accent1"/>
+          </a:effectRef>
+          <a:fontRef idx="minor">
+            <a:schemeClr val="lt1"/>
+          </a:fontRef>
+        </p:style>
+        <p:txBody>
+          <a:bodyPr rtlCol="0" anchor="ctr"/>
+          <a:lstStyle/>
+          <a:p>
+            <a:pPr algn="ctr"/>
+            <a:endParaRPr lang="hu-HU"/>
+          </a:p>
+        </p:txBody>
+      </p:sp>
     </p:spTree>
   </p:cSld>
   <p:clrMapOvr>
     <a:masterClrMapping/>
   </p:clrMapOvr>
-  <mc:AlternateContent xmlns:mc="http://schemas.openxmlformats.org/markup-compatibility/2006" xmlns:p159="http://schemas.microsoft.com/office/powerpoint/2015/09/main">
-    <mc:Choice Requires="p159">
+  <mc:AlternateContent xmlns:mc="http://schemas.openxmlformats.org/markup-compatibility/2006">
+    <mc:Choice xmlns:p159="http://schemas.microsoft.com/office/powerpoint/2015/09/main" Requires="p159">
       <p:transition xmlns:p14="http://schemas.microsoft.com/office/powerpoint/2010/main" spd="slow" p14:dur="2000">
         <p159:morph option="byObject"/>
       </p:transition>
     </mc:Choice>
-    <mc:Fallback xmlns="">
+    <mc:Fallback>
       <p:transition spd="slow">
         <p:fade/>
       </p:transition>
@@ -7432,6 +7956,101 @@
       </p:grpSpPr>
       <p:sp>
         <p:nvSpPr>
+          <p:cNvPr id="12" name="Téglalap 11">
+            <a:extLst>
+              <a:ext uri="{FF2B5EF4-FFF2-40B4-BE49-F238E27FC236}">
+                <a16:creationId xmlns:a16="http://schemas.microsoft.com/office/drawing/2014/main" id="{2EE19E98-3725-40D6-A9D1-7F42CF17BFF2}"/>
+              </a:ext>
+            </a:extLst>
+          </p:cNvPr>
+          <p:cNvSpPr/>
+          <p:nvPr/>
+        </p:nvSpPr>
+        <p:spPr>
+          <a:xfrm>
+            <a:off x="6794500" y="3093272"/>
+            <a:ext cx="3960456" cy="2707640"/>
+          </a:xfrm>
+          <a:prstGeom prst="rect">
+            <a:avLst/>
+          </a:prstGeom>
+          <a:solidFill>
+            <a:srgbClr val="93C6FF"/>
+          </a:solidFill>
+          <a:ln>
+            <a:noFill/>
+          </a:ln>
+        </p:spPr>
+        <p:style>
+          <a:lnRef idx="2">
+            <a:schemeClr val="accent1">
+              <a:shade val="50000"/>
+            </a:schemeClr>
+          </a:lnRef>
+          <a:fillRef idx="1">
+            <a:schemeClr val="accent1"/>
+          </a:fillRef>
+          <a:effectRef idx="0">
+            <a:schemeClr val="accent1"/>
+          </a:effectRef>
+          <a:fontRef idx="minor">
+            <a:schemeClr val="lt1"/>
+          </a:fontRef>
+        </p:style>
+        <p:txBody>
+          <a:bodyPr rtlCol="0" anchor="ctr"/>
+          <a:lstStyle/>
+          <a:p>
+            <a:pPr algn="ctr"/>
+            <a:endParaRPr lang="hu-HU" dirty="0">
+              <a:solidFill>
+                <a:srgbClr val="FFFFFF"/>
+              </a:solidFill>
+              <a:ea typeface="Calibri"/>
+              <a:cs typeface="Calibri"/>
+            </a:endParaRPr>
+          </a:p>
+        </p:txBody>
+      </p:sp>
+      <p:pic>
+        <p:nvPicPr>
+          <p:cNvPr id="10" name="Ábra 9">
+            <a:extLst>
+              <a:ext uri="{FF2B5EF4-FFF2-40B4-BE49-F238E27FC236}">
+                <a16:creationId xmlns:a16="http://schemas.microsoft.com/office/drawing/2014/main" id="{FC632D80-E514-4104-A464-76C80BF65446}"/>
+              </a:ext>
+            </a:extLst>
+          </p:cNvPr>
+          <p:cNvPicPr>
+            <a:picLocks noChangeAspect="1"/>
+          </p:cNvPicPr>
+          <p:nvPr/>
+        </p:nvPicPr>
+        <p:blipFill>
+          <a:blip r:embed="rId3">
+            <a:alphaModFix/>
+            <a:extLst>
+              <a:ext uri="{96DAC541-7B7A-43D3-8B79-37D633B846F1}">
+                <asvg:svgBlip xmlns:asvg="http://schemas.microsoft.com/office/drawing/2016/SVG/main" r:embed="rId4"/>
+              </a:ext>
+            </a:extLst>
+          </a:blip>
+          <a:stretch>
+            <a:fillRect/>
+          </a:stretch>
+        </p:blipFill>
+        <p:spPr>
+          <a:xfrm>
+            <a:off x="612282" y="3734601"/>
+            <a:ext cx="3580045" cy="3691289"/>
+          </a:xfrm>
+          <a:prstGeom prst="rect">
+            <a:avLst/>
+          </a:prstGeom>
+        </p:spPr>
+      </p:pic>
+      <p:sp>
+        <p:nvSpPr>
           <p:cNvPr id="111" name="Google Shape;111;p3"/>
           <p:cNvSpPr txBox="1">
             <a:spLocks noGrp="1"/>
@@ -7505,15 +8124,10 @@
             <a:avLst/>
           </a:prstGeom>
           <a:solidFill>
-            <a:schemeClr val="accent5">
-              <a:lumMod val="40000"/>
-              <a:lumOff val="60000"/>
-            </a:schemeClr>
+            <a:srgbClr val="479FFF"/>
           </a:solidFill>
           <a:ln>
-            <a:solidFill>
-              <a:srgbClr val="0070C0"/>
-            </a:solidFill>
+            <a:noFill/>
           </a:ln>
         </p:spPr>
         <p:style>
@@ -7543,10 +8157,268 @@
       </p:sp>
       <p:sp>
         <p:nvSpPr>
-          <p:cNvPr id="7" name="Trapezoid 6">
-            <a:extLst>
-              <a:ext uri="{FF2B5EF4-FFF2-40B4-BE49-F238E27FC236}">
-                <a16:creationId xmlns:a16="http://schemas.microsoft.com/office/drawing/2014/main" id="{84B0B8A9-3258-F2DA-32CD-FBB902FB4E8D}"/>
+          <p:cNvPr id="11" name="Téglalap 10">
+            <a:extLst>
+              <a:ext uri="{FF2B5EF4-FFF2-40B4-BE49-F238E27FC236}">
+                <a16:creationId xmlns:a16="http://schemas.microsoft.com/office/drawing/2014/main" id="{26CC7ABE-66C9-494A-ADA5-AFA6C6FEAA1C}"/>
+              </a:ext>
+            </a:extLst>
+          </p:cNvPr>
+          <p:cNvSpPr/>
+          <p:nvPr/>
+        </p:nvSpPr>
+        <p:spPr>
+          <a:xfrm>
+            <a:off x="1315265" y="3093271"/>
+            <a:ext cx="4082236" cy="2707641"/>
+          </a:xfrm>
+          <a:prstGeom prst="rect">
+            <a:avLst/>
+          </a:prstGeom>
+          <a:solidFill>
+            <a:srgbClr val="3796FF"/>
+          </a:solidFill>
+          <a:ln>
+            <a:noFill/>
+          </a:ln>
+        </p:spPr>
+        <p:style>
+          <a:lnRef idx="2">
+            <a:schemeClr val="accent1">
+              <a:shade val="50000"/>
+            </a:schemeClr>
+          </a:lnRef>
+          <a:fillRef idx="1">
+            <a:schemeClr val="accent1"/>
+          </a:fillRef>
+          <a:effectRef idx="0">
+            <a:schemeClr val="accent1"/>
+          </a:effectRef>
+          <a:fontRef idx="minor">
+            <a:schemeClr val="lt1"/>
+          </a:fontRef>
+        </p:style>
+        <p:txBody>
+          <a:bodyPr rtlCol="0" anchor="ctr"/>
+          <a:lstStyle/>
+          <a:p>
+            <a:pPr algn="ctr"/>
+            <a:endParaRPr lang="hu-HU" dirty="0">
+              <a:solidFill>
+                <a:srgbClr val="000000"/>
+              </a:solidFill>
+              <a:ea typeface="Calibri"/>
+              <a:cs typeface="Calibri"/>
+            </a:endParaRPr>
+          </a:p>
+        </p:txBody>
+      </p:sp>
+      <p:sp>
+        <p:nvSpPr>
+          <p:cNvPr id="2" name="Szövegdoboz 1">
+            <a:extLst>
+              <a:ext uri="{FF2B5EF4-FFF2-40B4-BE49-F238E27FC236}">
+                <a16:creationId xmlns:a16="http://schemas.microsoft.com/office/drawing/2014/main" id="{63260308-945B-4FF1-BBB7-B9157A2CBB32}"/>
+              </a:ext>
+            </a:extLst>
+          </p:cNvPr>
+          <p:cNvSpPr txBox="1"/>
+          <p:nvPr/>
+        </p:nvSpPr>
+        <p:spPr>
+          <a:xfrm>
+            <a:off x="2569661" y="3868361"/>
+            <a:ext cx="1573444" cy="1477328"/>
+          </a:xfrm>
+          <a:prstGeom prst="rect">
+            <a:avLst/>
+          </a:prstGeom>
+          <a:noFill/>
+        </p:spPr>
+        <p:txBody>
+          <a:bodyPr wrap="none" rtlCol="0">
+            <a:spAutoFit/>
+          </a:bodyPr>
+          <a:lstStyle/>
+          <a:p>
+            <a:pPr algn="ctr"/>
+            <a:r>
+              <a:rPr lang="hu-HU" dirty="0">
+                <a:solidFill>
+                  <a:schemeClr val="bg1"/>
+                </a:solidFill>
+                <a:ea typeface="Calibri"/>
+                <a:cs typeface="Calibri"/>
+              </a:rPr>
+              <a:t>Regisztráció</a:t>
+            </a:r>
+          </a:p>
+          <a:p>
+            <a:pPr algn="ctr"/>
+            <a:r>
+              <a:rPr lang="hu-HU" dirty="0">
+                <a:solidFill>
+                  <a:schemeClr val="bg1"/>
+                </a:solidFill>
+                <a:ea typeface="Calibri"/>
+                <a:cs typeface="Calibri"/>
+              </a:rPr>
+              <a:t>Bejelentkezés</a:t>
+            </a:r>
+          </a:p>
+          <a:p>
+            <a:pPr algn="ctr"/>
+            <a:r>
+              <a:rPr lang="hu-HU" dirty="0">
+                <a:solidFill>
+                  <a:schemeClr val="bg1"/>
+                </a:solidFill>
+                <a:ea typeface="Calibri"/>
+                <a:cs typeface="Calibri"/>
+              </a:rPr>
+              <a:t>Étel naplózás</a:t>
+            </a:r>
+          </a:p>
+          <a:p>
+            <a:pPr algn="ctr"/>
+            <a:r>
+              <a:rPr lang="hu-HU" dirty="0">
+                <a:solidFill>
+                  <a:schemeClr val="bg1"/>
+                </a:solidFill>
+                <a:ea typeface="Calibri"/>
+                <a:cs typeface="Calibri"/>
+              </a:rPr>
+              <a:t>Edzés naplózás</a:t>
+            </a:r>
+          </a:p>
+          <a:p>
+            <a:endParaRPr lang="hu-HU" dirty="0">
+              <a:solidFill>
+                <a:schemeClr val="bg1"/>
+              </a:solidFill>
+            </a:endParaRPr>
+          </a:p>
+        </p:txBody>
+      </p:sp>
+      <p:sp>
+        <p:nvSpPr>
+          <p:cNvPr id="3" name="Szövegdoboz 2">
+            <a:extLst>
+              <a:ext uri="{FF2B5EF4-FFF2-40B4-BE49-F238E27FC236}">
+                <a16:creationId xmlns:a16="http://schemas.microsoft.com/office/drawing/2014/main" id="{18EDEF80-B52F-4214-A044-5CC3C9FA4F9F}"/>
+              </a:ext>
+            </a:extLst>
+          </p:cNvPr>
+          <p:cNvSpPr txBox="1"/>
+          <p:nvPr/>
+        </p:nvSpPr>
+        <p:spPr>
+          <a:xfrm>
+            <a:off x="6859716" y="3868361"/>
+            <a:ext cx="3830024" cy="1754326"/>
+          </a:xfrm>
+          <a:prstGeom prst="rect">
+            <a:avLst/>
+          </a:prstGeom>
+          <a:noFill/>
+        </p:spPr>
+        <p:txBody>
+          <a:bodyPr wrap="none" rtlCol="0">
+            <a:spAutoFit/>
+          </a:bodyPr>
+          <a:lstStyle/>
+          <a:p>
+            <a:pPr algn="ctr"/>
+            <a:r>
+              <a:rPr lang="hu-HU" dirty="0">
+                <a:solidFill>
+                  <a:srgbClr val="FFFFFF"/>
+                </a:solidFill>
+                <a:ea typeface="Calibri"/>
+                <a:cs typeface="Calibri"/>
+              </a:rPr>
+              <a:t>"CRUD" adattárolás</a:t>
+            </a:r>
+          </a:p>
+          <a:p>
+            <a:pPr algn="ctr"/>
+            <a:r>
+              <a:rPr lang="hu-HU" dirty="0">
+                <a:solidFill>
+                  <a:srgbClr val="FFFFFF"/>
+                </a:solidFill>
+                <a:ea typeface="Calibri"/>
+                <a:cs typeface="Calibri"/>
+              </a:rPr>
+              <a:t>Moderátori felület</a:t>
+            </a:r>
+          </a:p>
+          <a:p>
+            <a:pPr algn="ctr"/>
+            <a:r>
+              <a:rPr lang="hu-HU" dirty="0">
+                <a:solidFill>
+                  <a:srgbClr val="FFFFFF"/>
+                </a:solidFill>
+                <a:ea typeface="Calibri"/>
+                <a:cs typeface="Calibri"/>
+              </a:rPr>
+              <a:t>Naplózás, szerkesztés</a:t>
+            </a:r>
+            <a:endParaRPr lang="hu-HU" dirty="0">
+              <a:solidFill>
+                <a:srgbClr val="000000"/>
+              </a:solidFill>
+              <a:ea typeface="Calibri"/>
+              <a:cs typeface="Calibri"/>
+            </a:endParaRPr>
+          </a:p>
+          <a:p>
+            <a:pPr algn="ctr"/>
+            <a:r>
+              <a:rPr lang="hu-HU" dirty="0" err="1">
+                <a:solidFill>
+                  <a:srgbClr val="FFFFFF"/>
+                </a:solidFill>
+                <a:ea typeface="Calibri"/>
+                <a:cs typeface="Calibri"/>
+              </a:rPr>
+              <a:t>Barcode</a:t>
+            </a:r>
+            <a:r>
+              <a:rPr lang="hu-HU" dirty="0">
+                <a:solidFill>
+                  <a:srgbClr val="FFFFFF"/>
+                </a:solidFill>
+                <a:ea typeface="Calibri"/>
+                <a:cs typeface="Calibri"/>
+              </a:rPr>
+              <a:t> olvasás mobilos applikációban</a:t>
+            </a:r>
+            <a:endParaRPr lang="hu-HU" dirty="0"/>
+          </a:p>
+          <a:p>
+            <a:pPr algn="ctr"/>
+            <a:endParaRPr lang="hu-HU" dirty="0">
+              <a:solidFill>
+                <a:srgbClr val="FFFFFF"/>
+              </a:solidFill>
+              <a:ea typeface="Calibri"/>
+              <a:cs typeface="Calibri"/>
+            </a:endParaRPr>
+          </a:p>
+          <a:p>
+            <a:endParaRPr lang="hu-HU" dirty="0"/>
+          </a:p>
+        </p:txBody>
+      </p:sp>
+      <p:sp>
+        <p:nvSpPr>
+          <p:cNvPr id="14" name="Trapezoid 13">
+            <a:extLst>
+              <a:ext uri="{FF2B5EF4-FFF2-40B4-BE49-F238E27FC236}">
+                <a16:creationId xmlns:a16="http://schemas.microsoft.com/office/drawing/2014/main" id="{5CAA102E-E621-41A5-9808-FF3B0788152E}"/>
               </a:ext>
             </a:extLst>
           </p:cNvPr>
@@ -7562,15 +8434,10 @@
             <a:avLst/>
           </a:prstGeom>
           <a:solidFill>
-            <a:schemeClr val="accent5">
-              <a:lumMod val="40000"/>
-              <a:lumOff val="60000"/>
-            </a:schemeClr>
+            <a:srgbClr val="B4D8FF"/>
           </a:solidFill>
           <a:ln>
-            <a:solidFill>
-              <a:srgbClr val="0070C0"/>
-            </a:solidFill>
+            <a:noFill/>
           </a:ln>
         </p:spPr>
         <p:style>
@@ -7598,272 +8465,18 @@
           </a:p>
         </p:txBody>
       </p:sp>
-      <p:sp>
-        <p:nvSpPr>
-          <p:cNvPr id="8" name="Téglalap 7">
-            <a:extLst>
-              <a:ext uri="{FF2B5EF4-FFF2-40B4-BE49-F238E27FC236}">
-                <a16:creationId xmlns:a16="http://schemas.microsoft.com/office/drawing/2014/main" id="{F5BC83E1-1A69-7E1F-22E8-0003D25FEED5}"/>
-              </a:ext>
-            </a:extLst>
-          </p:cNvPr>
-          <p:cNvSpPr/>
-          <p:nvPr/>
-        </p:nvSpPr>
-        <p:spPr>
-          <a:xfrm>
-            <a:off x="7290913" y="3094202"/>
-            <a:ext cx="3461789" cy="2499038"/>
-          </a:xfrm>
-          <a:prstGeom prst="rect">
-            <a:avLst/>
-          </a:prstGeom>
-          <a:solidFill>
-            <a:schemeClr val="accent5">
-              <a:lumMod val="40000"/>
-              <a:lumOff val="60000"/>
-            </a:schemeClr>
-          </a:solidFill>
-          <a:ln>
-            <a:solidFill>
-              <a:srgbClr val="0070C0"/>
-            </a:solidFill>
-          </a:ln>
-        </p:spPr>
-        <p:style>
-          <a:lnRef idx="2">
-            <a:schemeClr val="accent1">
-              <a:shade val="15000"/>
-            </a:schemeClr>
-          </a:lnRef>
-          <a:fillRef idx="1">
-            <a:schemeClr val="accent1"/>
-          </a:fillRef>
-          <a:effectRef idx="0">
-            <a:schemeClr val="accent1"/>
-          </a:effectRef>
-          <a:fontRef idx="minor">
-            <a:schemeClr val="lt1"/>
-          </a:fontRef>
-        </p:style>
-        <p:txBody>
-          <a:bodyPr rtlCol="0" anchor="ctr"/>
-          <a:lstStyle/>
-          <a:p>
-            <a:pPr algn="ctr"/>
-            <a:r>
-              <a:rPr lang="hu-HU" dirty="0">
-                <a:solidFill>
-                  <a:srgbClr val="FFFFFF"/>
-                </a:solidFill>
-                <a:ea typeface="Calibri"/>
-                <a:cs typeface="Calibri"/>
-              </a:rPr>
-              <a:t>"CRUD" adattárolás</a:t>
-            </a:r>
-          </a:p>
-          <a:p>
-            <a:pPr algn="ctr"/>
-            <a:r>
-              <a:rPr lang="hu-HU" dirty="0">
-                <a:solidFill>
-                  <a:srgbClr val="FFFFFF"/>
-                </a:solidFill>
-                <a:ea typeface="Calibri"/>
-                <a:cs typeface="Calibri"/>
-              </a:rPr>
-              <a:t>Moderátori felület</a:t>
-            </a:r>
-          </a:p>
-          <a:p>
-            <a:pPr algn="ctr"/>
-            <a:r>
-              <a:rPr lang="hu-HU" dirty="0">
-                <a:solidFill>
-                  <a:srgbClr val="FFFFFF"/>
-                </a:solidFill>
-                <a:ea typeface="Calibri"/>
-                <a:cs typeface="Calibri"/>
-              </a:rPr>
-              <a:t>Naplózás, szerkesztés</a:t>
-            </a:r>
-            <a:endParaRPr lang="hu-HU" dirty="0">
-              <a:solidFill>
-                <a:srgbClr val="000000"/>
-              </a:solidFill>
-              <a:ea typeface="Calibri"/>
-              <a:cs typeface="Calibri"/>
-            </a:endParaRPr>
-          </a:p>
-          <a:p>
-            <a:pPr algn="ctr"/>
-            <a:r>
-              <a:rPr lang="hu-HU" dirty="0" err="1">
-                <a:solidFill>
-                  <a:srgbClr val="FFFFFF"/>
-                </a:solidFill>
-                <a:ea typeface="Calibri"/>
-                <a:cs typeface="Calibri"/>
-              </a:rPr>
-              <a:t>Barcode</a:t>
-            </a:r>
-            <a:r>
-              <a:rPr lang="hu-HU" dirty="0">
-                <a:solidFill>
-                  <a:srgbClr val="FFFFFF"/>
-                </a:solidFill>
-                <a:ea typeface="Calibri"/>
-                <a:cs typeface="Calibri"/>
-              </a:rPr>
-              <a:t> olvasás mobilos applikációban</a:t>
-            </a:r>
-            <a:endParaRPr lang="hu-HU" dirty="0"/>
-          </a:p>
-          <a:p>
-            <a:pPr algn="ctr"/>
-            <a:endParaRPr lang="hu-HU" dirty="0">
-              <a:solidFill>
-                <a:srgbClr val="FFFFFF"/>
-              </a:solidFill>
-              <a:ea typeface="Calibri"/>
-              <a:cs typeface="Calibri"/>
-            </a:endParaRPr>
-          </a:p>
-        </p:txBody>
-      </p:sp>
-      <p:sp>
-        <p:nvSpPr>
-          <p:cNvPr id="9" name="Téglalap 8">
-            <a:extLst>
-              <a:ext uri="{FF2B5EF4-FFF2-40B4-BE49-F238E27FC236}">
-                <a16:creationId xmlns:a16="http://schemas.microsoft.com/office/drawing/2014/main" id="{2184FC2F-4EEC-ACFC-1A3C-7AF5180F7340}"/>
-              </a:ext>
-            </a:extLst>
-          </p:cNvPr>
-          <p:cNvSpPr/>
-          <p:nvPr/>
-        </p:nvSpPr>
-        <p:spPr>
-          <a:xfrm>
-            <a:off x="1320172" y="3083764"/>
-            <a:ext cx="3461789" cy="2499038"/>
-          </a:xfrm>
-          <a:prstGeom prst="rect">
-            <a:avLst/>
-          </a:prstGeom>
-          <a:solidFill>
-            <a:schemeClr val="accent5">
-              <a:lumMod val="40000"/>
-              <a:lumOff val="60000"/>
-            </a:schemeClr>
-          </a:solidFill>
-          <a:ln>
-            <a:solidFill>
-              <a:srgbClr val="0070C0"/>
-            </a:solidFill>
-          </a:ln>
-        </p:spPr>
-        <p:style>
-          <a:lnRef idx="2">
-            <a:schemeClr val="accent1">
-              <a:shade val="15000"/>
-            </a:schemeClr>
-          </a:lnRef>
-          <a:fillRef idx="1">
-            <a:schemeClr val="accent1"/>
-          </a:fillRef>
-          <a:effectRef idx="0">
-            <a:schemeClr val="accent1"/>
-          </a:effectRef>
-          <a:fontRef idx="minor">
-            <a:schemeClr val="lt1"/>
-          </a:fontRef>
-        </p:style>
-        <p:txBody>
-          <a:bodyPr lIns="91440" tIns="45720" rIns="91440" bIns="45720" rtlCol="0" anchor="ctr"/>
-          <a:lstStyle/>
-          <a:p>
-            <a:pPr algn="ctr"/>
-            <a:r>
-              <a:rPr lang="hu-HU" dirty="0">
-                <a:ea typeface="Calibri"/>
-                <a:cs typeface="Calibri"/>
-              </a:rPr>
-              <a:t>Regisztráció</a:t>
-            </a:r>
-            <a:endParaRPr lang="hu-HU">
-              <a:solidFill>
-                <a:srgbClr val="000000"/>
-              </a:solidFill>
-              <a:ea typeface="Calibri"/>
-              <a:cs typeface="Calibri"/>
-            </a:endParaRPr>
-          </a:p>
-          <a:p>
-            <a:pPr algn="ctr"/>
-            <a:r>
-              <a:rPr lang="hu-HU" dirty="0">
-                <a:ea typeface="Calibri"/>
-                <a:cs typeface="Calibri"/>
-              </a:rPr>
-              <a:t>Bejelentkezés</a:t>
-            </a:r>
-            <a:endParaRPr lang="hu-HU" dirty="0">
-              <a:solidFill>
-                <a:srgbClr val="000000"/>
-              </a:solidFill>
-              <a:ea typeface="Calibri"/>
-              <a:cs typeface="Calibri"/>
-            </a:endParaRPr>
-          </a:p>
-          <a:p>
-            <a:pPr algn="ctr"/>
-            <a:r>
-              <a:rPr lang="hu-HU" dirty="0">
-                <a:ea typeface="Calibri"/>
-                <a:cs typeface="Calibri"/>
-              </a:rPr>
-              <a:t>Étel naplózás</a:t>
-            </a:r>
-            <a:endParaRPr lang="hu-HU">
-              <a:solidFill>
-                <a:srgbClr val="000000"/>
-              </a:solidFill>
-              <a:ea typeface="Calibri"/>
-              <a:cs typeface="Calibri"/>
-            </a:endParaRPr>
-          </a:p>
-          <a:p>
-            <a:pPr algn="ctr"/>
-            <a:r>
-              <a:rPr lang="hu-HU" dirty="0">
-                <a:ea typeface="Calibri"/>
-                <a:cs typeface="Calibri"/>
-              </a:rPr>
-              <a:t>Edzés naplózás</a:t>
-            </a:r>
-            <a:endParaRPr lang="hu-HU" dirty="0">
-              <a:solidFill>
-                <a:srgbClr val="000000"/>
-              </a:solidFill>
-              <a:ea typeface="Calibri"/>
-              <a:cs typeface="Calibri"/>
-            </a:endParaRPr>
-          </a:p>
-        </p:txBody>
-      </p:sp>
     </p:spTree>
   </p:cSld>
   <p:clrMapOvr>
     <a:masterClrMapping/>
   </p:clrMapOvr>
-  <mc:AlternateContent xmlns:mc="http://schemas.openxmlformats.org/markup-compatibility/2006" xmlns:p159="http://schemas.microsoft.com/office/powerpoint/2015/09/main">
-    <mc:Choice Requires="p159">
+  <mc:AlternateContent xmlns:mc="http://schemas.openxmlformats.org/markup-compatibility/2006">
+    <mc:Choice xmlns:p159="http://schemas.microsoft.com/office/powerpoint/2015/09/main" Requires="p159">
       <p:transition xmlns:p14="http://schemas.microsoft.com/office/powerpoint/2010/main" spd="slow" p14:dur="2000">
         <p159:morph option="byObject"/>
       </p:transition>
     </mc:Choice>
-    <mc:Fallback xmlns="">
+    <mc:Fallback>
       <p:transition spd="slow">
         <p:fade/>
       </p:transition>
@@ -7889,6 +8502,73 @@
           <a:chExt cx="0" cy="0"/>
         </a:xfrm>
       </p:grpSpPr>
+      <p:pic>
+        <p:nvPicPr>
+          <p:cNvPr id="20" name="Kép 19" descr="next-auth - npm">
+            <a:extLst>
+              <a:ext uri="{FF2B5EF4-FFF2-40B4-BE49-F238E27FC236}">
+                <a16:creationId xmlns:a16="http://schemas.microsoft.com/office/drawing/2014/main" id="{90821AFE-44E3-4436-A3D9-FA8274633A47}"/>
+              </a:ext>
+            </a:extLst>
+          </p:cNvPr>
+          <p:cNvPicPr>
+            <a:picLocks noChangeAspect="1"/>
+          </p:cNvPicPr>
+          <p:nvPr/>
+        </p:nvPicPr>
+        <p:blipFill>
+          <a:blip r:embed="rId3"/>
+          <a:stretch>
+            <a:fillRect/>
+          </a:stretch>
+        </p:blipFill>
+        <p:spPr>
+          <a:xfrm>
+            <a:off x="926270" y="4316141"/>
+            <a:ext cx="1588994" cy="1762161"/>
+          </a:xfrm>
+          <a:prstGeom prst="rect">
+            <a:avLst/>
+          </a:prstGeom>
+        </p:spPr>
+      </p:pic>
+      <p:pic>
+        <p:nvPicPr>
+          <p:cNvPr id="15" name="Ábra 14">
+            <a:extLst>
+              <a:ext uri="{FF2B5EF4-FFF2-40B4-BE49-F238E27FC236}">
+                <a16:creationId xmlns:a16="http://schemas.microsoft.com/office/drawing/2014/main" id="{B075D840-D03A-4F91-98ED-BD8B43095408}"/>
+              </a:ext>
+            </a:extLst>
+          </p:cNvPr>
+          <p:cNvPicPr>
+            <a:picLocks noChangeAspect="1"/>
+          </p:cNvPicPr>
+          <p:nvPr/>
+        </p:nvPicPr>
+        <p:blipFill>
+          <a:blip r:embed="rId4">
+            <a:alphaModFix/>
+            <a:extLst>
+              <a:ext uri="{96DAC541-7B7A-43D3-8B79-37D633B846F1}">
+                <asvg:svgBlip xmlns:asvg="http://schemas.microsoft.com/office/drawing/2016/SVG/main" r:embed="rId5"/>
+              </a:ext>
+            </a:extLst>
+          </a:blip>
+          <a:stretch>
+            <a:fillRect/>
+          </a:stretch>
+        </p:blipFill>
+        <p:spPr>
+          <a:xfrm>
+            <a:off x="612282" y="3734601"/>
+            <a:ext cx="3580045" cy="3691289"/>
+          </a:xfrm>
+          <a:prstGeom prst="rect">
+            <a:avLst/>
+          </a:prstGeom>
+        </p:spPr>
+      </p:pic>
       <p:sp>
         <p:nvSpPr>
           <p:cNvPr id="132" name="Google Shape;132;p4"/>
@@ -7952,582 +8632,64 @@
           </a:p>
         </p:txBody>
       </p:sp>
-      <p:grpSp>
-        <p:nvGrpSpPr>
-          <p:cNvPr id="4" name="Csoportba foglalás 3">
-            <a:extLst>
-              <a:ext uri="{FF2B5EF4-FFF2-40B4-BE49-F238E27FC236}">
-                <a16:creationId xmlns:a16="http://schemas.microsoft.com/office/drawing/2014/main" id="{278E5AC1-0F99-CC88-768D-854F87AB047F}"/>
-              </a:ext>
-            </a:extLst>
-          </p:cNvPr>
-          <p:cNvGrpSpPr/>
+      <p:sp>
+        <p:nvSpPr>
+          <p:cNvPr id="2" name="Téglalap: lekerekített 1">
+            <a:extLst>
+              <a:ext uri="{FF2B5EF4-FFF2-40B4-BE49-F238E27FC236}">
+                <a16:creationId xmlns:a16="http://schemas.microsoft.com/office/drawing/2014/main" id="{0041D6DE-0362-4246-BAE7-23F0454B8012}"/>
+              </a:ext>
+            </a:extLst>
+          </p:cNvPr>
+          <p:cNvSpPr/>
           <p:nvPr/>
-        </p:nvGrpSpPr>
-        <p:grpSpPr>
+        </p:nvSpPr>
+        <p:spPr>
           <a:xfrm>
-            <a:off x="4685782" y="2610485"/>
-            <a:ext cx="2823601" cy="3072900"/>
-            <a:chOff x="225841" y="1870897"/>
-            <a:chExt cx="2823601" cy="3072900"/>
+            <a:off x="8623534" y="3232347"/>
+            <a:ext cx="2730266" cy="3072900"/>
           </a:xfrm>
-        </p:grpSpPr>
-        <p:sp>
-          <p:nvSpPr>
-            <p:cNvPr id="136" name="Google Shape;136;p4"/>
-            <p:cNvSpPr/>
-            <p:nvPr/>
-          </p:nvSpPr>
-          <p:spPr>
-            <a:xfrm>
-              <a:off x="225841" y="1870897"/>
-              <a:ext cx="2823600" cy="3072900"/>
-            </a:xfrm>
-            <a:prstGeom prst="roundRect">
-              <a:avLst>
-                <a:gd name="adj" fmla="val 16667"/>
-              </a:avLst>
-            </a:prstGeom>
-            <a:solidFill>
-              <a:schemeClr val="dk2"/>
-            </a:solidFill>
-            <a:ln w="9525" cap="flat" cmpd="sng">
-              <a:solidFill>
-                <a:schemeClr val="dk2"/>
-              </a:solidFill>
-              <a:prstDash val="solid"/>
-              <a:round/>
-              <a:headEnd type="none" w="sm" len="sm"/>
-              <a:tailEnd type="none" w="sm" len="sm"/>
-            </a:ln>
-          </p:spPr>
-          <p:txBody>
-            <a:bodyPr spcFirstLastPara="1" wrap="square" lIns="91425" tIns="91425" rIns="91425" bIns="91425" anchor="ctr" anchorCtr="0">
-              <a:noAutofit/>
-            </a:bodyPr>
-            <a:lstStyle/>
-            <a:p>
-              <a:pPr marL="0" lvl="0" indent="0" algn="ctr" rtl="0">
-                <a:spcBef>
-                  <a:spcPts val="0"/>
-                </a:spcBef>
-                <a:spcAft>
-                  <a:spcPts val="0"/>
-                </a:spcAft>
-                <a:buNone/>
-              </a:pPr>
-              <a:endParaRPr>
-                <a:latin typeface="Calibri"/>
-                <a:ea typeface="Calibri"/>
-                <a:cs typeface="Calibri"/>
-                <a:sym typeface="Calibri"/>
-              </a:endParaRPr>
-            </a:p>
-          </p:txBody>
-        </p:sp>
-        <p:sp>
-          <p:nvSpPr>
-            <p:cNvPr id="144" name="Google Shape;144;p4"/>
-            <p:cNvSpPr txBox="1"/>
-            <p:nvPr/>
-          </p:nvSpPr>
-          <p:spPr>
-            <a:xfrm>
-              <a:off x="225842" y="2112994"/>
-              <a:ext cx="2823600" cy="2774700"/>
-            </a:xfrm>
-            <a:prstGeom prst="rect">
-              <a:avLst/>
-            </a:prstGeom>
+          <a:prstGeom prst="roundRect">
+            <a:avLst/>
+          </a:prstGeom>
+          <a:solidFill>
+            <a:srgbClr val="B5D9FF"/>
+          </a:solidFill>
+          <a:ln>
             <a:noFill/>
-            <a:ln>
-              <a:noFill/>
-            </a:ln>
-          </p:spPr>
-          <p:txBody>
-            <a:bodyPr spcFirstLastPara="1" wrap="square" lIns="91425" tIns="91425" rIns="91425" bIns="91425" anchor="t" anchorCtr="0">
-              <a:noAutofit/>
-            </a:bodyPr>
-            <a:lstStyle/>
-            <a:p>
-              <a:pPr marL="0" lvl="0" indent="0" algn="ctr" rtl="0">
-                <a:lnSpc>
-                  <a:spcPct val="90000"/>
-                </a:lnSpc>
-                <a:spcBef>
-                  <a:spcPts val="0"/>
-                </a:spcBef>
-                <a:spcAft>
-                  <a:spcPts val="0"/>
-                </a:spcAft>
-                <a:buNone/>
-              </a:pPr>
-              <a:r>
-                <a:rPr lang="hu-HU" sz="2900" b="1" i="1" dirty="0">
-                  <a:solidFill>
-                    <a:schemeClr val="lt1"/>
-                  </a:solidFill>
-                  <a:latin typeface="Cambria"/>
-                  <a:ea typeface="Cambria"/>
-                  <a:cs typeface="Cambria"/>
-                  <a:sym typeface="Cambria"/>
-                </a:rPr>
-                <a:t>Framework</a:t>
-              </a:r>
-              <a:endParaRPr sz="2900" b="1" i="1" dirty="0">
-                <a:solidFill>
-                  <a:schemeClr val="lt1"/>
-                </a:solidFill>
-                <a:latin typeface="Cambria"/>
-                <a:ea typeface="Cambria"/>
-                <a:cs typeface="Cambria"/>
-                <a:sym typeface="Cambria"/>
-              </a:endParaRPr>
-            </a:p>
-            <a:p>
-              <a:pPr marL="0" lvl="0" indent="0" algn="l" rtl="0">
-                <a:lnSpc>
-                  <a:spcPct val="90000"/>
-                </a:lnSpc>
-                <a:spcBef>
-                  <a:spcPts val="0"/>
-                </a:spcBef>
-                <a:spcAft>
-                  <a:spcPts val="0"/>
-                </a:spcAft>
-                <a:buNone/>
-              </a:pPr>
-              <a:endParaRPr sz="2900" b="1" dirty="0">
-                <a:solidFill>
-                  <a:schemeClr val="dk1"/>
-                </a:solidFill>
-                <a:latin typeface="Cambria"/>
-                <a:ea typeface="Cambria"/>
-                <a:cs typeface="Cambria"/>
-                <a:sym typeface="Cambria"/>
-              </a:endParaRPr>
-            </a:p>
-            <a:p>
-              <a:pPr marL="0" lvl="0" indent="0" algn="ctr" rtl="0">
-                <a:lnSpc>
-                  <a:spcPct val="90000"/>
-                </a:lnSpc>
-                <a:spcBef>
-                  <a:spcPts val="0"/>
-                </a:spcBef>
-                <a:spcAft>
-                  <a:spcPts val="0"/>
-                </a:spcAft>
-                <a:buNone/>
-              </a:pPr>
-              <a:r>
-                <a:rPr lang="hu-HU" sz="1700" b="1" dirty="0" err="1">
-                  <a:solidFill>
-                    <a:schemeClr val="lt1"/>
-                  </a:solidFill>
-                  <a:uFill>
-                    <a:noFill/>
-                  </a:uFill>
-                  <a:latin typeface="Times New Roman"/>
-                  <a:ea typeface="Calibri"/>
-                  <a:cs typeface="Times New Roman"/>
-                </a:rPr>
-                <a:t>Next.Js</a:t>
-              </a:r>
-            </a:p>
-          </p:txBody>
-        </p:sp>
-      </p:grpSp>
-      <p:grpSp>
-        <p:nvGrpSpPr>
-          <p:cNvPr id="3" name="Csoportba foglalás 2">
-            <a:extLst>
-              <a:ext uri="{FF2B5EF4-FFF2-40B4-BE49-F238E27FC236}">
-                <a16:creationId xmlns:a16="http://schemas.microsoft.com/office/drawing/2014/main" id="{14CB39FB-518F-A042-01B1-04C9BD77F21F}"/>
-              </a:ext>
-            </a:extLst>
-          </p:cNvPr>
-          <p:cNvGrpSpPr/>
-          <p:nvPr/>
-        </p:nvGrpSpPr>
-        <p:grpSpPr>
-          <a:xfrm>
-            <a:off x="835797" y="3305251"/>
-            <a:ext cx="2838937" cy="3072900"/>
-            <a:chOff x="5788797" y="3462133"/>
-            <a:chExt cx="2838937" cy="3072900"/>
-          </a:xfrm>
-        </p:grpSpPr>
-        <p:sp>
-          <p:nvSpPr>
-            <p:cNvPr id="137" name="Google Shape;137;p4"/>
-            <p:cNvSpPr/>
-            <p:nvPr/>
-          </p:nvSpPr>
-          <p:spPr>
-            <a:xfrm>
-              <a:off x="5788797" y="3462133"/>
-              <a:ext cx="2823600" cy="3072900"/>
-            </a:xfrm>
-            <a:prstGeom prst="roundRect">
-              <a:avLst>
-                <a:gd name="adj" fmla="val 16667"/>
-              </a:avLst>
-            </a:prstGeom>
-            <a:solidFill>
-              <a:schemeClr val="accent5">
-                <a:lumMod val="40000"/>
-                <a:lumOff val="60000"/>
-              </a:schemeClr>
-            </a:solidFill>
-            <a:ln w="9525" cap="flat" cmpd="sng">
-              <a:solidFill>
-                <a:srgbClr val="0070C0"/>
-              </a:solidFill>
-              <a:prstDash val="solid"/>
-              <a:round/>
-              <a:headEnd type="none" w="sm" len="sm"/>
-              <a:tailEnd type="none" w="sm" len="sm"/>
-            </a:ln>
-          </p:spPr>
-          <p:txBody>
-            <a:bodyPr spcFirstLastPara="1" wrap="square" lIns="91425" tIns="91425" rIns="91425" bIns="91425" anchor="ctr" anchorCtr="0">
-              <a:noAutofit/>
-            </a:bodyPr>
-            <a:lstStyle/>
-            <a:p>
-              <a:pPr marL="0" lvl="0" indent="0" algn="ctr" rtl="0">
-                <a:spcBef>
-                  <a:spcPts val="0"/>
-                </a:spcBef>
-                <a:spcAft>
-                  <a:spcPts val="0"/>
-                </a:spcAft>
-                <a:buNone/>
-              </a:pPr>
-              <a:endParaRPr>
-                <a:latin typeface="Calibri"/>
-                <a:ea typeface="Calibri"/>
-                <a:cs typeface="Calibri"/>
-                <a:sym typeface="Calibri"/>
-              </a:endParaRPr>
-            </a:p>
-          </p:txBody>
-        </p:sp>
-        <p:sp>
-          <p:nvSpPr>
-            <p:cNvPr id="145" name="Google Shape;145;p4"/>
-            <p:cNvSpPr txBox="1"/>
-            <p:nvPr/>
-          </p:nvSpPr>
-          <p:spPr>
-            <a:xfrm>
-              <a:off x="5804134" y="3687429"/>
-              <a:ext cx="2823600" cy="2774700"/>
-            </a:xfrm>
-            <a:prstGeom prst="rect">
-              <a:avLst/>
-            </a:prstGeom>
-            <a:noFill/>
-            <a:ln>
-              <a:noFill/>
-            </a:ln>
-          </p:spPr>
-          <p:txBody>
-            <a:bodyPr spcFirstLastPara="1" wrap="square" lIns="91425" tIns="91425" rIns="91425" bIns="91425" anchor="t" anchorCtr="0">
-              <a:noAutofit/>
-            </a:bodyPr>
-            <a:lstStyle/>
-            <a:p>
-              <a:pPr algn="ctr"/>
-              <a:r>
-                <a:rPr lang="hu-HU" sz="2900" b="1" dirty="0">
-                  <a:latin typeface="Cambria"/>
-                  <a:ea typeface="Cambria"/>
-                </a:rPr>
-                <a:t>Futtatási környezet</a:t>
-              </a:r>
-              <a:endParaRPr lang="hu-HU" sz="2900" b="1" i="1" dirty="0">
-                <a:solidFill>
-                  <a:schemeClr val="dk1"/>
-                </a:solidFill>
-                <a:latin typeface="Cambria"/>
-                <a:ea typeface="Cambria"/>
-                <a:cs typeface="Cambria"/>
-              </a:endParaRPr>
-            </a:p>
-            <a:p>
-              <a:pPr marL="0" lvl="0" indent="0" algn="ctr">
-                <a:spcBef>
-                  <a:spcPts val="0"/>
-                </a:spcBef>
-                <a:spcAft>
-                  <a:spcPts val="0"/>
-                </a:spcAft>
-                <a:buNone/>
-              </a:pPr>
-              <a:endParaRPr lang="hu-HU" sz="2900" b="1" dirty="0">
-                <a:solidFill>
-                  <a:schemeClr val="dk1"/>
-                </a:solidFill>
-                <a:latin typeface="Cambria"/>
-                <a:ea typeface="Cambria"/>
-                <a:cs typeface="Calibri"/>
-              </a:endParaRPr>
-            </a:p>
-            <a:p>
-              <a:pPr algn="ctr"/>
-              <a:r>
-                <a:rPr lang="hu-HU" sz="1700" dirty="0" err="1">
-                  <a:solidFill>
-                    <a:schemeClr val="dk1"/>
-                  </a:solidFill>
-                  <a:latin typeface="Calibri"/>
-                  <a:ea typeface="Calibri"/>
-                  <a:cs typeface="Calibri"/>
-                </a:rPr>
-                <a:t>Hosting</a:t>
-              </a:r>
-              <a:r>
-                <a:rPr lang="hu-HU" sz="1700" dirty="0">
-                  <a:solidFill>
-                    <a:schemeClr val="dk1"/>
-                  </a:solidFill>
-                  <a:latin typeface="Calibri"/>
-                  <a:ea typeface="Calibri"/>
-                  <a:cs typeface="Calibri"/>
-                </a:rPr>
-                <a:t>: </a:t>
-              </a:r>
-              <a:r>
-                <a:rPr lang="hu-HU" sz="1700" dirty="0" err="1">
-                  <a:solidFill>
-                    <a:schemeClr val="dk1"/>
-                  </a:solidFill>
-                  <a:latin typeface="Calibri"/>
-                  <a:ea typeface="Calibri"/>
-                  <a:cs typeface="Calibri"/>
-                </a:rPr>
-                <a:t>Vercel</a:t>
-              </a:r>
-              <a:endParaRPr lang="hu-HU" sz="1700" dirty="0">
-                <a:solidFill>
-                  <a:schemeClr val="dk1"/>
-                </a:solidFill>
-                <a:latin typeface="Calibri"/>
-                <a:ea typeface="Calibri"/>
-                <a:cs typeface="Calibri"/>
-              </a:endParaRPr>
-            </a:p>
-            <a:p>
-              <a:pPr algn="ctr"/>
-              <a:endParaRPr lang="hu-HU" sz="1700" dirty="0">
-                <a:solidFill>
-                  <a:schemeClr val="dk1"/>
-                </a:solidFill>
-                <a:latin typeface="Calibri"/>
-                <a:ea typeface="Calibri"/>
-                <a:cs typeface="Calibri"/>
-              </a:endParaRPr>
-            </a:p>
-            <a:p>
-              <a:pPr algn="ctr"/>
-              <a:r>
-                <a:rPr lang="hu-HU" sz="1700" dirty="0" err="1">
-                  <a:solidFill>
-                    <a:schemeClr val="dk1"/>
-                  </a:solidFill>
-                  <a:latin typeface="Calibri"/>
-                  <a:ea typeface="Calibri"/>
-                  <a:cs typeface="Calibri"/>
-                </a:rPr>
-                <a:t>Node.Js</a:t>
-              </a:r>
-              <a:endParaRPr lang="hu-HU" sz="1700" dirty="0">
-                <a:solidFill>
-                  <a:schemeClr val="dk1"/>
-                </a:solidFill>
-                <a:latin typeface="Calibri"/>
-                <a:ea typeface="Calibri"/>
-                <a:cs typeface="Calibri"/>
-              </a:endParaRPr>
-            </a:p>
-            <a:p>
-              <a:pPr algn="ctr"/>
-              <a:r>
-                <a:rPr lang="hu-HU" sz="1700" dirty="0">
-                  <a:solidFill>
-                    <a:schemeClr val="dk1"/>
-                  </a:solidFill>
-                  <a:latin typeface="Calibri"/>
-                  <a:ea typeface="Calibri"/>
-                  <a:cs typeface="Calibri"/>
-                </a:rPr>
-                <a:t>Böngésző(Chrome, Firefox)</a:t>
-              </a:r>
-            </a:p>
-            <a:p>
-              <a:pPr algn="ctr"/>
-              <a:r>
-                <a:rPr lang="hu-HU" sz="1700" dirty="0">
-                  <a:solidFill>
-                    <a:schemeClr val="dk1"/>
-                  </a:solidFill>
-                  <a:latin typeface="Calibri"/>
-                  <a:ea typeface="Calibri"/>
-                  <a:cs typeface="Calibri"/>
-                </a:rPr>
-                <a:t>Android(</a:t>
-              </a:r>
-              <a:r>
-                <a:rPr lang="hu-HU" sz="1700" dirty="0" err="1">
-                  <a:solidFill>
-                    <a:schemeClr val="dk1"/>
-                  </a:solidFill>
-                  <a:latin typeface="Calibri"/>
-                  <a:ea typeface="Calibri"/>
-                  <a:cs typeface="Calibri"/>
-                </a:rPr>
-                <a:t>Capacitor</a:t>
-              </a:r>
-              <a:r>
-                <a:rPr lang="hu-HU" sz="1700" dirty="0">
-                  <a:solidFill>
-                    <a:schemeClr val="dk1"/>
-                  </a:solidFill>
-                  <a:latin typeface="Calibri"/>
-                  <a:ea typeface="Calibri"/>
-                  <a:cs typeface="Calibri"/>
-                </a:rPr>
-                <a:t>)</a:t>
-              </a:r>
-            </a:p>
-          </p:txBody>
-        </p:sp>
-      </p:grpSp>
-      <p:grpSp>
-        <p:nvGrpSpPr>
-          <p:cNvPr id="5" name="Csoportba foglalás 4">
-            <a:extLst>
-              <a:ext uri="{FF2B5EF4-FFF2-40B4-BE49-F238E27FC236}">
-                <a16:creationId xmlns:a16="http://schemas.microsoft.com/office/drawing/2014/main" id="{D803B43F-89DA-DC43-1212-F86041B749F7}"/>
-              </a:ext>
-            </a:extLst>
-          </p:cNvPr>
-          <p:cNvGrpSpPr/>
-          <p:nvPr/>
-        </p:nvGrpSpPr>
-        <p:grpSpPr>
-          <a:xfrm>
-            <a:off x="8524913" y="3305251"/>
-            <a:ext cx="2823600" cy="3072900"/>
-            <a:chOff x="8849884" y="2453604"/>
-            <a:chExt cx="2823600" cy="3072900"/>
-          </a:xfrm>
-        </p:grpSpPr>
-        <p:sp>
-          <p:nvSpPr>
-            <p:cNvPr id="138" name="Google Shape;138;p4"/>
-            <p:cNvSpPr/>
-            <p:nvPr/>
-          </p:nvSpPr>
-          <p:spPr>
-            <a:xfrm>
-              <a:off x="8849884" y="2453604"/>
-              <a:ext cx="2823600" cy="3072900"/>
-            </a:xfrm>
-            <a:prstGeom prst="roundRect">
-              <a:avLst>
-                <a:gd name="adj" fmla="val 16667"/>
-              </a:avLst>
-            </a:prstGeom>
-            <a:solidFill>
-              <a:schemeClr val="accent5">
-                <a:lumMod val="40000"/>
-                <a:lumOff val="60000"/>
-              </a:schemeClr>
-            </a:solidFill>
-            <a:ln w="9525" cap="flat" cmpd="sng">
-              <a:solidFill>
-                <a:srgbClr val="0070C0"/>
-              </a:solidFill>
-              <a:prstDash val="solid"/>
-              <a:round/>
-              <a:headEnd type="none" w="sm" len="sm"/>
-              <a:tailEnd type="none" w="sm" len="sm"/>
-            </a:ln>
-          </p:spPr>
-          <p:txBody>
-            <a:bodyPr spcFirstLastPara="1" wrap="square" lIns="91425" tIns="91425" rIns="91425" bIns="91425" anchor="ctr" anchorCtr="0">
-              <a:noAutofit/>
-            </a:bodyPr>
-            <a:lstStyle/>
-            <a:p>
-              <a:pPr marL="0" lvl="0" indent="0" algn="ctr" rtl="0">
-                <a:spcBef>
-                  <a:spcPts val="0"/>
-                </a:spcBef>
-                <a:spcAft>
-                  <a:spcPts val="0"/>
-                </a:spcAft>
-                <a:buNone/>
-              </a:pPr>
-              <a:endParaRPr>
-                <a:latin typeface="Calibri"/>
-                <a:ea typeface="Calibri"/>
-                <a:cs typeface="Calibri"/>
-                <a:sym typeface="Calibri"/>
-              </a:endParaRPr>
-            </a:p>
-          </p:txBody>
-        </p:sp>
-        <p:sp>
-          <p:nvSpPr>
-            <p:cNvPr id="146" name="Google Shape;146;p4"/>
-            <p:cNvSpPr txBox="1"/>
-            <p:nvPr/>
-          </p:nvSpPr>
-          <p:spPr>
-            <a:xfrm>
-              <a:off x="8849884" y="2608858"/>
-              <a:ext cx="2823600" cy="2774700"/>
-            </a:xfrm>
-            <a:prstGeom prst="rect">
-              <a:avLst/>
-            </a:prstGeom>
-            <a:noFill/>
-            <a:ln>
-              <a:noFill/>
-            </a:ln>
-          </p:spPr>
-          <p:txBody>
-            <a:bodyPr spcFirstLastPara="1" wrap="square" lIns="91425" tIns="91425" rIns="91425" bIns="91425" anchor="t" anchorCtr="0">
-              <a:noAutofit/>
-            </a:bodyPr>
-            <a:lstStyle/>
-            <a:p>
-              <a:pPr marL="0" lvl="0" indent="0" algn="ctr" rtl="0">
-                <a:spcBef>
-                  <a:spcPts val="0"/>
-                </a:spcBef>
-                <a:spcAft>
-                  <a:spcPts val="0"/>
-                </a:spcAft>
-                <a:buNone/>
-              </a:pPr>
-              <a:r>
-                <a:rPr lang="hu-HU" sz="2900" b="1" i="1" dirty="0">
-                  <a:solidFill>
-                    <a:schemeClr val="dk1"/>
-                  </a:solidFill>
-                  <a:latin typeface="Cambria" panose="02040503050406030204" pitchFamily="18" charset="0"/>
-                  <a:ea typeface="Cambria" panose="02040503050406030204" pitchFamily="18" charset="0"/>
-                  <a:cs typeface="Times New Roman" panose="02020603050405020304" pitchFamily="18" charset="0"/>
-                  <a:sym typeface="Cambria"/>
-                </a:rPr>
-                <a:t>Adatbázis</a:t>
-              </a:r>
-              <a:endParaRPr sz="2900" b="1" i="1" dirty="0">
+          </a:ln>
+        </p:spPr>
+        <p:style>
+          <a:lnRef idx="2">
+            <a:schemeClr val="accent1">
+              <a:shade val="50000"/>
+            </a:schemeClr>
+          </a:lnRef>
+          <a:fillRef idx="1">
+            <a:schemeClr val="accent1"/>
+          </a:fillRef>
+          <a:effectRef idx="0">
+            <a:schemeClr val="accent1"/>
+          </a:effectRef>
+          <a:fontRef idx="minor">
+            <a:schemeClr val="lt1"/>
+          </a:fontRef>
+        </p:style>
+        <p:txBody>
+          <a:bodyPr rtlCol="0" anchor="ctr"/>
+          <a:lstStyle/>
+          <a:p>
+            <a:pPr marL="0" lvl="0" indent="0" algn="ctr" rtl="0">
+              <a:spcBef>
+                <a:spcPts val="0"/>
+              </a:spcBef>
+              <a:spcAft>
+                <a:spcPts val="0"/>
+              </a:spcAft>
+              <a:buNone/>
+            </a:pPr>
+            <a:r>
+              <a:rPr lang="hu-HU" sz="3200" b="1" i="1" dirty="0">
                 <a:solidFill>
                   <a:schemeClr val="dk1"/>
                 </a:solidFill>
@@ -8535,94 +8697,621 @@
                 <a:ea typeface="Cambria" panose="02040503050406030204" pitchFamily="18" charset="0"/>
                 <a:cs typeface="Times New Roman" panose="02020603050405020304" pitchFamily="18" charset="0"/>
                 <a:sym typeface="Cambria"/>
-              </a:endParaRPr>
-            </a:p>
-            <a:p>
-              <a:r>
-                <a:rPr lang="hu-HU" sz="1700" dirty="0">
-                  <a:solidFill>
-                    <a:schemeClr val="dk1"/>
-                  </a:solidFill>
-                  <a:latin typeface="Times New Roman"/>
-                  <a:ea typeface="Times New Roman"/>
-                  <a:cs typeface="Times New Roman"/>
-                </a:rPr>
-                <a:t> </a:t>
-              </a:r>
-            </a:p>
-            <a:p>
-              <a:pPr algn="ctr"/>
-              <a:r>
-                <a:rPr lang="hu-HU" sz="1700" dirty="0" err="1">
-                  <a:solidFill>
-                    <a:schemeClr val="dk1"/>
-                  </a:solidFill>
-                  <a:latin typeface="Times New Roman"/>
-                  <a:ea typeface="Times New Roman"/>
-                  <a:cs typeface="Times New Roman"/>
-                </a:rPr>
-                <a:t>PostrgeSQL</a:t>
-              </a:r>
-              <a:r>
-                <a:rPr lang="hu-HU" sz="1700" dirty="0">
-                  <a:solidFill>
-                    <a:schemeClr val="dk1"/>
-                  </a:solidFill>
-                  <a:latin typeface="Times New Roman"/>
-                  <a:ea typeface="Times New Roman"/>
-                  <a:cs typeface="Times New Roman"/>
-                </a:rPr>
-                <a:t> </a:t>
-              </a:r>
-            </a:p>
-            <a:p>
-              <a:pPr algn="ctr"/>
-              <a:r>
-                <a:rPr lang="hu-HU" sz="1700" dirty="0">
-                  <a:solidFill>
-                    <a:schemeClr val="dk1"/>
-                  </a:solidFill>
-                  <a:latin typeface="Times New Roman"/>
-                  <a:ea typeface="Times New Roman"/>
-                  <a:cs typeface="Times New Roman"/>
-                </a:rPr>
-                <a:t>ORM: </a:t>
-              </a:r>
-              <a:r>
-                <a:rPr lang="hu-HU" sz="1700" dirty="0" err="1">
-                  <a:solidFill>
-                    <a:schemeClr val="dk1"/>
-                  </a:solidFill>
-                  <a:latin typeface="Times New Roman"/>
-                  <a:ea typeface="Times New Roman"/>
-                  <a:cs typeface="Times New Roman"/>
-                </a:rPr>
-                <a:t>Prisma</a:t>
-              </a:r>
-              <a:endParaRPr sz="1700" dirty="0" err="1">
+              </a:rPr>
+              <a:t>Adatbázis</a:t>
+            </a:r>
+          </a:p>
+          <a:p>
+            <a:r>
+              <a:rPr lang="hu-HU" sz="1800" dirty="0">
                 <a:solidFill>
                   <a:schemeClr val="dk1"/>
                 </a:solidFill>
                 <a:latin typeface="Times New Roman"/>
                 <a:ea typeface="Times New Roman"/>
                 <a:cs typeface="Times New Roman"/>
-              </a:endParaRPr>
-            </a:p>
-          </p:txBody>
-        </p:sp>
-      </p:grpSp>
+              </a:rPr>
+              <a:t> </a:t>
+            </a:r>
+          </a:p>
+          <a:p>
+            <a:pPr algn="ctr"/>
+            <a:r>
+              <a:rPr lang="hu-HU" sz="1800" dirty="0" err="1">
+                <a:solidFill>
+                  <a:schemeClr val="dk1"/>
+                </a:solidFill>
+                <a:latin typeface="Times New Roman"/>
+                <a:ea typeface="Times New Roman"/>
+                <a:cs typeface="Times New Roman"/>
+              </a:rPr>
+              <a:t>PostrgeSQL</a:t>
+            </a:r>
+            <a:r>
+              <a:rPr lang="hu-HU" sz="1800" dirty="0">
+                <a:solidFill>
+                  <a:schemeClr val="dk1"/>
+                </a:solidFill>
+                <a:latin typeface="Times New Roman"/>
+                <a:ea typeface="Times New Roman"/>
+                <a:cs typeface="Times New Roman"/>
+              </a:rPr>
+              <a:t> </a:t>
+            </a:r>
+          </a:p>
+          <a:p>
+            <a:pPr algn="ctr"/>
+            <a:r>
+              <a:rPr lang="hu-HU" sz="1800" dirty="0">
+                <a:solidFill>
+                  <a:schemeClr val="dk1"/>
+                </a:solidFill>
+                <a:latin typeface="Times New Roman"/>
+                <a:ea typeface="Times New Roman"/>
+                <a:cs typeface="Times New Roman"/>
+              </a:rPr>
+              <a:t>ORM: </a:t>
+            </a:r>
+            <a:r>
+              <a:rPr lang="hu-HU" sz="1800" dirty="0" err="1">
+                <a:solidFill>
+                  <a:schemeClr val="dk1"/>
+                </a:solidFill>
+                <a:latin typeface="Times New Roman"/>
+                <a:ea typeface="Times New Roman"/>
+                <a:cs typeface="Times New Roman"/>
+              </a:rPr>
+              <a:t>Prisma</a:t>
+            </a:r>
+            <a:endParaRPr lang="hu-HU" sz="1800" dirty="0">
+              <a:solidFill>
+                <a:schemeClr val="dk1"/>
+              </a:solidFill>
+              <a:latin typeface="Times New Roman"/>
+              <a:ea typeface="Times New Roman"/>
+              <a:cs typeface="Times New Roman"/>
+            </a:endParaRPr>
+          </a:p>
+          <a:p>
+            <a:pPr algn="ctr"/>
+            <a:endParaRPr lang="hu-HU" b="1" dirty="0"/>
+          </a:p>
+        </p:txBody>
+      </p:sp>
+      <p:sp>
+        <p:nvSpPr>
+          <p:cNvPr id="13" name="Téglalap: lekerekített 12">
+            <a:extLst>
+              <a:ext uri="{FF2B5EF4-FFF2-40B4-BE49-F238E27FC236}">
+                <a16:creationId xmlns:a16="http://schemas.microsoft.com/office/drawing/2014/main" id="{0938EA1E-6766-4881-9228-753FEEAB009D}"/>
+              </a:ext>
+            </a:extLst>
+          </p:cNvPr>
+          <p:cNvSpPr/>
+          <p:nvPr/>
+        </p:nvSpPr>
+        <p:spPr>
+          <a:xfrm>
+            <a:off x="838200" y="3419975"/>
+            <a:ext cx="2730266" cy="3072900"/>
+          </a:xfrm>
+          <a:prstGeom prst="roundRect">
+            <a:avLst/>
+          </a:prstGeom>
+          <a:solidFill>
+            <a:srgbClr val="B5D9FF"/>
+          </a:solidFill>
+          <a:ln>
+            <a:noFill/>
+          </a:ln>
+        </p:spPr>
+        <p:style>
+          <a:lnRef idx="2">
+            <a:schemeClr val="accent1">
+              <a:shade val="50000"/>
+            </a:schemeClr>
+          </a:lnRef>
+          <a:fillRef idx="1">
+            <a:schemeClr val="accent1"/>
+          </a:fillRef>
+          <a:effectRef idx="0">
+            <a:schemeClr val="accent1"/>
+          </a:effectRef>
+          <a:fontRef idx="minor">
+            <a:schemeClr val="lt1"/>
+          </a:fontRef>
+        </p:style>
+        <p:txBody>
+          <a:bodyPr rtlCol="0" anchor="ctr"/>
+          <a:lstStyle/>
+          <a:p>
+            <a:pPr algn="ctr"/>
+            <a:r>
+              <a:rPr lang="hu-HU" sz="3200" b="1" i="1" dirty="0">
+                <a:solidFill>
+                  <a:schemeClr val="tx1"/>
+                </a:solidFill>
+                <a:latin typeface="Cambria"/>
+                <a:ea typeface="Cambria"/>
+              </a:rPr>
+              <a:t>Futtatási környezet</a:t>
+            </a:r>
+          </a:p>
+          <a:p>
+            <a:pPr algn="ctr"/>
+            <a:endParaRPr lang="hu-HU" sz="1400" b="1" dirty="0">
+              <a:solidFill>
+                <a:schemeClr val="dk1"/>
+              </a:solidFill>
+              <a:latin typeface="Cambria"/>
+              <a:ea typeface="Cambria"/>
+              <a:cs typeface="Calibri"/>
+            </a:endParaRPr>
+          </a:p>
+          <a:p>
+            <a:pPr algn="ctr"/>
+            <a:r>
+              <a:rPr lang="hu-HU" sz="1800" dirty="0" err="1">
+                <a:solidFill>
+                  <a:schemeClr val="dk1"/>
+                </a:solidFill>
+                <a:latin typeface="Times New Roman" panose="02020603050405020304" pitchFamily="18" charset="0"/>
+                <a:ea typeface="Calibri"/>
+                <a:cs typeface="Times New Roman" panose="02020603050405020304" pitchFamily="18" charset="0"/>
+              </a:rPr>
+              <a:t>Hosting</a:t>
+            </a:r>
+            <a:r>
+              <a:rPr lang="hu-HU" sz="1800" dirty="0">
+                <a:solidFill>
+                  <a:schemeClr val="dk1"/>
+                </a:solidFill>
+                <a:latin typeface="Times New Roman" panose="02020603050405020304" pitchFamily="18" charset="0"/>
+                <a:ea typeface="Calibri"/>
+                <a:cs typeface="Times New Roman" panose="02020603050405020304" pitchFamily="18" charset="0"/>
+              </a:rPr>
+              <a:t>: </a:t>
+            </a:r>
+            <a:r>
+              <a:rPr lang="hu-HU" sz="1800" dirty="0" err="1">
+                <a:solidFill>
+                  <a:schemeClr val="dk1"/>
+                </a:solidFill>
+                <a:latin typeface="Times New Roman" panose="02020603050405020304" pitchFamily="18" charset="0"/>
+                <a:ea typeface="Calibri"/>
+                <a:cs typeface="Times New Roman" panose="02020603050405020304" pitchFamily="18" charset="0"/>
+              </a:rPr>
+              <a:t>Vercel</a:t>
+            </a:r>
+            <a:endParaRPr lang="hu-HU" sz="1800" dirty="0">
+              <a:solidFill>
+                <a:schemeClr val="dk1"/>
+              </a:solidFill>
+              <a:latin typeface="Times New Roman" panose="02020603050405020304" pitchFamily="18" charset="0"/>
+              <a:ea typeface="Calibri"/>
+              <a:cs typeface="Times New Roman" panose="02020603050405020304" pitchFamily="18" charset="0"/>
+            </a:endParaRPr>
+          </a:p>
+          <a:p>
+            <a:pPr algn="ctr"/>
+            <a:r>
+              <a:rPr lang="hu-HU" sz="1800" dirty="0" err="1">
+                <a:solidFill>
+                  <a:schemeClr val="dk1"/>
+                </a:solidFill>
+                <a:latin typeface="Times New Roman" panose="02020603050405020304" pitchFamily="18" charset="0"/>
+                <a:ea typeface="Calibri"/>
+                <a:cs typeface="Times New Roman" panose="02020603050405020304" pitchFamily="18" charset="0"/>
+              </a:rPr>
+              <a:t>Node.Js</a:t>
+            </a:r>
+            <a:endParaRPr lang="hu-HU" sz="1800" dirty="0">
+              <a:solidFill>
+                <a:schemeClr val="dk1"/>
+              </a:solidFill>
+              <a:latin typeface="Times New Roman" panose="02020603050405020304" pitchFamily="18" charset="0"/>
+              <a:ea typeface="Calibri"/>
+              <a:cs typeface="Times New Roman" panose="02020603050405020304" pitchFamily="18" charset="0"/>
+            </a:endParaRPr>
+          </a:p>
+          <a:p>
+            <a:pPr algn="ctr"/>
+            <a:r>
+              <a:rPr lang="hu-HU" sz="1800" dirty="0">
+                <a:solidFill>
+                  <a:schemeClr val="dk1"/>
+                </a:solidFill>
+                <a:latin typeface="Times New Roman" panose="02020603050405020304" pitchFamily="18" charset="0"/>
+                <a:ea typeface="Calibri"/>
+                <a:cs typeface="Times New Roman" panose="02020603050405020304" pitchFamily="18" charset="0"/>
+              </a:rPr>
+              <a:t>Böngésző(Chrome, Firefox)</a:t>
+            </a:r>
+          </a:p>
+          <a:p>
+            <a:pPr algn="ctr"/>
+            <a:r>
+              <a:rPr lang="hu-HU" sz="1800" dirty="0">
+                <a:solidFill>
+                  <a:schemeClr val="dk1"/>
+                </a:solidFill>
+                <a:latin typeface="Times New Roman" panose="02020603050405020304" pitchFamily="18" charset="0"/>
+                <a:ea typeface="Calibri"/>
+                <a:cs typeface="Times New Roman" panose="02020603050405020304" pitchFamily="18" charset="0"/>
+              </a:rPr>
+              <a:t>Android(</a:t>
+            </a:r>
+            <a:r>
+              <a:rPr lang="hu-HU" sz="1800" dirty="0" err="1">
+                <a:solidFill>
+                  <a:schemeClr val="dk1"/>
+                </a:solidFill>
+                <a:latin typeface="Times New Roman" panose="02020603050405020304" pitchFamily="18" charset="0"/>
+                <a:ea typeface="Calibri"/>
+                <a:cs typeface="Times New Roman" panose="02020603050405020304" pitchFamily="18" charset="0"/>
+              </a:rPr>
+              <a:t>Capacitor</a:t>
+            </a:r>
+            <a:r>
+              <a:rPr lang="hu-HU" sz="1800" dirty="0">
+                <a:solidFill>
+                  <a:schemeClr val="dk1"/>
+                </a:solidFill>
+                <a:latin typeface="Times New Roman" panose="02020603050405020304" pitchFamily="18" charset="0"/>
+                <a:ea typeface="Calibri"/>
+                <a:cs typeface="Times New Roman" panose="02020603050405020304" pitchFamily="18" charset="0"/>
+              </a:rPr>
+              <a:t>)</a:t>
+            </a:r>
+            <a:endParaRPr lang="hu-HU" b="1" dirty="0">
+              <a:latin typeface="Times New Roman" panose="02020603050405020304" pitchFamily="18" charset="0"/>
+              <a:cs typeface="Times New Roman" panose="02020603050405020304" pitchFamily="18" charset="0"/>
+            </a:endParaRPr>
+          </a:p>
+        </p:txBody>
+      </p:sp>
+      <p:sp>
+        <p:nvSpPr>
+          <p:cNvPr id="14" name="Téglalap: lekerekített 13">
+            <a:extLst>
+              <a:ext uri="{FF2B5EF4-FFF2-40B4-BE49-F238E27FC236}">
+                <a16:creationId xmlns:a16="http://schemas.microsoft.com/office/drawing/2014/main" id="{12988EA7-B0AF-4E33-BFFF-C1AADAAC3589}"/>
+              </a:ext>
+            </a:extLst>
+          </p:cNvPr>
+          <p:cNvSpPr/>
+          <p:nvPr/>
+        </p:nvSpPr>
+        <p:spPr>
+          <a:xfrm>
+            <a:off x="4730867" y="2648147"/>
+            <a:ext cx="2730266" cy="3072900"/>
+          </a:xfrm>
+          <a:prstGeom prst="roundRect">
+            <a:avLst/>
+          </a:prstGeom>
+          <a:solidFill>
+            <a:srgbClr val="479FFF"/>
+          </a:solidFill>
+          <a:ln>
+            <a:noFill/>
+          </a:ln>
+        </p:spPr>
+        <p:style>
+          <a:lnRef idx="2">
+            <a:schemeClr val="accent1">
+              <a:shade val="50000"/>
+            </a:schemeClr>
+          </a:lnRef>
+          <a:fillRef idx="1">
+            <a:schemeClr val="accent1"/>
+          </a:fillRef>
+          <a:effectRef idx="0">
+            <a:schemeClr val="accent1"/>
+          </a:effectRef>
+          <a:fontRef idx="minor">
+            <a:schemeClr val="lt1"/>
+          </a:fontRef>
+        </p:style>
+        <p:txBody>
+          <a:bodyPr rtlCol="0" anchor="ctr"/>
+          <a:lstStyle/>
+          <a:p>
+            <a:pPr marL="0" lvl="0" indent="0" algn="ctr" rtl="0">
+              <a:spcBef>
+                <a:spcPts val="0"/>
+              </a:spcBef>
+              <a:spcAft>
+                <a:spcPts val="0"/>
+              </a:spcAft>
+              <a:buNone/>
+            </a:pPr>
+            <a:r>
+              <a:rPr lang="hu-HU" sz="3200" b="1" i="1" dirty="0">
+                <a:solidFill>
+                  <a:schemeClr val="dk1"/>
+                </a:solidFill>
+                <a:latin typeface="Cambria" panose="02040503050406030204" pitchFamily="18" charset="0"/>
+                <a:ea typeface="Cambria" panose="02040503050406030204" pitchFamily="18" charset="0"/>
+                <a:cs typeface="Times New Roman" panose="02020603050405020304" pitchFamily="18" charset="0"/>
+                <a:sym typeface="Cambria"/>
+              </a:rPr>
+              <a:t>Framework</a:t>
+            </a:r>
+          </a:p>
+          <a:p>
+            <a:r>
+              <a:rPr lang="hu-HU" sz="1800" dirty="0">
+                <a:solidFill>
+                  <a:schemeClr val="dk1"/>
+                </a:solidFill>
+                <a:latin typeface="Times New Roman"/>
+                <a:ea typeface="Times New Roman"/>
+                <a:cs typeface="Times New Roman"/>
+              </a:rPr>
+              <a:t> </a:t>
+            </a:r>
+          </a:p>
+          <a:p>
+            <a:pPr algn="ctr"/>
+            <a:r>
+              <a:rPr lang="hu-HU" sz="1800" dirty="0">
+                <a:solidFill>
+                  <a:schemeClr val="dk1"/>
+                </a:solidFill>
+                <a:latin typeface="Times New Roman"/>
+                <a:ea typeface="Times New Roman"/>
+                <a:cs typeface="Times New Roman"/>
+              </a:rPr>
+              <a:t>Next.js</a:t>
+            </a:r>
+          </a:p>
+          <a:p>
+            <a:pPr algn="ctr"/>
+            <a:endParaRPr lang="hu-HU" b="1" dirty="0"/>
+          </a:p>
+        </p:txBody>
+      </p:sp>
+      <p:sp>
+        <p:nvSpPr>
+          <p:cNvPr id="16" name="Téglalap 15">
+            <a:extLst>
+              <a:ext uri="{FF2B5EF4-FFF2-40B4-BE49-F238E27FC236}">
+                <a16:creationId xmlns:a16="http://schemas.microsoft.com/office/drawing/2014/main" id="{B6E34DEF-7F1F-4510-BDD9-F662D6C5B253}"/>
+              </a:ext>
+            </a:extLst>
+          </p:cNvPr>
+          <p:cNvSpPr/>
+          <p:nvPr/>
+        </p:nvSpPr>
+        <p:spPr>
+          <a:xfrm>
+            <a:off x="1079500" y="3734601"/>
+            <a:ext cx="2285999" cy="2570646"/>
+          </a:xfrm>
+          <a:prstGeom prst="rect">
+            <a:avLst/>
+          </a:prstGeom>
+          <a:solidFill>
+            <a:srgbClr val="3796FF">
+              <a:alpha val="0"/>
+            </a:srgbClr>
+          </a:solidFill>
+          <a:ln>
+            <a:noFill/>
+          </a:ln>
+        </p:spPr>
+        <p:style>
+          <a:lnRef idx="2">
+            <a:schemeClr val="accent1">
+              <a:shade val="50000"/>
+            </a:schemeClr>
+          </a:lnRef>
+          <a:fillRef idx="1">
+            <a:schemeClr val="accent1"/>
+          </a:fillRef>
+          <a:effectRef idx="0">
+            <a:schemeClr val="accent1"/>
+          </a:effectRef>
+          <a:fontRef idx="minor">
+            <a:schemeClr val="lt1"/>
+          </a:fontRef>
+        </p:style>
+        <p:txBody>
+          <a:bodyPr rtlCol="0" anchor="ctr"/>
+          <a:lstStyle/>
+          <a:p>
+            <a:pPr algn="ctr"/>
+            <a:endParaRPr lang="hu-HU" dirty="0">
+              <a:solidFill>
+                <a:srgbClr val="000000"/>
+              </a:solidFill>
+              <a:ea typeface="Calibri"/>
+              <a:cs typeface="Calibri"/>
+            </a:endParaRPr>
+          </a:p>
+        </p:txBody>
+      </p:sp>
+      <p:sp>
+        <p:nvSpPr>
+          <p:cNvPr id="17" name="Téglalap 16">
+            <a:extLst>
+              <a:ext uri="{FF2B5EF4-FFF2-40B4-BE49-F238E27FC236}">
+                <a16:creationId xmlns:a16="http://schemas.microsoft.com/office/drawing/2014/main" id="{D931D518-8A9E-4CBC-8826-1AAEF352B715}"/>
+              </a:ext>
+            </a:extLst>
+          </p:cNvPr>
+          <p:cNvSpPr/>
+          <p:nvPr/>
+        </p:nvSpPr>
+        <p:spPr>
+          <a:xfrm>
+            <a:off x="8902700" y="3445375"/>
+            <a:ext cx="2209800" cy="2707640"/>
+          </a:xfrm>
+          <a:prstGeom prst="rect">
+            <a:avLst/>
+          </a:prstGeom>
+          <a:solidFill>
+            <a:srgbClr val="93C6FF">
+              <a:alpha val="0"/>
+            </a:srgbClr>
+          </a:solidFill>
+          <a:ln>
+            <a:noFill/>
+          </a:ln>
+        </p:spPr>
+        <p:style>
+          <a:lnRef idx="2">
+            <a:schemeClr val="accent1">
+              <a:shade val="50000"/>
+            </a:schemeClr>
+          </a:lnRef>
+          <a:fillRef idx="1">
+            <a:schemeClr val="accent1"/>
+          </a:fillRef>
+          <a:effectRef idx="0">
+            <a:schemeClr val="accent1"/>
+          </a:effectRef>
+          <a:fontRef idx="minor">
+            <a:schemeClr val="lt1"/>
+          </a:fontRef>
+        </p:style>
+        <p:txBody>
+          <a:bodyPr rtlCol="0" anchor="ctr"/>
+          <a:lstStyle/>
+          <a:p>
+            <a:pPr algn="ctr"/>
+            <a:endParaRPr lang="hu-HU" dirty="0">
+              <a:solidFill>
+                <a:srgbClr val="FFFFFF"/>
+              </a:solidFill>
+              <a:ea typeface="Calibri"/>
+              <a:cs typeface="Calibri"/>
+            </a:endParaRPr>
+          </a:p>
+        </p:txBody>
+      </p:sp>
+      <p:sp>
+        <p:nvSpPr>
+          <p:cNvPr id="18" name="Trapezoid 17">
+            <a:extLst>
+              <a:ext uri="{FF2B5EF4-FFF2-40B4-BE49-F238E27FC236}">
+                <a16:creationId xmlns:a16="http://schemas.microsoft.com/office/drawing/2014/main" id="{73F07186-21D8-4253-BCC1-4B42692FA8A8}"/>
+              </a:ext>
+            </a:extLst>
+          </p:cNvPr>
+          <p:cNvSpPr/>
+          <p:nvPr/>
+        </p:nvSpPr>
+        <p:spPr>
+          <a:xfrm rot="10800000">
+            <a:off x="4991100" y="4165600"/>
+            <a:ext cx="2153203" cy="1414645"/>
+          </a:xfrm>
+          <a:prstGeom prst="trapezoid">
+            <a:avLst/>
+          </a:prstGeom>
+          <a:solidFill>
+            <a:srgbClr val="479FFF">
+              <a:alpha val="0"/>
+            </a:srgbClr>
+          </a:solidFill>
+          <a:ln>
+            <a:noFill/>
+          </a:ln>
+        </p:spPr>
+        <p:style>
+          <a:lnRef idx="2">
+            <a:schemeClr val="accent1">
+              <a:shade val="15000"/>
+            </a:schemeClr>
+          </a:lnRef>
+          <a:fillRef idx="1">
+            <a:schemeClr val="accent1"/>
+          </a:fillRef>
+          <a:effectRef idx="0">
+            <a:schemeClr val="accent1"/>
+          </a:effectRef>
+          <a:fontRef idx="minor">
+            <a:schemeClr val="lt1"/>
+          </a:fontRef>
+        </p:style>
+        <p:txBody>
+          <a:bodyPr rtlCol="0" anchor="ctr"/>
+          <a:lstStyle/>
+          <a:p>
+            <a:pPr algn="ctr"/>
+            <a:endParaRPr lang="hu-HU"/>
+          </a:p>
+        </p:txBody>
+      </p:sp>
+      <p:sp>
+        <p:nvSpPr>
+          <p:cNvPr id="19" name="Trapezoid 18">
+            <a:extLst>
+              <a:ext uri="{FF2B5EF4-FFF2-40B4-BE49-F238E27FC236}">
+                <a16:creationId xmlns:a16="http://schemas.microsoft.com/office/drawing/2014/main" id="{1B1810D0-2FEB-41A4-BC21-DBE3A841C576}"/>
+              </a:ext>
+            </a:extLst>
+          </p:cNvPr>
+          <p:cNvSpPr/>
+          <p:nvPr/>
+        </p:nvSpPr>
+        <p:spPr>
+          <a:xfrm>
+            <a:off x="4789554" y="2738052"/>
+            <a:ext cx="2556294" cy="1414646"/>
+          </a:xfrm>
+          <a:prstGeom prst="trapezoid">
+            <a:avLst/>
+          </a:prstGeom>
+          <a:solidFill>
+            <a:srgbClr val="B4D8FF">
+              <a:alpha val="0"/>
+            </a:srgbClr>
+          </a:solidFill>
+          <a:ln>
+            <a:noFill/>
+          </a:ln>
+        </p:spPr>
+        <p:style>
+          <a:lnRef idx="2">
+            <a:schemeClr val="accent1">
+              <a:shade val="15000"/>
+            </a:schemeClr>
+          </a:lnRef>
+          <a:fillRef idx="1">
+            <a:schemeClr val="accent1"/>
+          </a:fillRef>
+          <a:effectRef idx="0">
+            <a:schemeClr val="accent1"/>
+          </a:effectRef>
+          <a:fontRef idx="minor">
+            <a:schemeClr val="lt1"/>
+          </a:fontRef>
+        </p:style>
+        <p:txBody>
+          <a:bodyPr rtlCol="0" anchor="ctr"/>
+          <a:lstStyle/>
+          <a:p>
+            <a:pPr algn="ctr"/>
+            <a:endParaRPr lang="hu-HU"/>
+          </a:p>
+        </p:txBody>
+      </p:sp>
     </p:spTree>
   </p:cSld>
   <p:clrMapOvr>
     <a:masterClrMapping/>
   </p:clrMapOvr>
-  <mc:AlternateContent xmlns:mc="http://schemas.openxmlformats.org/markup-compatibility/2006" xmlns:p159="http://schemas.microsoft.com/office/powerpoint/2015/09/main">
-    <mc:Choice Requires="p159">
+  <mc:AlternateContent xmlns:mc="http://schemas.openxmlformats.org/markup-compatibility/2006">
+    <mc:Choice xmlns:p159="http://schemas.microsoft.com/office/powerpoint/2015/09/main" Requires="p159">
       <p:transition xmlns:p14="http://schemas.microsoft.com/office/powerpoint/2010/main" spd="slow" p14:dur="2000">
         <p159:morph option="byObject"/>
       </p:transition>
     </mc:Choice>
-    <mc:Fallback xmlns="">
+    <mc:Fallback>
       <p:transition spd="slow">
         <p:fade/>
       </p:transition>
@@ -8648,6 +9337,79 @@
           <a:chExt cx="0" cy="0"/>
         </a:xfrm>
       </p:grpSpPr>
+      <p:pic>
+        <p:nvPicPr>
+          <p:cNvPr id="7" name="Ábra 6">
+            <a:extLst>
+              <a:ext uri="{FF2B5EF4-FFF2-40B4-BE49-F238E27FC236}">
+                <a16:creationId xmlns:a16="http://schemas.microsoft.com/office/drawing/2014/main" id="{27ED6BA0-FE9B-40A0-A008-6546034A326F}"/>
+              </a:ext>
+            </a:extLst>
+          </p:cNvPr>
+          <p:cNvPicPr>
+            <a:picLocks noChangeAspect="1"/>
+          </p:cNvPicPr>
+          <p:nvPr/>
+        </p:nvPicPr>
+        <p:blipFill>
+          <a:blip r:embed="rId3">
+            <a:extLst>
+              <a:ext uri="{96DAC541-7B7A-43D3-8B79-37D633B846F1}">
+                <asvg:svgBlip xmlns:asvg="http://schemas.microsoft.com/office/drawing/2016/SVG/main" r:embed="rId4"/>
+              </a:ext>
+            </a:extLst>
+          </a:blip>
+          <a:stretch>
+            <a:fillRect/>
+          </a:stretch>
+        </p:blipFill>
+        <p:spPr>
+          <a:xfrm rot="20340000">
+            <a:off x="7495020" y="2856378"/>
+            <a:ext cx="2085109" cy="2142565"/>
+          </a:xfrm>
+          <a:prstGeom prst="rect">
+            <a:avLst/>
+          </a:prstGeom>
+        </p:spPr>
+      </p:pic>
+      <p:pic>
+        <p:nvPicPr>
+          <p:cNvPr id="6" name="Ábra 5">
+            <a:extLst>
+              <a:ext uri="{FF2B5EF4-FFF2-40B4-BE49-F238E27FC236}">
+                <a16:creationId xmlns:a16="http://schemas.microsoft.com/office/drawing/2014/main" id="{8B94AC43-5D56-46C2-8991-13D9C7688838}"/>
+              </a:ext>
+            </a:extLst>
+          </p:cNvPr>
+          <p:cNvPicPr>
+            <a:picLocks noChangeAspect="1"/>
+          </p:cNvPicPr>
+          <p:nvPr/>
+        </p:nvPicPr>
+        <p:blipFill>
+          <a:blip r:embed="rId5">
+            <a:alphaModFix/>
+            <a:extLst>
+              <a:ext uri="{96DAC541-7B7A-43D3-8B79-37D633B846F1}">
+                <asvg:svgBlip xmlns:asvg="http://schemas.microsoft.com/office/drawing/2016/SVG/main" r:embed="rId6"/>
+              </a:ext>
+            </a:extLst>
+          </a:blip>
+          <a:stretch>
+            <a:fillRect/>
+          </a:stretch>
+        </p:blipFill>
+        <p:spPr>
+          <a:xfrm>
+            <a:off x="612282" y="3734601"/>
+            <a:ext cx="3580045" cy="3691289"/>
+          </a:xfrm>
+          <a:prstGeom prst="rect">
+            <a:avLst/>
+          </a:prstGeom>
+        </p:spPr>
+      </p:pic>
       <p:sp>
         <p:nvSpPr>
           <p:cNvPr id="152" name="Google Shape;152;p5"/>
@@ -8948,7 +9710,7 @@
           <p:nvPr/>
         </p:nvPicPr>
         <p:blipFill>
-          <a:blip r:embed="rId3"/>
+          <a:blip r:embed="rId7"/>
           <a:stretch>
             <a:fillRect/>
           </a:stretch>
@@ -8961,6 +9723,11 @@
           <a:prstGeom prst="rect">
             <a:avLst/>
           </a:prstGeom>
+          <a:ln w="38100">
+            <a:solidFill>
+              <a:srgbClr val="479FFF"/>
+            </a:solidFill>
+          </a:ln>
         </p:spPr>
       </p:pic>
       <p:pic>
@@ -8978,7 +9745,7 @@
           <p:nvPr/>
         </p:nvPicPr>
         <p:blipFill>
-          <a:blip r:embed="rId4"/>
+          <a:blip r:embed="rId8"/>
           <a:stretch>
             <a:fillRect/>
           </a:stretch>
@@ -8998,13 +9765,13 @@
   <p:clrMapOvr>
     <a:masterClrMapping/>
   </p:clrMapOvr>
-  <mc:AlternateContent xmlns:mc="http://schemas.openxmlformats.org/markup-compatibility/2006" xmlns:p159="http://schemas.microsoft.com/office/powerpoint/2015/09/main">
-    <mc:Choice Requires="p159">
+  <mc:AlternateContent xmlns:mc="http://schemas.openxmlformats.org/markup-compatibility/2006">
+    <mc:Choice xmlns:p159="http://schemas.microsoft.com/office/powerpoint/2015/09/main" Requires="p159">
       <p:transition xmlns:p14="http://schemas.microsoft.com/office/powerpoint/2010/main" spd="slow" p14:dur="2000">
         <p159:morph option="byObject"/>
       </p:transition>
     </mc:Choice>
-    <mc:Fallback xmlns="">
+    <mc:Fallback>
       <p:transition spd="slow">
         <p:fade/>
       </p:transition>
@@ -9030,6 +9797,73 @@
           <a:chExt cx="0" cy="0"/>
         </a:xfrm>
       </p:grpSpPr>
+      <p:pic>
+        <p:nvPicPr>
+          <p:cNvPr id="7" name="Kép 6" descr="A képen szöveg, képernyőkép, szoftver, Párhuzamos látható&#10;&#10;Lehet, hogy az AI által létrehozott tartalom helytelen.">
+            <a:extLst>
+              <a:ext uri="{FF2B5EF4-FFF2-40B4-BE49-F238E27FC236}">
+                <a16:creationId xmlns:a16="http://schemas.microsoft.com/office/drawing/2014/main" id="{F45CFF41-FFF7-4D0B-8590-EB1F0C694026}"/>
+              </a:ext>
+            </a:extLst>
+          </p:cNvPr>
+          <p:cNvPicPr>
+            <a:picLocks noChangeAspect="1"/>
+          </p:cNvPicPr>
+          <p:nvPr/>
+        </p:nvPicPr>
+        <p:blipFill>
+          <a:blip r:embed="rId3"/>
+          <a:stretch>
+            <a:fillRect/>
+          </a:stretch>
+        </p:blipFill>
+        <p:spPr>
+          <a:xfrm>
+            <a:off x="7853438" y="3355136"/>
+            <a:ext cx="1505359" cy="1075765"/>
+          </a:xfrm>
+          <a:prstGeom prst="rect">
+            <a:avLst/>
+          </a:prstGeom>
+        </p:spPr>
+      </p:pic>
+      <p:pic>
+        <p:nvPicPr>
+          <p:cNvPr id="6" name="Ábra 5">
+            <a:extLst>
+              <a:ext uri="{FF2B5EF4-FFF2-40B4-BE49-F238E27FC236}">
+                <a16:creationId xmlns:a16="http://schemas.microsoft.com/office/drawing/2014/main" id="{73ECFB91-7812-4A18-90E2-BA536B7B0970}"/>
+              </a:ext>
+            </a:extLst>
+          </p:cNvPr>
+          <p:cNvPicPr>
+            <a:picLocks noChangeAspect="1"/>
+          </p:cNvPicPr>
+          <p:nvPr/>
+        </p:nvPicPr>
+        <p:blipFill>
+          <a:blip r:embed="rId4">
+            <a:alphaModFix/>
+            <a:extLst>
+              <a:ext uri="{96DAC541-7B7A-43D3-8B79-37D633B846F1}">
+                <asvg:svgBlip xmlns:asvg="http://schemas.microsoft.com/office/drawing/2016/SVG/main" r:embed="rId5"/>
+              </a:ext>
+            </a:extLst>
+          </a:blip>
+          <a:stretch>
+            <a:fillRect/>
+          </a:stretch>
+        </p:blipFill>
+        <p:spPr>
+          <a:xfrm>
+            <a:off x="612282" y="3734601"/>
+            <a:ext cx="3580045" cy="3691289"/>
+          </a:xfrm>
+          <a:prstGeom prst="rect">
+            <a:avLst/>
+          </a:prstGeom>
+        </p:spPr>
+      </p:pic>
       <p:sp>
         <p:nvSpPr>
           <p:cNvPr id="158" name="Google Shape;158;p6"/>
@@ -9354,10 +10188,10 @@
           <p:nvPr/>
         </p:nvPicPr>
         <p:blipFill>
-          <a:blip r:embed="rId3">
+          <a:blip r:embed="rId6">
             <a:extLst>
               <a:ext uri="{96DAC541-7B7A-43D3-8B79-37D633B846F1}">
-                <asvg:svgBlip xmlns:asvg="http://schemas.microsoft.com/office/drawing/2016/SVG/main" r:embed="rId4"/>
+                <asvg:svgBlip xmlns:asvg="http://schemas.microsoft.com/office/drawing/2016/SVG/main" r:embed="rId7"/>
               </a:ext>
             </a:extLst>
           </a:blip>
@@ -9390,7 +10224,7 @@
           <p:nvPr/>
         </p:nvPicPr>
         <p:blipFill>
-          <a:blip r:embed="rId5"/>
+          <a:blip r:embed="rId8"/>
           <a:stretch>
             <a:fillRect/>
           </a:stretch>
@@ -9403,6 +10237,12 @@
           <a:prstGeom prst="rect">
             <a:avLst/>
           </a:prstGeom>
+          <a:noFill/>
+          <a:ln w="38100">
+            <a:solidFill>
+              <a:srgbClr val="479FFF"/>
+            </a:solidFill>
+          </a:ln>
         </p:spPr>
       </p:pic>
     </p:spTree>
@@ -9410,13 +10250,13 @@
   <p:clrMapOvr>
     <a:masterClrMapping/>
   </p:clrMapOvr>
-  <mc:AlternateContent xmlns:mc="http://schemas.openxmlformats.org/markup-compatibility/2006" xmlns:p159="http://schemas.microsoft.com/office/powerpoint/2015/09/main">
-    <mc:Choice Requires="p159">
+  <mc:AlternateContent xmlns:mc="http://schemas.openxmlformats.org/markup-compatibility/2006">
+    <mc:Choice xmlns:p159="http://schemas.microsoft.com/office/powerpoint/2015/09/main" Requires="p159">
       <p:transition xmlns:p14="http://schemas.microsoft.com/office/powerpoint/2010/main" spd="slow" p14:dur="2000">
         <p159:morph option="byObject"/>
       </p:transition>
     </mc:Choice>
-    <mc:Fallback xmlns="">
+    <mc:Fallback>
       <p:transition spd="slow">
         <p:fade/>
       </p:transition>
@@ -9442,6 +10282,90 @@
           <a:chExt cx="0" cy="0"/>
         </a:xfrm>
       </p:grpSpPr>
+      <p:pic>
+        <p:nvPicPr>
+          <p:cNvPr id="6" name="Picture 4">
+            <a:extLst>
+              <a:ext uri="{FF2B5EF4-FFF2-40B4-BE49-F238E27FC236}">
+                <a16:creationId xmlns:a16="http://schemas.microsoft.com/office/drawing/2014/main" id="{5281C32E-F83F-42AB-B5E6-2314829D3C55}"/>
+              </a:ext>
+            </a:extLst>
+          </p:cNvPr>
+          <p:cNvPicPr>
+            <a:picLocks noChangeAspect="1" noChangeArrowheads="1"/>
+          </p:cNvPicPr>
+          <p:nvPr/>
+        </p:nvPicPr>
+        <p:blipFill>
+          <a:blip r:embed="rId2">
+            <a:extLst>
+              <a:ext uri="{28A0092B-C50C-407E-A947-70E740481C1C}">
+                <a14:useLocalDpi xmlns:a14="http://schemas.microsoft.com/office/drawing/2010/main" val="0"/>
+              </a:ext>
+            </a:extLst>
+          </a:blip>
+          <a:srcRect/>
+          <a:stretch>
+            <a:fillRect/>
+          </a:stretch>
+        </p:blipFill>
+        <p:spPr bwMode="auto">
+          <a:xfrm>
+            <a:off x="7502504" y="1343947"/>
+            <a:ext cx="1079348" cy="1065020"/>
+          </a:xfrm>
+          <a:prstGeom prst="rect">
+            <a:avLst/>
+          </a:prstGeom>
+          <a:noFill/>
+          <a:extLst>
+            <a:ext uri="{909E8E84-426E-40DD-AFC4-6F175D3DCCD1}">
+              <a14:hiddenFill xmlns:a14="http://schemas.microsoft.com/office/drawing/2010/main">
+                <a:solidFill>
+                  <a:srgbClr val="FFFFFF"/>
+                </a:solidFill>
+              </a14:hiddenFill>
+            </a:ext>
+          </a:extLst>
+        </p:spPr>
+      </p:pic>
+      <p:pic>
+        <p:nvPicPr>
+          <p:cNvPr id="5" name="Ábra 4">
+            <a:extLst>
+              <a:ext uri="{FF2B5EF4-FFF2-40B4-BE49-F238E27FC236}">
+                <a16:creationId xmlns:a16="http://schemas.microsoft.com/office/drawing/2014/main" id="{54C7724D-9E7E-4A1E-A936-B2C747D3217B}"/>
+              </a:ext>
+            </a:extLst>
+          </p:cNvPr>
+          <p:cNvPicPr>
+            <a:picLocks noChangeAspect="1"/>
+          </p:cNvPicPr>
+          <p:nvPr/>
+        </p:nvPicPr>
+        <p:blipFill>
+          <a:blip r:embed="rId3">
+            <a:alphaModFix/>
+            <a:extLst>
+              <a:ext uri="{96DAC541-7B7A-43D3-8B79-37D633B846F1}">
+                <asvg:svgBlip xmlns:asvg="http://schemas.microsoft.com/office/drawing/2016/SVG/main" r:embed="rId4"/>
+              </a:ext>
+            </a:extLst>
+          </a:blip>
+          <a:stretch>
+            <a:fillRect/>
+          </a:stretch>
+        </p:blipFill>
+        <p:spPr>
+          <a:xfrm>
+            <a:off x="612282" y="3734601"/>
+            <a:ext cx="3580045" cy="3691289"/>
+          </a:xfrm>
+          <a:prstGeom prst="rect">
+            <a:avLst/>
+          </a:prstGeom>
+        </p:spPr>
+      </p:pic>
       <p:sp>
         <p:nvSpPr>
           <p:cNvPr id="2" name="Cím 1">
@@ -9619,7 +10543,7 @@
           <p:nvPr/>
         </p:nvPicPr>
         <p:blipFill>
-          <a:blip r:embed="rId2"/>
+          <a:blip r:embed="rId5"/>
           <a:stretch>
             <a:fillRect/>
           </a:stretch>
@@ -9644,13 +10568,13 @@
   <p:clrMapOvr>
     <a:masterClrMapping/>
   </p:clrMapOvr>
-  <mc:AlternateContent xmlns:mc="http://schemas.openxmlformats.org/markup-compatibility/2006" xmlns:p159="http://schemas.microsoft.com/office/powerpoint/2015/09/main">
-    <mc:Choice Requires="p159">
+  <mc:AlternateContent xmlns:mc="http://schemas.openxmlformats.org/markup-compatibility/2006">
+    <mc:Choice xmlns:p159="http://schemas.microsoft.com/office/powerpoint/2015/09/main" Requires="p159">
       <p:transition xmlns:p14="http://schemas.microsoft.com/office/powerpoint/2010/main" spd="slow" p14:dur="2000">
         <p159:morph option="byObject"/>
       </p:transition>
     </mc:Choice>
-    <mc:Fallback xmlns="">
+    <mc:Fallback>
       <p:transition spd="slow">
         <p:fade/>
       </p:transition>
@@ -9676,6 +10600,137 @@
           <a:chExt cx="0" cy="0"/>
         </a:xfrm>
       </p:grpSpPr>
+      <p:pic>
+        <p:nvPicPr>
+          <p:cNvPr id="9" name="Picture 4">
+            <a:extLst>
+              <a:ext uri="{FF2B5EF4-FFF2-40B4-BE49-F238E27FC236}">
+                <a16:creationId xmlns:a16="http://schemas.microsoft.com/office/drawing/2014/main" id="{3C609842-46ED-49ED-9827-3DE21B97029C}"/>
+              </a:ext>
+            </a:extLst>
+          </p:cNvPr>
+          <p:cNvPicPr>
+            <a:picLocks noChangeAspect="1" noChangeArrowheads="1"/>
+          </p:cNvPicPr>
+          <p:nvPr/>
+        </p:nvPicPr>
+        <p:blipFill>
+          <a:blip r:embed="rId3">
+            <a:extLst>
+              <a:ext uri="{28A0092B-C50C-407E-A947-70E740481C1C}">
+                <a14:useLocalDpi xmlns:a14="http://schemas.microsoft.com/office/drawing/2010/main" val="0"/>
+              </a:ext>
+            </a:extLst>
+          </a:blip>
+          <a:srcRect/>
+          <a:stretch>
+            <a:fillRect/>
+          </a:stretch>
+        </p:blipFill>
+        <p:spPr bwMode="auto">
+          <a:xfrm>
+            <a:off x="9498854" y="2691478"/>
+            <a:ext cx="1814793" cy="1814793"/>
+          </a:xfrm>
+          <a:prstGeom prst="rect">
+            <a:avLst/>
+          </a:prstGeom>
+          <a:noFill/>
+          <a:extLst>
+            <a:ext uri="{909E8E84-426E-40DD-AFC4-6F175D3DCCD1}">
+              <a14:hiddenFill xmlns:a14="http://schemas.microsoft.com/office/drawing/2010/main">
+                <a:solidFill>
+                  <a:srgbClr val="FFFFFF"/>
+                </a:solidFill>
+              </a14:hiddenFill>
+            </a:ext>
+          </a:extLst>
+        </p:spPr>
+      </p:pic>
+      <p:pic>
+        <p:nvPicPr>
+          <p:cNvPr id="10" name="Picture 2" descr="Jest Logo PNG Transparent &amp; SVG Vector - Freebie Supply">
+            <a:extLst>
+              <a:ext uri="{FF2B5EF4-FFF2-40B4-BE49-F238E27FC236}">
+                <a16:creationId xmlns:a16="http://schemas.microsoft.com/office/drawing/2014/main" id="{A3339BCB-EC1B-4DE6-ADDE-246F9CCDB6DE}"/>
+              </a:ext>
+            </a:extLst>
+          </p:cNvPr>
+          <p:cNvPicPr>
+            <a:picLocks noChangeAspect="1" noChangeArrowheads="1"/>
+          </p:cNvPicPr>
+          <p:nvPr/>
+        </p:nvPicPr>
+        <p:blipFill>
+          <a:blip r:embed="rId4">
+            <a:extLst>
+              <a:ext uri="{28A0092B-C50C-407E-A947-70E740481C1C}">
+                <a14:useLocalDpi xmlns:a14="http://schemas.microsoft.com/office/drawing/2010/main" val="0"/>
+              </a:ext>
+            </a:extLst>
+          </a:blip>
+          <a:srcRect/>
+          <a:stretch>
+            <a:fillRect/>
+          </a:stretch>
+        </p:blipFill>
+        <p:spPr bwMode="auto">
+          <a:xfrm>
+            <a:off x="5019675" y="3429000"/>
+            <a:ext cx="2112497" cy="1584373"/>
+          </a:xfrm>
+          <a:prstGeom prst="rect">
+            <a:avLst/>
+          </a:prstGeom>
+          <a:noFill/>
+          <a:extLst>
+            <a:ext uri="{909E8E84-426E-40DD-AFC4-6F175D3DCCD1}">
+              <a14:hiddenFill xmlns:a14="http://schemas.microsoft.com/office/drawing/2010/main">
+                <a:solidFill>
+                  <a:srgbClr val="FFFFFF"/>
+                </a:solidFill>
+              </a14:hiddenFill>
+            </a:ext>
+          </a:extLst>
+        </p:spPr>
+      </p:pic>
+      <p:pic>
+        <p:nvPicPr>
+          <p:cNvPr id="6" name="Ábra 5">
+            <a:extLst>
+              <a:ext uri="{FF2B5EF4-FFF2-40B4-BE49-F238E27FC236}">
+                <a16:creationId xmlns:a16="http://schemas.microsoft.com/office/drawing/2014/main" id="{CE4068B4-0B37-4F2C-9C84-01211241ADC8}"/>
+              </a:ext>
+            </a:extLst>
+          </p:cNvPr>
+          <p:cNvPicPr>
+            <a:picLocks noChangeAspect="1"/>
+          </p:cNvPicPr>
+          <p:nvPr/>
+        </p:nvPicPr>
+        <p:blipFill>
+          <a:blip r:embed="rId5">
+            <a:alphaModFix/>
+            <a:extLst>
+              <a:ext uri="{96DAC541-7B7A-43D3-8B79-37D633B846F1}">
+                <asvg:svgBlip xmlns:asvg="http://schemas.microsoft.com/office/drawing/2016/SVG/main" r:embed="rId6"/>
+              </a:ext>
+            </a:extLst>
+          </a:blip>
+          <a:stretch>
+            <a:fillRect/>
+          </a:stretch>
+        </p:blipFill>
+        <p:spPr>
+          <a:xfrm>
+            <a:off x="612282" y="3734601"/>
+            <a:ext cx="3580045" cy="3691289"/>
+          </a:xfrm>
+          <a:prstGeom prst="rect">
+            <a:avLst/>
+          </a:prstGeom>
+        </p:spPr>
+      </p:pic>
       <p:sp>
         <p:nvSpPr>
           <p:cNvPr id="164" name="Google Shape;164;p7"/>
@@ -10118,7 +11173,7 @@
           <p:nvPr/>
         </p:nvPicPr>
         <p:blipFill>
-          <a:blip r:embed="rId3"/>
+          <a:blip r:embed="rId7"/>
           <a:stretch>
             <a:fillRect/>
           </a:stretch>
@@ -10131,6 +11186,11 @@
           <a:prstGeom prst="rect">
             <a:avLst/>
           </a:prstGeom>
+          <a:ln w="38100">
+            <a:solidFill>
+              <a:srgbClr val="479FFF"/>
+            </a:solidFill>
+          </a:ln>
         </p:spPr>
       </p:pic>
       <p:pic>
@@ -10148,7 +11208,7 @@
           <p:nvPr/>
         </p:nvPicPr>
         <p:blipFill>
-          <a:blip r:embed="rId4">
+          <a:blip r:embed="rId8">
             <a:extLst>
               <a:ext uri="{28A0092B-C50C-407E-A947-70E740481C1C}">
                 <a14:useLocalDpi xmlns:a14="http://schemas.microsoft.com/office/drawing/2010/main" val="0"/>
@@ -10185,13 +11245,13 @@
   <p:clrMapOvr>
     <a:masterClrMapping/>
   </p:clrMapOvr>
-  <mc:AlternateContent xmlns:mc="http://schemas.openxmlformats.org/markup-compatibility/2006" xmlns:p159="http://schemas.microsoft.com/office/powerpoint/2015/09/main">
-    <mc:Choice Requires="p159">
+  <mc:AlternateContent xmlns:mc="http://schemas.openxmlformats.org/markup-compatibility/2006">
+    <mc:Choice xmlns:p159="http://schemas.microsoft.com/office/powerpoint/2015/09/main" Requires="p159">
       <p:transition xmlns:p14="http://schemas.microsoft.com/office/powerpoint/2010/main" spd="slow" p14:dur="2000">
         <p159:morph option="byObject"/>
       </p:transition>
     </mc:Choice>
-    <mc:Fallback xmlns="">
+    <mc:Fallback>
       <p:transition spd="slow">
         <p:fade/>
       </p:transition>

--- a/docs/Prezentáció/Corelytics presentation.pptx
+++ b/docs/Prezentáció/Corelytics presentation.pptx
@@ -5,7 +5,7 @@
     <p:sldMasterId id="2147483660" r:id="rId1"/>
   </p:sldMasterIdLst>
   <p:notesMasterIdLst>
-    <p:notesMasterId r:id="rId14"/>
+    <p:notesMasterId r:id="rId13"/>
   </p:notesMasterIdLst>
   <p:sldIdLst>
     <p:sldId id="256" r:id="rId2"/>
@@ -18,8 +18,7 @@
     <p:sldId id="267" r:id="rId9"/>
     <p:sldId id="262" r:id="rId10"/>
     <p:sldId id="263" r:id="rId11"/>
-    <p:sldId id="265" r:id="rId12"/>
-    <p:sldId id="268" r:id="rId13"/>
+    <p:sldId id="268" r:id="rId12"/>
   </p:sldIdLst>
   <p:sldSz cx="12192000" cy="6858000"/>
   <p:notesSz cx="6858000" cy="9144000"/>
@@ -134,7 +133,7 @@
       </p15:sldGuideLst>
     </p:ext>
     <p:ext uri="GoogleSlidesCustomDataVersion2">
-      <go:slidesCustomData xmlns:go="http://customooxmlschemas.google.com/" xmlns:ahyp="http://schemas.microsoft.com/office/drawing/2018/hyperlinkcolor" xmlns:p15="http://schemas.microsoft.com/office/powerpoint/2012/main" xmlns:p14="http://schemas.microsoft.com/office/powerpoint/2010/main" xmlns:com="http://schemas.openxmlformats.org/drawingml/2006/compatibility" xmlns:pvml="urn:schemas-microsoft-com:office:powerpoint" xmlns:v="urn:schemas-microsoft-com:vml" xmlns:o="urn:schemas-microsoft-com:office:office" xmlns:dgm="http://schemas.openxmlformats.org/drawingml/2006/diagram" xmlns:c="http://schemas.openxmlformats.org/drawingml/2006/chart" xmlns:mv="urn:schemas-microsoft-com:mac:vml" xmlns:mc="http://schemas.openxmlformats.org/markup-compatibility/2006" xmlns="" r:id="rId17" roundtripDataSignature="AMtx7mjjDdjNFoi+xjUiqIqv79dYRrq6Dw=="/>
+      <go:slidesCustomData xmlns="" xmlns:mc="http://schemas.openxmlformats.org/markup-compatibility/2006" xmlns:mv="urn:schemas-microsoft-com:mac:vml" xmlns:c="http://schemas.openxmlformats.org/drawingml/2006/chart" xmlns:dgm="http://schemas.openxmlformats.org/drawingml/2006/diagram" xmlns:o="urn:schemas-microsoft-com:office:office" xmlns:v="urn:schemas-microsoft-com:vml" xmlns:pvml="urn:schemas-microsoft-com:office:powerpoint" xmlns:com="http://schemas.openxmlformats.org/drawingml/2006/compatibility" xmlns:p14="http://schemas.microsoft.com/office/powerpoint/2010/main" xmlns:p15="http://schemas.microsoft.com/office/powerpoint/2012/main" xmlns:ahyp="http://schemas.microsoft.com/office/drawing/2018/hyperlinkcolor" xmlns:go="http://customooxmlschemas.google.com/" r:id="rId17" roundtripDataSignature="AMtx7mjjDdjNFoi+xjUiqIqv79dYRrq6Dw=="/>
     </p:ext>
   </p:extLst>
 </p:presentation>
@@ -693,110 +692,6 @@
 </p:notes>
 </file>
 
-<file path=ppt/notesSlides/notesSlide10.xml><?xml version="1.0" encoding="utf-8"?>
-<p:notes xmlns:a="http://schemas.openxmlformats.org/drawingml/2006/main" xmlns:r="http://schemas.openxmlformats.org/officeDocument/2006/relationships" xmlns:p="http://schemas.openxmlformats.org/presentationml/2006/main" showMasterSp="0" showMasterPhAnim="0">
-  <p:cSld>
-    <p:spTree>
-      <p:nvGrpSpPr>
-        <p:cNvPr id="1" name="Shape 178"/>
-        <p:cNvGrpSpPr/>
-        <p:nvPr/>
-      </p:nvGrpSpPr>
-      <p:grpSpPr>
-        <a:xfrm>
-          <a:off x="0" y="0"/>
-          <a:ext cx="0" cy="0"/>
-          <a:chOff x="0" y="0"/>
-          <a:chExt cx="0" cy="0"/>
-        </a:xfrm>
-      </p:grpSpPr>
-      <p:sp>
-        <p:nvSpPr>
-          <p:cNvPr id="179" name="Google Shape;179;p10:notes"/>
-          <p:cNvSpPr txBox="1">
-            <a:spLocks noGrp="1"/>
-          </p:cNvSpPr>
-          <p:nvPr>
-            <p:ph type="body" idx="1"/>
-          </p:nvPr>
-        </p:nvSpPr>
-        <p:spPr>
-          <a:xfrm>
-            <a:off x="685800" y="4343400"/>
-            <a:ext cx="5486400" cy="4114800"/>
-          </a:xfrm>
-          <a:prstGeom prst="rect">
-            <a:avLst/>
-          </a:prstGeom>
-        </p:spPr>
-        <p:txBody>
-          <a:bodyPr spcFirstLastPara="1" wrap="square" lIns="91425" tIns="91425" rIns="91425" bIns="91425" anchor="t" anchorCtr="0">
-            <a:noAutofit/>
-          </a:bodyPr>
-          <a:lstStyle/>
-          <a:p>
-            <a:pPr marL="0" lvl="0" indent="0" algn="l" rtl="0">
-              <a:spcBef>
-                <a:spcPts val="0"/>
-              </a:spcBef>
-              <a:spcAft>
-                <a:spcPts val="0"/>
-              </a:spcAft>
-              <a:buNone/>
-            </a:pPr>
-            <a:endParaRPr/>
-          </a:p>
-        </p:txBody>
-      </p:sp>
-      <p:sp>
-        <p:nvSpPr>
-          <p:cNvPr id="180" name="Google Shape;180;p10:notes"/>
-          <p:cNvSpPr>
-            <a:spLocks noGrp="1" noRot="1" noChangeAspect="1"/>
-          </p:cNvSpPr>
-          <p:nvPr>
-            <p:ph type="sldImg" idx="2"/>
-          </p:nvPr>
-        </p:nvSpPr>
-        <p:spPr>
-          <a:xfrm>
-            <a:off x="381000" y="685800"/>
-            <a:ext cx="6096000" cy="3429000"/>
-          </a:xfrm>
-          <a:custGeom>
-            <a:avLst/>
-            <a:gdLst/>
-            <a:ahLst/>
-            <a:cxnLst/>
-            <a:rect l="l" t="t" r="r" b="b"/>
-            <a:pathLst>
-              <a:path w="120000" h="120000" extrusionOk="0">
-                <a:moveTo>
-                  <a:pt x="0" y="0"/>
-                </a:moveTo>
-                <a:lnTo>
-                  <a:pt x="120000" y="0"/>
-                </a:lnTo>
-                <a:lnTo>
-                  <a:pt x="120000" y="120000"/>
-                </a:lnTo>
-                <a:lnTo>
-                  <a:pt x="0" y="120000"/>
-                </a:lnTo>
-                <a:close/>
-              </a:path>
-            </a:pathLst>
-          </a:custGeom>
-        </p:spPr>
-      </p:sp>
-    </p:spTree>
-  </p:cSld>
-  <p:clrMapOvr>
-    <a:masterClrMapping/>
-  </p:clrMapOvr>
-</p:notes>
-</file>
-
 <file path=ppt/notesSlides/notesSlide2.xml><?xml version="1.0" encoding="utf-8"?>
 <p:notes xmlns:a="http://schemas.openxmlformats.org/drawingml/2006/main" xmlns:r="http://schemas.openxmlformats.org/officeDocument/2006/relationships" xmlns:p="http://schemas.openxmlformats.org/presentationml/2006/main" showMasterSp="0" showMasterPhAnim="0">
   <p:cSld>
@@ -1851,13 +1746,13 @@
   <p:clrMapOvr>
     <a:masterClrMapping/>
   </p:clrMapOvr>
-  <mc:AlternateContent xmlns:mc="http://schemas.openxmlformats.org/markup-compatibility/2006">
-    <mc:Choice xmlns:p159="http://schemas.microsoft.com/office/powerpoint/2015/09/main" Requires="p159">
+  <mc:AlternateContent xmlns:mc="http://schemas.openxmlformats.org/markup-compatibility/2006" xmlns:p159="http://schemas.microsoft.com/office/powerpoint/2015/09/main">
+    <mc:Choice Requires="p159">
       <p:transition xmlns:p14="http://schemas.microsoft.com/office/powerpoint/2010/main" spd="slow" p14:dur="2000">
         <p159:morph option="byObject"/>
       </p:transition>
     </mc:Choice>
-    <mc:Fallback>
+    <mc:Fallback xmlns="">
       <p:transition spd="slow">
         <p:fade/>
       </p:transition>
@@ -2586,13 +2481,13 @@
   <p:clrMapOvr>
     <a:masterClrMapping/>
   </p:clrMapOvr>
-  <mc:AlternateContent xmlns:mc="http://schemas.openxmlformats.org/markup-compatibility/2006">
-    <mc:Choice xmlns:p159="http://schemas.microsoft.com/office/powerpoint/2015/09/main" Requires="p159">
+  <mc:AlternateContent xmlns:mc="http://schemas.openxmlformats.org/markup-compatibility/2006" xmlns:p159="http://schemas.microsoft.com/office/powerpoint/2015/09/main">
+    <mc:Choice Requires="p159">
       <p:transition xmlns:p14="http://schemas.microsoft.com/office/powerpoint/2010/main" spd="slow" p14:dur="2000">
         <p159:morph option="byObject"/>
       </p:transition>
     </mc:Choice>
-    <mc:Fallback>
+    <mc:Fallback xmlns="">
       <p:transition spd="slow">
         <p:fade/>
       </p:transition>
@@ -5442,13 +5337,13 @@
   <p:clrMapOvr>
     <a:masterClrMapping/>
   </p:clrMapOvr>
-  <mc:AlternateContent xmlns:mc="http://schemas.openxmlformats.org/markup-compatibility/2006">
-    <mc:Choice xmlns:p159="http://schemas.microsoft.com/office/powerpoint/2015/09/main" Requires="p159">
+  <mc:AlternateContent xmlns:mc="http://schemas.openxmlformats.org/markup-compatibility/2006" xmlns:p159="http://schemas.microsoft.com/office/powerpoint/2015/09/main">
+    <mc:Choice Requires="p159">
       <p:transition xmlns:p14="http://schemas.microsoft.com/office/powerpoint/2010/main" spd="slow" p14:dur="2000">
         <p159:morph option="byObject"/>
       </p:transition>
     </mc:Choice>
-    <mc:Fallback>
+    <mc:Fallback xmlns="">
       <p:transition spd="slow">
         <p:fade/>
       </p:transition>
@@ -6018,13 +5913,13 @@
   <p:clrMapOvr>
     <a:masterClrMapping/>
   </p:clrMapOvr>
-  <mc:AlternateContent xmlns:mc="http://schemas.openxmlformats.org/markup-compatibility/2006">
-    <mc:Choice xmlns:p159="http://schemas.microsoft.com/office/powerpoint/2015/09/main" Requires="p159">
+  <mc:AlternateContent xmlns:mc="http://schemas.openxmlformats.org/markup-compatibility/2006" xmlns:p159="http://schemas.microsoft.com/office/powerpoint/2015/09/main">
+    <mc:Choice Requires="p159">
       <p:transition xmlns:p14="http://schemas.microsoft.com/office/powerpoint/2010/main" spd="slow" p14:dur="2000">
         <p159:morph option="byObject"/>
       </p:transition>
     </mc:Choice>
-    <mc:Fallback>
+    <mc:Fallback xmlns="">
       <p:transition spd="slow">
         <p:fade/>
       </p:transition>
@@ -6034,309 +5929,6 @@
 </file>
 
 <file path=ppt/slides/slide11.xml><?xml version="1.0" encoding="utf-8"?>
-<p:sld xmlns:a="http://schemas.openxmlformats.org/drawingml/2006/main" xmlns:r="http://schemas.openxmlformats.org/officeDocument/2006/relationships" xmlns:p="http://schemas.openxmlformats.org/presentationml/2006/main">
-  <p:cSld>
-    <p:spTree>
-      <p:nvGrpSpPr>
-        <p:cNvPr id="1" name="Shape 181"/>
-        <p:cNvGrpSpPr/>
-        <p:nvPr/>
-      </p:nvGrpSpPr>
-      <p:grpSpPr>
-        <a:xfrm>
-          <a:off x="0" y="0"/>
-          <a:ext cx="0" cy="0"/>
-          <a:chOff x="0" y="0"/>
-          <a:chExt cx="0" cy="0"/>
-        </a:xfrm>
-      </p:grpSpPr>
-      <p:pic>
-        <p:nvPicPr>
-          <p:cNvPr id="5" name="Ábra 4">
-            <a:extLst>
-              <a:ext uri="{FF2B5EF4-FFF2-40B4-BE49-F238E27FC236}">
-                <a16:creationId xmlns:a16="http://schemas.microsoft.com/office/drawing/2014/main" id="{8ECF2034-D1A3-48B5-9E77-062129C09808}"/>
-              </a:ext>
-            </a:extLst>
-          </p:cNvPr>
-          <p:cNvPicPr>
-            <a:picLocks noChangeAspect="1"/>
-          </p:cNvPicPr>
-          <p:nvPr/>
-        </p:nvPicPr>
-        <p:blipFill>
-          <a:blip r:embed="rId3">
-            <a:alphaModFix/>
-            <a:extLst>
-              <a:ext uri="{96DAC541-7B7A-43D3-8B79-37D633B846F1}">
-                <asvg:svgBlip xmlns:asvg="http://schemas.microsoft.com/office/drawing/2016/SVG/main" r:embed="rId4"/>
-              </a:ext>
-            </a:extLst>
-          </a:blip>
-          <a:stretch>
-            <a:fillRect/>
-          </a:stretch>
-        </p:blipFill>
-        <p:spPr>
-          <a:xfrm>
-            <a:off x="612282" y="3734601"/>
-            <a:ext cx="3580045" cy="3691289"/>
-          </a:xfrm>
-          <a:prstGeom prst="rect">
-            <a:avLst/>
-          </a:prstGeom>
-        </p:spPr>
-      </p:pic>
-      <p:sp>
-        <p:nvSpPr>
-          <p:cNvPr id="182" name="Google Shape;182;p10"/>
-          <p:cNvSpPr txBox="1">
-            <a:spLocks noGrp="1"/>
-          </p:cNvSpPr>
-          <p:nvPr>
-            <p:ph type="title"/>
-          </p:nvPr>
-        </p:nvSpPr>
-        <p:spPr>
-          <a:prstGeom prst="rect">
-            <a:avLst/>
-          </a:prstGeom>
-          <a:noFill/>
-          <a:ln>
-            <a:noFill/>
-          </a:ln>
-        </p:spPr>
-        <p:txBody>
-          <a:bodyPr spcFirstLastPara="1" wrap="square" lIns="91425" tIns="45700" rIns="91425" bIns="45700" anchor="ctr" anchorCtr="0">
-            <a:normAutofit/>
-          </a:bodyPr>
-          <a:lstStyle/>
-          <a:p>
-            <a:pPr marL="0" lvl="0" indent="0" algn="l" rtl="0">
-              <a:lnSpc>
-                <a:spcPct val="90000"/>
-              </a:lnSpc>
-              <a:spcBef>
-                <a:spcPts val="0"/>
-              </a:spcBef>
-              <a:spcAft>
-                <a:spcPts val="0"/>
-              </a:spcAft>
-              <a:buClr>
-                <a:srgbClr val="000000"/>
-              </a:buClr>
-              <a:buSzPts val="4400"/>
-              <a:buFont typeface="Cambria"/>
-              <a:buNone/>
-            </a:pPr>
-            <a:r>
-              <a:rPr lang="hu-HU" sz="4400" i="0" u="none" strike="noStrike" dirty="0">
-                <a:solidFill>
-                  <a:srgbClr val="000000"/>
-                </a:solidFill>
-                <a:latin typeface="Cambria"/>
-                <a:ea typeface="Cambria"/>
-                <a:cs typeface="Cambria"/>
-                <a:sym typeface="Cambria"/>
-              </a:rPr>
-              <a:t>9. Demó és Kérdések</a:t>
-            </a:r>
-            <a:endParaRPr dirty="0">
-              <a:latin typeface="Cambria"/>
-              <a:ea typeface="Cambria"/>
-              <a:cs typeface="Cambria"/>
-              <a:sym typeface="Cambria"/>
-            </a:endParaRPr>
-          </a:p>
-        </p:txBody>
-      </p:sp>
-      <p:sp>
-        <p:nvSpPr>
-          <p:cNvPr id="183" name="Google Shape;183;p10"/>
-          <p:cNvSpPr txBox="1">
-            <a:spLocks noGrp="1"/>
-          </p:cNvSpPr>
-          <p:nvPr>
-            <p:ph idx="1"/>
-          </p:nvPr>
-        </p:nvSpPr>
-        <p:spPr>
-          <a:prstGeom prst="rect">
-            <a:avLst/>
-          </a:prstGeom>
-          <a:noFill/>
-          <a:ln>
-            <a:noFill/>
-          </a:ln>
-        </p:spPr>
-        <p:txBody>
-          <a:bodyPr spcFirstLastPara="1" wrap="square" lIns="91425" tIns="45700" rIns="91425" bIns="45700" anchor="t" anchorCtr="0">
-            <a:normAutofit/>
-          </a:bodyPr>
-          <a:lstStyle/>
-          <a:p>
-            <a:pPr marL="0" indent="0" algn="ctr">
-              <a:spcBef>
-                <a:spcPts val="0"/>
-              </a:spcBef>
-              <a:buClr>
-                <a:srgbClr val="000000"/>
-              </a:buClr>
-              <a:buSzPts val="1800"/>
-              <a:buNone/>
-            </a:pPr>
-            <a:r>
-              <a:rPr lang="hu-HU" sz="1800" b="0" i="0" u="none" strike="noStrike" dirty="0">
-                <a:solidFill>
-                  <a:srgbClr val="000000"/>
-                </a:solidFill>
-                <a:latin typeface="Arial"/>
-                <a:ea typeface="Arial"/>
-                <a:cs typeface="Arial"/>
-                <a:sym typeface="Arial"/>
-              </a:rPr>
-              <a:t> </a:t>
-            </a:r>
-            <a:br>
-              <a:rPr lang="hu-HU" sz="1800" b="0" i="0" u="none" strike="noStrike" dirty="0">
-                <a:solidFill>
-                  <a:srgbClr val="000000"/>
-                </a:solidFill>
-                <a:latin typeface="Arial"/>
-                <a:ea typeface="Arial"/>
-                <a:cs typeface="Arial"/>
-                <a:sym typeface="Arial"/>
-              </a:rPr>
-            </a:br>
-            <a:r>
-              <a:rPr lang="hu-HU" b="0" i="0" u="none" strike="noStrike" dirty="0">
-                <a:solidFill>
-                  <a:srgbClr val="000000"/>
-                </a:solidFill>
-                <a:latin typeface="Times New Roman"/>
-                <a:ea typeface="Arial"/>
-                <a:cs typeface="Times New Roman"/>
-                <a:sym typeface="Arial"/>
-              </a:rPr>
-              <a:t>Videós </a:t>
-            </a:r>
-            <a:r>
-              <a:rPr lang="hu-HU" dirty="0">
-                <a:solidFill>
-                  <a:srgbClr val="000000"/>
-                </a:solidFill>
-                <a:latin typeface="Times New Roman"/>
-                <a:ea typeface="Arial"/>
-                <a:cs typeface="Times New Roman"/>
-                <a:sym typeface="Arial"/>
-              </a:rPr>
-              <a:t>bemutató a </a:t>
-            </a:r>
-            <a:r>
-              <a:rPr lang="hu-HU" dirty="0" err="1">
-                <a:solidFill>
-                  <a:srgbClr val="000000"/>
-                </a:solidFill>
-                <a:latin typeface="Times New Roman"/>
-                <a:ea typeface="Arial"/>
-                <a:cs typeface="Times New Roman"/>
-                <a:sym typeface="Arial"/>
-              </a:rPr>
-              <a:t>Corelytics</a:t>
-            </a:r>
-            <a:r>
-              <a:rPr lang="hu-HU" dirty="0">
-                <a:solidFill>
-                  <a:srgbClr val="000000"/>
-                </a:solidFill>
-                <a:latin typeface="Times New Roman"/>
-                <a:ea typeface="Arial"/>
-                <a:cs typeface="Times New Roman"/>
-                <a:sym typeface="Arial"/>
-              </a:rPr>
-              <a:t> platformról!</a:t>
-            </a:r>
-            <a:endParaRPr dirty="0">
-              <a:latin typeface="Times New Roman"/>
-              <a:cs typeface="Times New Roman"/>
-            </a:endParaRPr>
-          </a:p>
-        </p:txBody>
-      </p:sp>
-      <p:sp>
-        <p:nvSpPr>
-          <p:cNvPr id="2" name="Téglalap 1">
-            <a:extLst>
-              <a:ext uri="{FF2B5EF4-FFF2-40B4-BE49-F238E27FC236}">
-                <a16:creationId xmlns:a16="http://schemas.microsoft.com/office/drawing/2014/main" id="{24975BF4-4376-4525-A177-137C4065BBFE}"/>
-              </a:ext>
-            </a:extLst>
-          </p:cNvPr>
-          <p:cNvSpPr/>
-          <p:nvPr/>
-        </p:nvSpPr>
-        <p:spPr>
-          <a:xfrm>
-            <a:off x="1713295" y="2764857"/>
-            <a:ext cx="9057373" cy="3327935"/>
-          </a:xfrm>
-          <a:prstGeom prst="rect">
-            <a:avLst/>
-          </a:prstGeom>
-        </p:spPr>
-        <p:style>
-          <a:lnRef idx="2">
-            <a:schemeClr val="accent1">
-              <a:shade val="50000"/>
-            </a:schemeClr>
-          </a:lnRef>
-          <a:fillRef idx="1">
-            <a:schemeClr val="accent1"/>
-          </a:fillRef>
-          <a:effectRef idx="0">
-            <a:schemeClr val="accent1"/>
-          </a:effectRef>
-          <a:fontRef idx="minor">
-            <a:schemeClr val="lt1"/>
-          </a:fontRef>
-        </p:style>
-        <p:txBody>
-          <a:bodyPr lIns="91440" tIns="45720" rIns="91440" bIns="45720" rtlCol="0" anchor="ctr"/>
-          <a:lstStyle/>
-          <a:p>
-            <a:pPr algn="ctr"/>
-            <a:r>
-              <a:rPr lang="hu-HU" dirty="0">
-                <a:ea typeface="Calibri"/>
-                <a:cs typeface="Calibri"/>
-              </a:rPr>
-              <a:t>Ide a video</a:t>
-            </a:r>
-            <a:endParaRPr lang="hu-HU" dirty="0"/>
-          </a:p>
-        </p:txBody>
-      </p:sp>
-    </p:spTree>
-  </p:cSld>
-  <p:clrMapOvr>
-    <a:masterClrMapping/>
-  </p:clrMapOvr>
-  <mc:AlternateContent xmlns:mc="http://schemas.openxmlformats.org/markup-compatibility/2006">
-    <mc:Choice xmlns:p159="http://schemas.microsoft.com/office/powerpoint/2015/09/main" Requires="p159">
-      <p:transition xmlns:p14="http://schemas.microsoft.com/office/powerpoint/2010/main" spd="slow" p14:dur="2000">
-        <p159:morph option="byObject"/>
-      </p:transition>
-    </mc:Choice>
-    <mc:Fallback>
-      <p:transition spd="slow">
-        <p:fade/>
-      </p:transition>
-    </mc:Fallback>
-  </mc:AlternateContent>
-</p:sld>
-</file>
-
-<file path=ppt/slides/slide12.xml><?xml version="1.0" encoding="utf-8"?>
 <p:sld xmlns:a="http://schemas.openxmlformats.org/drawingml/2006/main" xmlns:r="http://schemas.openxmlformats.org/officeDocument/2006/relationships" xmlns:p="http://schemas.openxmlformats.org/presentationml/2006/main">
   <p:cSld>
     <p:spTree>
@@ -6453,13 +6045,13 @@
   <p:clrMapOvr>
     <a:masterClrMapping/>
   </p:clrMapOvr>
-  <mc:AlternateContent xmlns:mc="http://schemas.openxmlformats.org/markup-compatibility/2006">
-    <mc:Choice xmlns:p159="http://schemas.microsoft.com/office/powerpoint/2015/09/main" Requires="p159">
+  <mc:AlternateContent xmlns:mc="http://schemas.openxmlformats.org/markup-compatibility/2006" xmlns:p159="http://schemas.microsoft.com/office/powerpoint/2015/09/main">
+    <mc:Choice Requires="p159">
       <p:transition xmlns:p14="http://schemas.microsoft.com/office/powerpoint/2010/main" spd="slow" p14:dur="2000">
         <p159:morph option="byObject"/>
       </p:transition>
     </mc:Choice>
-    <mc:Fallback>
+    <mc:Fallback xmlns="">
       <p:transition spd="slow">
         <p:fade/>
       </p:transition>
@@ -6944,13 +6536,13 @@
   <p:clrMapOvr>
     <a:masterClrMapping/>
   </p:clrMapOvr>
-  <mc:AlternateContent xmlns:mc="http://schemas.openxmlformats.org/markup-compatibility/2006">
-    <mc:Choice xmlns:p159="http://schemas.microsoft.com/office/powerpoint/2015/09/main" Requires="p159">
+  <mc:AlternateContent xmlns:mc="http://schemas.openxmlformats.org/markup-compatibility/2006" xmlns:p159="http://schemas.microsoft.com/office/powerpoint/2015/09/main">
+    <mc:Choice Requires="p159">
       <p:transition xmlns:p14="http://schemas.microsoft.com/office/powerpoint/2010/main" spd="slow" p14:dur="2000">
         <p159:morph option="byObject"/>
       </p:transition>
     </mc:Choice>
-    <mc:Fallback>
+    <mc:Fallback xmlns="">
       <p:transition spd="slow">
         <p:fade/>
       </p:transition>
@@ -7922,13 +7514,13 @@
   <p:clrMapOvr>
     <a:masterClrMapping/>
   </p:clrMapOvr>
-  <mc:AlternateContent xmlns:mc="http://schemas.openxmlformats.org/markup-compatibility/2006">
-    <mc:Choice xmlns:p159="http://schemas.microsoft.com/office/powerpoint/2015/09/main" Requires="p159">
+  <mc:AlternateContent xmlns:mc="http://schemas.openxmlformats.org/markup-compatibility/2006" xmlns:p159="http://schemas.microsoft.com/office/powerpoint/2015/09/main">
+    <mc:Choice Requires="p159">
       <p:transition xmlns:p14="http://schemas.microsoft.com/office/powerpoint/2010/main" spd="slow" p14:dur="2000">
         <p159:morph option="byObject"/>
       </p:transition>
     </mc:Choice>
-    <mc:Fallback>
+    <mc:Fallback xmlns="">
       <p:transition spd="slow">
         <p:fade/>
       </p:transition>
@@ -8470,13 +8062,13 @@
   <p:clrMapOvr>
     <a:masterClrMapping/>
   </p:clrMapOvr>
-  <mc:AlternateContent xmlns:mc="http://schemas.openxmlformats.org/markup-compatibility/2006">
-    <mc:Choice xmlns:p159="http://schemas.microsoft.com/office/powerpoint/2015/09/main" Requires="p159">
+  <mc:AlternateContent xmlns:mc="http://schemas.openxmlformats.org/markup-compatibility/2006" xmlns:p159="http://schemas.microsoft.com/office/powerpoint/2015/09/main">
+    <mc:Choice Requires="p159">
       <p:transition xmlns:p14="http://schemas.microsoft.com/office/powerpoint/2010/main" spd="slow" p14:dur="2000">
         <p159:morph option="byObject"/>
       </p:transition>
     </mc:Choice>
-    <mc:Fallback>
+    <mc:Fallback xmlns="">
       <p:transition spd="slow">
         <p:fade/>
       </p:transition>
@@ -8517,7 +8109,9 @@
           <p:nvPr/>
         </p:nvPicPr>
         <p:blipFill>
-          <a:blip r:embed="rId3"/>
+          <a:blip r:embed="rId3">
+            <a:alphaModFix amt="0"/>
+          </a:blip>
           <a:stretch>
             <a:fillRect/>
           </a:stretch>
@@ -9305,13 +8899,13 @@
   <p:clrMapOvr>
     <a:masterClrMapping/>
   </p:clrMapOvr>
-  <mc:AlternateContent xmlns:mc="http://schemas.openxmlformats.org/markup-compatibility/2006">
-    <mc:Choice xmlns:p159="http://schemas.microsoft.com/office/powerpoint/2015/09/main" Requires="p159">
+  <mc:AlternateContent xmlns:mc="http://schemas.openxmlformats.org/markup-compatibility/2006" xmlns:p159="http://schemas.microsoft.com/office/powerpoint/2015/09/main">
+    <mc:Choice Requires="p159">
       <p:transition xmlns:p14="http://schemas.microsoft.com/office/powerpoint/2010/main" spd="slow" p14:dur="2000">
         <p159:morph option="byObject"/>
       </p:transition>
     </mc:Choice>
-    <mc:Fallback>
+    <mc:Fallback xmlns="">
       <p:transition spd="slow">
         <p:fade/>
       </p:transition>
@@ -9353,6 +8947,7 @@
         </p:nvPicPr>
         <p:blipFill>
           <a:blip r:embed="rId3">
+            <a:alphaModFix amt="0"/>
             <a:extLst>
               <a:ext uri="{96DAC541-7B7A-43D3-8B79-37D633B846F1}">
                 <asvg:svgBlip xmlns:asvg="http://schemas.microsoft.com/office/drawing/2016/SVG/main" r:embed="rId4"/>
@@ -9717,7 +9312,7 @@
         </p:blipFill>
         <p:spPr>
           <a:xfrm>
-            <a:off x="7884655" y="1692088"/>
+            <a:off x="8048460" y="2021727"/>
             <a:ext cx="1846337" cy="4471148"/>
           </a:xfrm>
           <a:prstGeom prst="rect">
@@ -9765,13 +9360,13 @@
   <p:clrMapOvr>
     <a:masterClrMapping/>
   </p:clrMapOvr>
-  <mc:AlternateContent xmlns:mc="http://schemas.openxmlformats.org/markup-compatibility/2006">
-    <mc:Choice xmlns:p159="http://schemas.microsoft.com/office/powerpoint/2015/09/main" Requires="p159">
+  <mc:AlternateContent xmlns:mc="http://schemas.openxmlformats.org/markup-compatibility/2006" xmlns:p159="http://schemas.microsoft.com/office/powerpoint/2015/09/main">
+    <mc:Choice Requires="p159">
       <p:transition xmlns:p14="http://schemas.microsoft.com/office/powerpoint/2010/main" spd="slow" p14:dur="2000">
         <p159:morph option="byObject"/>
       </p:transition>
     </mc:Choice>
-    <mc:Fallback>
+    <mc:Fallback xmlns="">
       <p:transition spd="slow">
         <p:fade/>
       </p:transition>
@@ -9812,7 +9407,9 @@
           <p:nvPr/>
         </p:nvPicPr>
         <p:blipFill>
-          <a:blip r:embed="rId3"/>
+          <a:blip r:embed="rId3">
+            <a:alphaModFix amt="0"/>
+          </a:blip>
           <a:stretch>
             <a:fillRect/>
           </a:stretch>
@@ -10250,13 +9847,13 @@
   <p:clrMapOvr>
     <a:masterClrMapping/>
   </p:clrMapOvr>
-  <mc:AlternateContent xmlns:mc="http://schemas.openxmlformats.org/markup-compatibility/2006">
-    <mc:Choice xmlns:p159="http://schemas.microsoft.com/office/powerpoint/2015/09/main" Requires="p159">
+  <mc:AlternateContent xmlns:mc="http://schemas.openxmlformats.org/markup-compatibility/2006" xmlns:p159="http://schemas.microsoft.com/office/powerpoint/2015/09/main">
+    <mc:Choice Requires="p159">
       <p:transition xmlns:p14="http://schemas.microsoft.com/office/powerpoint/2010/main" spd="slow" p14:dur="2000">
         <p159:morph option="byObject"/>
       </p:transition>
     </mc:Choice>
-    <mc:Fallback>
+    <mc:Fallback xmlns="">
       <p:transition spd="slow">
         <p:fade/>
       </p:transition>
@@ -10298,6 +9895,7 @@
         </p:nvPicPr>
         <p:blipFill>
           <a:blip r:embed="rId2">
+            <a:alphaModFix amt="0"/>
             <a:extLst>
               <a:ext uri="{28A0092B-C50C-407E-A947-70E740481C1C}">
                 <a14:useLocalDpi xmlns:a14="http://schemas.microsoft.com/office/drawing/2010/main" val="0"/>
@@ -10568,13 +10166,13 @@
   <p:clrMapOvr>
     <a:masterClrMapping/>
   </p:clrMapOvr>
-  <mc:AlternateContent xmlns:mc="http://schemas.openxmlformats.org/markup-compatibility/2006">
-    <mc:Choice xmlns:p159="http://schemas.microsoft.com/office/powerpoint/2015/09/main" Requires="p159">
+  <mc:AlternateContent xmlns:mc="http://schemas.openxmlformats.org/markup-compatibility/2006" xmlns:p159="http://schemas.microsoft.com/office/powerpoint/2015/09/main">
+    <mc:Choice Requires="p159">
       <p:transition xmlns:p14="http://schemas.microsoft.com/office/powerpoint/2010/main" spd="slow" p14:dur="2000">
         <p159:morph option="byObject"/>
       </p:transition>
     </mc:Choice>
-    <mc:Fallback>
+    <mc:Fallback xmlns="">
       <p:transition spd="slow">
         <p:fade/>
       </p:transition>
@@ -10616,6 +10214,7 @@
         </p:nvPicPr>
         <p:blipFill>
           <a:blip r:embed="rId3">
+            <a:alphaModFix amt="0"/>
             <a:extLst>
               <a:ext uri="{28A0092B-C50C-407E-A947-70E740481C1C}">
                 <a14:useLocalDpi xmlns:a14="http://schemas.microsoft.com/office/drawing/2010/main" val="0"/>
@@ -10663,6 +10262,7 @@
         </p:nvPicPr>
         <p:blipFill>
           <a:blip r:embed="rId4">
+            <a:alphaModFix amt="0"/>
             <a:extLst>
               <a:ext uri="{28A0092B-C50C-407E-A947-70E740481C1C}">
                 <a14:useLocalDpi xmlns:a14="http://schemas.microsoft.com/office/drawing/2010/main" val="0"/>
@@ -11245,13 +10845,13 @@
   <p:clrMapOvr>
     <a:masterClrMapping/>
   </p:clrMapOvr>
-  <mc:AlternateContent xmlns:mc="http://schemas.openxmlformats.org/markup-compatibility/2006">
-    <mc:Choice xmlns:p159="http://schemas.microsoft.com/office/powerpoint/2015/09/main" Requires="p159">
+  <mc:AlternateContent xmlns:mc="http://schemas.openxmlformats.org/markup-compatibility/2006" xmlns:p159="http://schemas.microsoft.com/office/powerpoint/2015/09/main">
+    <mc:Choice Requires="p159">
       <p:transition xmlns:p14="http://schemas.microsoft.com/office/powerpoint/2010/main" spd="slow" p14:dur="2000">
         <p159:morph option="byObject"/>
       </p:transition>
     </mc:Choice>
-    <mc:Fallback>
+    <mc:Fallback xmlns="">
       <p:transition spd="slow">
         <p:fade/>
       </p:transition>
